--- a/docs/coe-sessions/decks/COE-S01_2026-09-11_ai-assisted-abap.pptx
+++ b/docs/coe-sessions/decks/COE-S01_2026-09-11_ai-assisted-abap.pptx
@@ -4720,21 +4720,73 @@
       <p:grpSpPr/>
       <p:sp>
         <p:nvSpPr>
-          <p:cNvPr id="2" name="Title 1"/>
-          <p:cNvSpPr>
-            <a:spLocks noGrp="1"/>
-          </p:cNvSpPr>
-          <p:nvPr>
-            <p:ph type="ctrTitle"/>
-          </p:nvPr>
-        </p:nvSpPr>
-        <p:spPr/>
-        <p:txBody>
-          <a:bodyPr/>
-          <a:lstStyle/>
-          <a:p>
-            <a:r>
-              <a:rPr sz="4000" b="1">
+          <p:cNvPr id="2" name="Rectangle 1"/>
+          <p:cNvSpPr/>
+          <p:nvPr/>
+        </p:nvSpPr>
+        <p:spPr>
+          <a:xfrm>
+            <a:off x="0" y="2331720"/>
+            <a:ext cx="12191695" cy="54864"/>
+          </a:xfrm>
+          <a:prstGeom prst="rect">
+            <a:avLst/>
+          </a:prstGeom>
+          <a:solidFill>
+            <a:srgbClr val="0A6ED1"/>
+          </a:solidFill>
+          <a:ln>
+            <a:noFill/>
+          </a:ln>
+          <a:effectLst/>
+        </p:spPr>
+        <p:style>
+          <a:lnRef idx="1">
+            <a:schemeClr val="accent1"/>
+          </a:lnRef>
+          <a:fillRef idx="3">
+            <a:schemeClr val="accent1"/>
+          </a:fillRef>
+          <a:effectRef idx="2">
+            <a:schemeClr val="accent1"/>
+          </a:effectRef>
+          <a:fontRef idx="minor">
+            <a:schemeClr val="lt1"/>
+          </a:fontRef>
+        </p:style>
+        <p:txBody>
+          <a:bodyPr rtlCol="0" anchor="ctr"/>
+          <a:lstStyle/>
+          <a:p>
+            <a:pPr algn="ctr"/>
+          </a:p>
+        </p:txBody>
+      </p:sp>
+      <p:sp>
+        <p:nvSpPr>
+          <p:cNvPr id="3" name="TextBox 2"/>
+          <p:cNvSpPr txBox="1"/>
+          <p:nvPr/>
+        </p:nvSpPr>
+        <p:spPr>
+          <a:xfrm>
+            <a:off x="685800" y="1417320"/>
+            <a:ext cx="10607040" cy="914400"/>
+          </a:xfrm>
+          <a:prstGeom prst="rect">
+            <a:avLst/>
+          </a:prstGeom>
+          <a:noFill/>
+        </p:spPr>
+        <p:txBody>
+          <a:bodyPr wrap="square">
+            <a:spAutoFit/>
+          </a:bodyPr>
+          <a:lstStyle/>
+          <a:p>
+            <a:pPr algn="l"/>
+            <a:r>
+              <a:rPr sz="3800" b="1">
                 <a:solidFill>
                   <a:srgbClr val="1A1A1A"/>
                 </a:solidFill>
@@ -4747,21 +4799,33 @@
       </p:sp>
       <p:sp>
         <p:nvSpPr>
-          <p:cNvPr id="3" name="Subtitle 2"/>
-          <p:cNvSpPr>
-            <a:spLocks noGrp="1"/>
-          </p:cNvSpPr>
-          <p:nvPr>
-            <p:ph type="subTitle" idx="1"/>
-          </p:nvPr>
-        </p:nvSpPr>
-        <p:spPr/>
-        <p:txBody>
-          <a:bodyPr/>
-          <a:lstStyle/>
-          <a:p>
-            <a:r>
-              <a:rPr sz="1800">
+          <p:cNvPr id="4" name="TextBox 3"/>
+          <p:cNvSpPr txBox="1"/>
+          <p:nvPr/>
+        </p:nvSpPr>
+        <p:spPr>
+          <a:xfrm>
+            <a:off x="685800" y="2606040"/>
+            <a:ext cx="10607040" cy="1463040"/>
+          </a:xfrm>
+          <a:prstGeom prst="rect">
+            <a:avLst/>
+          </a:prstGeom>
+          <a:noFill/>
+        </p:spPr>
+        <p:txBody>
+          <a:bodyPr wrap="square">
+            <a:spAutoFit/>
+          </a:bodyPr>
+          <a:lstStyle/>
+          <a:p>
+            <a:pPr>
+              <a:spcAft>
+                <a:spcPts val="600"/>
+              </a:spcAft>
+            </a:pPr>
+            <a:r>
+              <a:rPr sz="1700" b="0">
                 <a:solidFill>
                   <a:srgbClr val="5A5A5A"/>
                 </a:solidFill>
@@ -4771,8 +4835,13 @@
             </a:r>
           </a:p>
           <a:p>
-            <a:r>
-              <a:rPr sz="1800">
+            <a:pPr>
+              <a:spcAft>
+                <a:spcPts val="600"/>
+              </a:spcAft>
+            </a:pPr>
+            <a:r>
+              <a:rPr sz="1700" b="0">
                 <a:solidFill>
                   <a:srgbClr val="5A5A5A"/>
                 </a:solidFill>
@@ -4782,8 +4851,13 @@
             </a:r>
           </a:p>
           <a:p>
-            <a:r>
-              <a:rPr sz="1800">
+            <a:pPr>
+              <a:spcAft>
+                <a:spcPts val="600"/>
+              </a:spcAft>
+            </a:pPr>
+            <a:r>
+              <a:rPr sz="1700" b="0">
                 <a:solidFill>
                   <a:srgbClr val="5A5A5A"/>
                 </a:solidFill>
@@ -4814,161 +4888,14 @@
       <p:grpSpPr/>
       <p:sp>
         <p:nvSpPr>
-          <p:cNvPr id="2" name="Title 1"/>
-          <p:cNvSpPr>
-            <a:spLocks noGrp="1"/>
-          </p:cNvSpPr>
-          <p:nvPr>
-            <p:ph type="title"/>
-          </p:nvPr>
-        </p:nvSpPr>
-        <p:spPr/>
-        <p:txBody>
-          <a:bodyPr/>
-          <a:lstStyle/>
-          <a:p>
-            <a:r>
-              <a:rPr sz="3000" b="1">
-                <a:solidFill>
-                  <a:srgbClr val="1A1A1A"/>
-                </a:solidFill>
-                <a:latin typeface="Segoe UI"/>
-              </a:rPr>
-              <a:t>DEMO 3 — The Guardrail</a:t>
-            </a:r>
-          </a:p>
-        </p:txBody>
-      </p:sp>
-      <p:sp>
-        <p:nvSpPr>
-          <p:cNvPr id="3" name="Content Placeholder 2"/>
-          <p:cNvSpPr>
-            <a:spLocks noGrp="1"/>
-          </p:cNvSpPr>
-          <p:nvPr>
-            <p:ph idx="1"/>
-          </p:nvPr>
+          <p:cNvPr id="2" name="TextBox 1"/>
+          <p:cNvSpPr txBox="1"/>
+          <p:nvPr/>
         </p:nvSpPr>
         <p:spPr>
           <a:xfrm>
-            <a:ext cx="10789920" cy="0"/>
-          </a:xfrm>
-        </p:spPr>
-        <p:txBody>
-          <a:bodyPr wrap="square"/>
-          <a:lstStyle/>
-          <a:p>
-            <a:pPr>
-              <a:spcAft>
-                <a:spcPts val="800"/>
-              </a:spcAft>
-            </a:pPr>
-            <a:r>
-              <a:rPr sz="1900">
-                <a:solidFill>
-                  <a:srgbClr val="1A1A1A"/>
-                </a:solidFill>
-                <a:latin typeface="Segoe UI"/>
-              </a:rPr>
-              <a:t>Ask for something that would consume a </a:t>
-            </a:r>
-            <a:r>
-              <a:rPr b="1" sz="1900">
-                <a:solidFill>
-                  <a:srgbClr val="1A1A1A"/>
-                </a:solidFill>
-                <a:latin typeface="Segoe UI"/>
-              </a:rPr>
-              <a:t>non-released</a:t>
-            </a:r>
-            <a:r>
-              <a:rPr sz="1900">
-                <a:solidFill>
-                  <a:srgbClr val="1A1A1A"/>
-                </a:solidFill>
-                <a:latin typeface="Segoe UI"/>
-              </a:rPr>
-              <a:t> object</a:t>
-            </a:r>
-          </a:p>
-          <a:p>
-            <a:pPr>
-              <a:spcAft>
-                <a:spcPts val="800"/>
-              </a:spcAft>
-            </a:pPr>
-            <a:r>
-              <a:rPr sz="1900">
-                <a:solidFill>
-                  <a:srgbClr val="1A1A1A"/>
-                </a:solidFill>
-                <a:latin typeface="Segoe UI"/>
-              </a:rPr>
-              <a:t>Look at the result — it looks fine. It compiles. Private Edition will accept it.</a:t>
-            </a:r>
-          </a:p>
-          <a:p>
-            <a:pPr>
-              <a:spcAft>
-                <a:spcPts val="800"/>
-              </a:spcAft>
-            </a:pPr>
-            <a:r>
-              <a:rPr sz="1900">
-                <a:solidFill>
-                  <a:srgbClr val="1A1A1A"/>
-                </a:solidFill>
-                <a:latin typeface="Segoe UI"/>
-              </a:rPr>
-              <a:t>Run </a:t>
-            </a:r>
-            <a:r>
-              <a:rPr sz="1900">
-                <a:solidFill>
-                  <a:srgbClr val="1A1A1A"/>
-                </a:solidFill>
-                <a:latin typeface="Consolas"/>
-              </a:rPr>
-              <a:t>/clean-abap-review</a:t>
-            </a:r>
-            <a:r>
-              <a:rPr sz="1900">
-                <a:solidFill>
-                  <a:srgbClr val="1A1A1A"/>
-                </a:solidFill>
-                <a:latin typeface="Segoe UI"/>
-              </a:rPr>
-              <a:t> on it → flagged 🔴</a:t>
-            </a:r>
-          </a:p>
-          <a:p>
-            <a:pPr>
-              <a:spcAft>
-                <a:spcPts val="800"/>
-              </a:spcAft>
-            </a:pPr>
-            <a:r>
-              <a:rPr b="1" sz="1900">
-                <a:solidFill>
-                  <a:srgbClr val="1A1A1A"/>
-                </a:solidFill>
-                <a:latin typeface="Segoe UI"/>
-              </a:rPr>
-              <a:t>The tooling helps. The contract does not move.</a:t>
-            </a:r>
-          </a:p>
-        </p:txBody>
-      </p:sp>
-      <p:sp>
-        <p:nvSpPr>
-          <p:cNvPr id="4" name="TextBox 3"/>
-          <p:cNvSpPr txBox="1"/>
-          <p:nvPr/>
-        </p:nvSpPr>
-        <p:spPr>
-          <a:xfrm>
-            <a:off x="10332720" y="256032"/>
-            <a:ext cx="1645920" cy="365760"/>
+            <a:off x="685800" y="384048"/>
+            <a:ext cx="9326880" cy="868680"/>
           </a:xfrm>
           <a:prstGeom prst="rect">
             <a:avLst/>
@@ -4976,12 +4903,91 @@
           <a:noFill/>
         </p:spPr>
         <p:txBody>
-          <a:bodyPr wrap="none">
+          <a:bodyPr wrap="square" anchor="t">
             <a:spAutoFit/>
           </a:bodyPr>
           <a:lstStyle/>
           <a:p>
             <a:r>
+              <a:rPr sz="2900" b="1">
+                <a:solidFill>
+                  <a:srgbClr val="1A1A1A"/>
+                </a:solidFill>
+                <a:latin typeface="Segoe UI"/>
+              </a:rPr>
+              <a:t>DEMO 3 — The Guardrail</a:t>
+            </a:r>
+          </a:p>
+        </p:txBody>
+      </p:sp>
+      <p:sp>
+        <p:nvSpPr>
+          <p:cNvPr id="3" name="Rectangle 2"/>
+          <p:cNvSpPr/>
+          <p:nvPr/>
+        </p:nvSpPr>
+        <p:spPr>
+          <a:xfrm>
+            <a:off x="685800" y="1316736"/>
+            <a:ext cx="1051560" cy="50292"/>
+          </a:xfrm>
+          <a:prstGeom prst="rect">
+            <a:avLst/>
+          </a:prstGeom>
+          <a:solidFill>
+            <a:srgbClr val="0A6ED1"/>
+          </a:solidFill>
+          <a:ln>
+            <a:noFill/>
+          </a:ln>
+          <a:effectLst/>
+        </p:spPr>
+        <p:style>
+          <a:lnRef idx="1">
+            <a:schemeClr val="accent1"/>
+          </a:lnRef>
+          <a:fillRef idx="3">
+            <a:schemeClr val="accent1"/>
+          </a:fillRef>
+          <a:effectRef idx="2">
+            <a:schemeClr val="accent1"/>
+          </a:effectRef>
+          <a:fontRef idx="minor">
+            <a:schemeClr val="lt1"/>
+          </a:fontRef>
+        </p:style>
+        <p:txBody>
+          <a:bodyPr rtlCol="0" anchor="ctr"/>
+          <a:lstStyle/>
+          <a:p>
+            <a:pPr algn="ctr"/>
+          </a:p>
+        </p:txBody>
+      </p:sp>
+      <p:sp>
+        <p:nvSpPr>
+          <p:cNvPr id="4" name="TextBox 3"/>
+          <p:cNvSpPr txBox="1"/>
+          <p:nvPr/>
+        </p:nvSpPr>
+        <p:spPr>
+          <a:xfrm>
+            <a:off x="10378440" y="457200"/>
+            <a:ext cx="1188720" cy="365760"/>
+          </a:xfrm>
+          <a:prstGeom prst="rect">
+            <a:avLst/>
+          </a:prstGeom>
+          <a:noFill/>
+        </p:spPr>
+        <p:txBody>
+          <a:bodyPr wrap="square">
+            <a:spAutoFit/>
+          </a:bodyPr>
+          <a:lstStyle/>
+          <a:p>
+            <a:pPr algn="r"/>
+            <a:r>
               <a:rPr sz="1200" b="1">
                 <a:solidFill>
                   <a:srgbClr val="0A6ED1"/>
@@ -4989,6 +4995,138 @@
                 <a:latin typeface="Segoe UI"/>
               </a:rPr>
               <a:t>5:00</a:t>
+            </a:r>
+          </a:p>
+        </p:txBody>
+      </p:sp>
+      <p:sp>
+        <p:nvSpPr>
+          <p:cNvPr id="5" name="TextBox 4"/>
+          <p:cNvSpPr txBox="1"/>
+          <p:nvPr/>
+        </p:nvSpPr>
+        <p:spPr>
+          <a:xfrm>
+            <a:off x="685800" y="1600200"/>
+            <a:ext cx="10817352" cy="4709160"/>
+          </a:xfrm>
+          <a:prstGeom prst="rect">
+            <a:avLst/>
+          </a:prstGeom>
+          <a:noFill/>
+        </p:spPr>
+        <p:txBody>
+          <a:bodyPr wrap="square">
+            <a:spAutoFit/>
+          </a:bodyPr>
+          <a:lstStyle/>
+          <a:p>
+            <a:pPr>
+              <a:spcAft>
+                <a:spcPts val="1100"/>
+              </a:spcAft>
+            </a:pPr>
+            <a:r>
+              <a:rPr sz="1900" b="0">
+                <a:solidFill>
+                  <a:srgbClr val="1A1A1A"/>
+                </a:solidFill>
+                <a:latin typeface="Segoe UI"/>
+              </a:rPr>
+              <a:t>•  Ask for something that would consume a </a:t>
+            </a:r>
+            <a:r>
+              <a:rPr sz="1900" b="1">
+                <a:solidFill>
+                  <a:srgbClr val="1A1A1A"/>
+                </a:solidFill>
+                <a:latin typeface="Segoe UI"/>
+              </a:rPr>
+              <a:t>non-released</a:t>
+            </a:r>
+            <a:r>
+              <a:rPr sz="1900" b="0">
+                <a:solidFill>
+                  <a:srgbClr val="1A1A1A"/>
+                </a:solidFill>
+                <a:latin typeface="Segoe UI"/>
+              </a:rPr>
+              <a:t> object</a:t>
+            </a:r>
+          </a:p>
+          <a:p>
+            <a:pPr>
+              <a:spcAft>
+                <a:spcPts val="1100"/>
+              </a:spcAft>
+            </a:pPr>
+            <a:r>
+              <a:rPr sz="1900" b="0">
+                <a:solidFill>
+                  <a:srgbClr val="1A1A1A"/>
+                </a:solidFill>
+                <a:latin typeface="Segoe UI"/>
+              </a:rPr>
+              <a:t>•  Look at the result — it looks fine. It compiles. Private Edition will accept it.</a:t>
+            </a:r>
+          </a:p>
+          <a:p>
+            <a:pPr>
+              <a:spcAft>
+                <a:spcPts val="1100"/>
+              </a:spcAft>
+            </a:pPr>
+            <a:r>
+              <a:rPr sz="1900" b="0">
+                <a:solidFill>
+                  <a:srgbClr val="1A1A1A"/>
+                </a:solidFill>
+                <a:latin typeface="Segoe UI"/>
+              </a:rPr>
+              <a:t>•  Run </a:t>
+            </a:r>
+            <a:r>
+              <a:rPr sz="1900" b="0">
+                <a:solidFill>
+                  <a:srgbClr val="1A1A1A"/>
+                </a:solidFill>
+                <a:latin typeface="Consolas"/>
+              </a:rPr>
+              <a:t>/clean-abap-review</a:t>
+            </a:r>
+            <a:r>
+              <a:rPr sz="1900" b="0">
+                <a:solidFill>
+                  <a:srgbClr val="1A1A1A"/>
+                </a:solidFill>
+                <a:latin typeface="Segoe UI"/>
+              </a:rPr>
+              <a:t> on it → flagged 🔴</a:t>
+            </a:r>
+          </a:p>
+          <a:p>
+            <a:pPr>
+              <a:spcAft>
+                <a:spcPts val="1100"/>
+              </a:spcAft>
+            </a:pPr>
+            <a:r>
+              <a:rPr sz="1900" b="0">
+                <a:solidFill>
+                  <a:srgbClr val="1A1A1A"/>
+                </a:solidFill>
+                <a:latin typeface="Segoe UI"/>
+              </a:rPr>
+              <a:t>•  </a:t>
+            </a:r>
+            <a:r>
+              <a:rPr sz="1900" b="1">
+                <a:solidFill>
+                  <a:srgbClr val="1A1A1A"/>
+                </a:solidFill>
+                <a:latin typeface="Segoe UI"/>
+              </a:rPr>
+              <a:t>The tooling helps. The contract does not move.</a:t>
             </a:r>
           </a:p>
         </p:txBody>
@@ -5013,274 +5151,14 @@
       <p:grpSpPr/>
       <p:sp>
         <p:nvSpPr>
-          <p:cNvPr id="2" name="Title 1"/>
-          <p:cNvSpPr>
-            <a:spLocks noGrp="1"/>
-          </p:cNvSpPr>
-          <p:nvPr>
-            <p:ph type="title"/>
-          </p:nvPr>
-        </p:nvSpPr>
-        <p:spPr/>
-        <p:txBody>
-          <a:bodyPr/>
-          <a:lstStyle/>
-          <a:p>
-            <a:r>
-              <a:rPr sz="3000" b="1">
-                <a:solidFill>
-                  <a:srgbClr val="1A1A1A"/>
-                </a:solidFill>
-                <a:latin typeface="Segoe UI"/>
-              </a:rPr>
-              <a:t>Where It Gets ABAP Wrong</a:t>
-            </a:r>
-          </a:p>
-        </p:txBody>
-      </p:sp>
-      <p:sp>
-        <p:nvSpPr>
-          <p:cNvPr id="3" name="Content Placeholder 2"/>
-          <p:cNvSpPr>
-            <a:spLocks noGrp="1"/>
-          </p:cNvSpPr>
-          <p:nvPr>
-            <p:ph idx="1"/>
-          </p:nvPr>
+          <p:cNvPr id="2" name="TextBox 1"/>
+          <p:cNvSpPr txBox="1"/>
+          <p:nvPr/>
         </p:nvSpPr>
         <p:spPr>
           <a:xfrm>
-            <a:ext cx="10789920" cy="0"/>
-          </a:xfrm>
-        </p:spPr>
-        <p:txBody>
-          <a:bodyPr wrap="square"/>
-          <a:lstStyle/>
-          <a:p>
-            <a:pPr>
-              <a:spcAft>
-                <a:spcPts val="800"/>
-              </a:spcAft>
-            </a:pPr>
-            <a:r>
-              <a:rPr b="1" sz="1900">
-                <a:solidFill>
-                  <a:srgbClr val="1A1A1A"/>
-                </a:solidFill>
-                <a:latin typeface="Segoe UI"/>
-              </a:rPr>
-              <a:t>Invents SAP names that look right</a:t>
-            </a:r>
-            <a:r>
-              <a:rPr sz="1900">
-                <a:solidFill>
-                  <a:srgbClr val="1A1A1A"/>
-                </a:solidFill>
-                <a:latin typeface="Segoe UI"/>
-              </a:rPr>
-              <a:t> — table, field, BAPI. Survives review by anyone who doesn't know the object.</a:t>
-            </a:r>
-          </a:p>
-          <a:p>
-            <a:pPr>
-              <a:spcAft>
-                <a:spcPts val="800"/>
-              </a:spcAft>
-            </a:pPr>
-            <a:r>
-              <a:rPr b="1" sz="1900">
-                <a:solidFill>
-                  <a:srgbClr val="1A1A1A"/>
-                </a:solidFill>
-                <a:latin typeface="Segoe UI"/>
-              </a:rPr>
-              <a:t>Defaults to classic ABAP</a:t>
-            </a:r>
-            <a:r>
-              <a:rPr sz="1900">
-                <a:solidFill>
-                  <a:srgbClr val="1A1A1A"/>
-                </a:solidFill>
-                <a:latin typeface="Segoe UI"/>
-              </a:rPr>
-              <a:t> — </a:t>
-            </a:r>
-            <a:r>
-              <a:rPr sz="1900">
-                <a:solidFill>
-                  <a:srgbClr val="1A1A1A"/>
-                </a:solidFill>
-                <a:latin typeface="Consolas"/>
-              </a:rPr>
-              <a:t>SELECT</a:t>
-            </a:r>
-            <a:r>
-              <a:rPr sz="1900">
-                <a:solidFill>
-                  <a:srgbClr val="1A1A1A"/>
-                </a:solidFill>
-                <a:latin typeface="Segoe UI"/>
-              </a:rPr>
-              <a:t> straight off </a:t>
-            </a:r>
-            <a:r>
-              <a:rPr sz="1900">
-                <a:solidFill>
-                  <a:srgbClr val="1A1A1A"/>
-                </a:solidFill>
-                <a:latin typeface="Consolas"/>
-              </a:rPr>
-              <a:t>VBAK</a:t>
-            </a:r>
-            <a:r>
-              <a:rPr sz="1900">
-                <a:solidFill>
-                  <a:srgbClr val="1A1A1A"/>
-                </a:solidFill>
-                <a:latin typeface="Segoe UI"/>
-              </a:rPr>
-              <a:t>, pre-7.4 syntax, dynpro-era thinking</a:t>
-            </a:r>
-          </a:p>
-          <a:p>
-            <a:pPr>
-              <a:spcAft>
-                <a:spcPts val="800"/>
-              </a:spcAft>
-            </a:pPr>
-            <a:r>
-              <a:rPr b="1" sz="1900">
-                <a:solidFill>
-                  <a:srgbClr val="1A1A1A"/>
-                </a:solidFill>
-                <a:latin typeface="Segoe UI"/>
-              </a:rPr>
-              <a:t>No idea what's released in our system</a:t>
-            </a:r>
-            <a:r>
-              <a:rPr sz="1900">
-                <a:solidFill>
-                  <a:srgbClr val="1A1A1A"/>
-                </a:solidFill>
-                <a:latin typeface="Segoe UI"/>
-              </a:rPr>
-              <a:t> — and Private Edition will happily compile the mistake</a:t>
-            </a:r>
-          </a:p>
-          <a:p>
-            <a:pPr>
-              <a:spcAft>
-                <a:spcPts val="800"/>
-              </a:spcAft>
-            </a:pPr>
-            <a:r>
-              <a:rPr b="1" sz="1900">
-                <a:solidFill>
-                  <a:srgbClr val="1A1A1A"/>
-                </a:solidFill>
-                <a:latin typeface="Segoe UI"/>
-              </a:rPr>
-              <a:t>Confidently wrong on RAP save-sequence rules</a:t>
-            </a:r>
-            <a:r>
-              <a:rPr sz="1900">
-                <a:solidFill>
-                  <a:srgbClr val="1A1A1A"/>
-                </a:solidFill>
-                <a:latin typeface="Segoe UI"/>
-              </a:rPr>
-              <a:t> — side effects in the wrong handler, </a:t>
-            </a:r>
-            <a:r>
-              <a:rPr sz="1900">
-                <a:solidFill>
-                  <a:srgbClr val="1A1A1A"/>
-                </a:solidFill>
-                <a:latin typeface="Consolas"/>
-              </a:rPr>
-              <a:t>REPORTED</a:t>
-            </a:r>
-            <a:r>
-              <a:rPr sz="1900">
-                <a:solidFill>
-                  <a:srgbClr val="1A1A1A"/>
-                </a:solidFill>
-                <a:latin typeface="Segoe UI"/>
-              </a:rPr>
-              <a:t> without </a:t>
-            </a:r>
-            <a:r>
-              <a:rPr sz="1900">
-                <a:solidFill>
-                  <a:srgbClr val="1A1A1A"/>
-                </a:solidFill>
-                <a:latin typeface="Consolas"/>
-              </a:rPr>
-              <a:t>FAILED</a:t>
-            </a:r>
-          </a:p>
-          <a:p>
-            <a:pPr>
-              <a:spcAft>
-                <a:spcPts val="800"/>
-              </a:spcAft>
-            </a:pPr>
-            <a:r>
-              <a:rPr b="1" sz="1900">
-                <a:solidFill>
-                  <a:srgbClr val="1A1A1A"/>
-                </a:solidFill>
-                <a:latin typeface="Segoe UI"/>
-              </a:rPr>
-              <a:t>Writes tests that assert the implementation, not the rule</a:t>
-            </a:r>
-            <a:r>
-              <a:rPr sz="1900">
-                <a:solidFill>
-                  <a:srgbClr val="1A1A1A"/>
-                </a:solidFill>
-                <a:latin typeface="Segoe UI"/>
-              </a:rPr>
-              <a:t> — they pass, and prove nothing</a:t>
-            </a:r>
-          </a:p>
-          <a:p>
-            <a:pPr>
-              <a:spcAft>
-                <a:spcPts val="800"/>
-              </a:spcAft>
-            </a:pPr>
-            <a:r>
-              <a:rPr b="1" sz="1900">
-                <a:solidFill>
-                  <a:srgbClr val="1A1A1A"/>
-                </a:solidFill>
-                <a:latin typeface="Segoe UI"/>
-              </a:rPr>
-              <a:t>Knows nothing of our naming, packages or transports</a:t>
-            </a:r>
-            <a:r>
-              <a:rPr sz="1900">
-                <a:solidFill>
-                  <a:srgbClr val="1A1A1A"/>
-                </a:solidFill>
-                <a:latin typeface="Segoe UI"/>
-              </a:rPr>
-              <a:t> unless we tell it</a:t>
-            </a:r>
-          </a:p>
-        </p:txBody>
-      </p:sp>
-      <p:sp>
-        <p:nvSpPr>
-          <p:cNvPr id="4" name="TextBox 3"/>
-          <p:cNvSpPr txBox="1"/>
-          <p:nvPr/>
-        </p:nvSpPr>
-        <p:spPr>
-          <a:xfrm>
-            <a:off x="10332720" y="256032"/>
-            <a:ext cx="1645920" cy="365760"/>
+            <a:off x="685800" y="384048"/>
+            <a:ext cx="9326880" cy="868680"/>
           </a:xfrm>
           <a:prstGeom prst="rect">
             <a:avLst/>
@@ -5288,12 +5166,91 @@
           <a:noFill/>
         </p:spPr>
         <p:txBody>
-          <a:bodyPr wrap="none">
+          <a:bodyPr wrap="square" anchor="t">
             <a:spAutoFit/>
           </a:bodyPr>
           <a:lstStyle/>
           <a:p>
             <a:r>
+              <a:rPr sz="2900" b="1">
+                <a:solidFill>
+                  <a:srgbClr val="1A1A1A"/>
+                </a:solidFill>
+                <a:latin typeface="Segoe UI"/>
+              </a:rPr>
+              <a:t>Where It Gets ABAP Wrong</a:t>
+            </a:r>
+          </a:p>
+        </p:txBody>
+      </p:sp>
+      <p:sp>
+        <p:nvSpPr>
+          <p:cNvPr id="3" name="Rectangle 2"/>
+          <p:cNvSpPr/>
+          <p:nvPr/>
+        </p:nvSpPr>
+        <p:spPr>
+          <a:xfrm>
+            <a:off x="685800" y="1316736"/>
+            <a:ext cx="1051560" cy="50292"/>
+          </a:xfrm>
+          <a:prstGeom prst="rect">
+            <a:avLst/>
+          </a:prstGeom>
+          <a:solidFill>
+            <a:srgbClr val="0A6ED1"/>
+          </a:solidFill>
+          <a:ln>
+            <a:noFill/>
+          </a:ln>
+          <a:effectLst/>
+        </p:spPr>
+        <p:style>
+          <a:lnRef idx="1">
+            <a:schemeClr val="accent1"/>
+          </a:lnRef>
+          <a:fillRef idx="3">
+            <a:schemeClr val="accent1"/>
+          </a:fillRef>
+          <a:effectRef idx="2">
+            <a:schemeClr val="accent1"/>
+          </a:effectRef>
+          <a:fontRef idx="minor">
+            <a:schemeClr val="lt1"/>
+          </a:fontRef>
+        </p:style>
+        <p:txBody>
+          <a:bodyPr rtlCol="0" anchor="ctr"/>
+          <a:lstStyle/>
+          <a:p>
+            <a:pPr algn="ctr"/>
+          </a:p>
+        </p:txBody>
+      </p:sp>
+      <p:sp>
+        <p:nvSpPr>
+          <p:cNvPr id="4" name="TextBox 3"/>
+          <p:cNvSpPr txBox="1"/>
+          <p:nvPr/>
+        </p:nvSpPr>
+        <p:spPr>
+          <a:xfrm>
+            <a:off x="10378440" y="457200"/>
+            <a:ext cx="1188720" cy="365760"/>
+          </a:xfrm>
+          <a:prstGeom prst="rect">
+            <a:avLst/>
+          </a:prstGeom>
+          <a:noFill/>
+        </p:spPr>
+        <p:txBody>
+          <a:bodyPr wrap="square">
+            <a:spAutoFit/>
+          </a:bodyPr>
+          <a:lstStyle/>
+          <a:p>
+            <a:pPr algn="r"/>
+            <a:r>
               <a:rPr sz="1200" b="1">
                 <a:solidFill>
                   <a:srgbClr val="0A6ED1"/>
@@ -5301,6 +5258,296 @@
                 <a:latin typeface="Segoe UI"/>
               </a:rPr>
               <a:t>8:00</a:t>
+            </a:r>
+          </a:p>
+        </p:txBody>
+      </p:sp>
+      <p:sp>
+        <p:nvSpPr>
+          <p:cNvPr id="5" name="TextBox 4"/>
+          <p:cNvSpPr txBox="1"/>
+          <p:nvPr/>
+        </p:nvSpPr>
+        <p:spPr>
+          <a:xfrm>
+            <a:off x="685800" y="1600200"/>
+            <a:ext cx="10817352" cy="4709160"/>
+          </a:xfrm>
+          <a:prstGeom prst="rect">
+            <a:avLst/>
+          </a:prstGeom>
+          <a:noFill/>
+        </p:spPr>
+        <p:txBody>
+          <a:bodyPr wrap="square">
+            <a:spAutoFit/>
+          </a:bodyPr>
+          <a:lstStyle/>
+          <a:p>
+            <a:pPr>
+              <a:spcAft>
+                <a:spcPts val="1100"/>
+              </a:spcAft>
+            </a:pPr>
+            <a:r>
+              <a:rPr sz="1900" b="0">
+                <a:solidFill>
+                  <a:srgbClr val="1A1A1A"/>
+                </a:solidFill>
+                <a:latin typeface="Segoe UI"/>
+              </a:rPr>
+              <a:t>•  </a:t>
+            </a:r>
+            <a:r>
+              <a:rPr sz="1900" b="1">
+                <a:solidFill>
+                  <a:srgbClr val="1A1A1A"/>
+                </a:solidFill>
+                <a:latin typeface="Segoe UI"/>
+              </a:rPr>
+              <a:t>Invents SAP names that look right</a:t>
+            </a:r>
+            <a:r>
+              <a:rPr sz="1900" b="0">
+                <a:solidFill>
+                  <a:srgbClr val="1A1A1A"/>
+                </a:solidFill>
+                <a:latin typeface="Segoe UI"/>
+              </a:rPr>
+              <a:t> — table, field, BAPI. Survives review by anyone who doesn't know the object.</a:t>
+            </a:r>
+          </a:p>
+          <a:p>
+            <a:pPr>
+              <a:spcAft>
+                <a:spcPts val="1100"/>
+              </a:spcAft>
+            </a:pPr>
+            <a:r>
+              <a:rPr sz="1900" b="0">
+                <a:solidFill>
+                  <a:srgbClr val="1A1A1A"/>
+                </a:solidFill>
+                <a:latin typeface="Segoe UI"/>
+              </a:rPr>
+              <a:t>•  </a:t>
+            </a:r>
+            <a:r>
+              <a:rPr sz="1900" b="1">
+                <a:solidFill>
+                  <a:srgbClr val="1A1A1A"/>
+                </a:solidFill>
+                <a:latin typeface="Segoe UI"/>
+              </a:rPr>
+              <a:t>Defaults to classic ABAP</a:t>
+            </a:r>
+            <a:r>
+              <a:rPr sz="1900" b="0">
+                <a:solidFill>
+                  <a:srgbClr val="1A1A1A"/>
+                </a:solidFill>
+                <a:latin typeface="Segoe UI"/>
+              </a:rPr>
+              <a:t> — </a:t>
+            </a:r>
+            <a:r>
+              <a:rPr sz="1900" b="0">
+                <a:solidFill>
+                  <a:srgbClr val="1A1A1A"/>
+                </a:solidFill>
+                <a:latin typeface="Consolas"/>
+              </a:rPr>
+              <a:t>SELECT</a:t>
+            </a:r>
+            <a:r>
+              <a:rPr sz="1900" b="0">
+                <a:solidFill>
+                  <a:srgbClr val="1A1A1A"/>
+                </a:solidFill>
+                <a:latin typeface="Segoe UI"/>
+              </a:rPr>
+              <a:t> straight off </a:t>
+            </a:r>
+            <a:r>
+              <a:rPr sz="1900" b="0">
+                <a:solidFill>
+                  <a:srgbClr val="1A1A1A"/>
+                </a:solidFill>
+                <a:latin typeface="Consolas"/>
+              </a:rPr>
+              <a:t>VBAK</a:t>
+            </a:r>
+            <a:r>
+              <a:rPr sz="1900" b="0">
+                <a:solidFill>
+                  <a:srgbClr val="1A1A1A"/>
+                </a:solidFill>
+                <a:latin typeface="Segoe UI"/>
+              </a:rPr>
+              <a:t>, pre-7.4 syntax, dynpro-era thinking</a:t>
+            </a:r>
+          </a:p>
+          <a:p>
+            <a:pPr>
+              <a:spcAft>
+                <a:spcPts val="1100"/>
+              </a:spcAft>
+            </a:pPr>
+            <a:r>
+              <a:rPr sz="1900" b="0">
+                <a:solidFill>
+                  <a:srgbClr val="1A1A1A"/>
+                </a:solidFill>
+                <a:latin typeface="Segoe UI"/>
+              </a:rPr>
+              <a:t>•  </a:t>
+            </a:r>
+            <a:r>
+              <a:rPr sz="1900" b="1">
+                <a:solidFill>
+                  <a:srgbClr val="1A1A1A"/>
+                </a:solidFill>
+                <a:latin typeface="Segoe UI"/>
+              </a:rPr>
+              <a:t>No idea what's released in our system</a:t>
+            </a:r>
+            <a:r>
+              <a:rPr sz="1900" b="0">
+                <a:solidFill>
+                  <a:srgbClr val="1A1A1A"/>
+                </a:solidFill>
+                <a:latin typeface="Segoe UI"/>
+              </a:rPr>
+              <a:t> — and Private Edition will happily compile the mistake</a:t>
+            </a:r>
+          </a:p>
+          <a:p>
+            <a:pPr>
+              <a:spcAft>
+                <a:spcPts val="1100"/>
+              </a:spcAft>
+            </a:pPr>
+            <a:r>
+              <a:rPr sz="1900" b="0">
+                <a:solidFill>
+                  <a:srgbClr val="1A1A1A"/>
+                </a:solidFill>
+                <a:latin typeface="Segoe UI"/>
+              </a:rPr>
+              <a:t>•  </a:t>
+            </a:r>
+            <a:r>
+              <a:rPr sz="1900" b="1">
+                <a:solidFill>
+                  <a:srgbClr val="1A1A1A"/>
+                </a:solidFill>
+                <a:latin typeface="Segoe UI"/>
+              </a:rPr>
+              <a:t>Confidently wrong on RAP save-sequence rules</a:t>
+            </a:r>
+            <a:r>
+              <a:rPr sz="1900" b="0">
+                <a:solidFill>
+                  <a:srgbClr val="1A1A1A"/>
+                </a:solidFill>
+                <a:latin typeface="Segoe UI"/>
+              </a:rPr>
+              <a:t> — side effects in the wrong handler, </a:t>
+            </a:r>
+            <a:r>
+              <a:rPr sz="1900" b="0">
+                <a:solidFill>
+                  <a:srgbClr val="1A1A1A"/>
+                </a:solidFill>
+                <a:latin typeface="Consolas"/>
+              </a:rPr>
+              <a:t>REPORTED</a:t>
+            </a:r>
+            <a:r>
+              <a:rPr sz="1900" b="0">
+                <a:solidFill>
+                  <a:srgbClr val="1A1A1A"/>
+                </a:solidFill>
+                <a:latin typeface="Segoe UI"/>
+              </a:rPr>
+              <a:t> without </a:t>
+            </a:r>
+            <a:r>
+              <a:rPr sz="1900" b="0">
+                <a:solidFill>
+                  <a:srgbClr val="1A1A1A"/>
+                </a:solidFill>
+                <a:latin typeface="Consolas"/>
+              </a:rPr>
+              <a:t>FAILED</a:t>
+            </a:r>
+          </a:p>
+          <a:p>
+            <a:pPr>
+              <a:spcAft>
+                <a:spcPts val="1100"/>
+              </a:spcAft>
+            </a:pPr>
+            <a:r>
+              <a:rPr sz="1900" b="0">
+                <a:solidFill>
+                  <a:srgbClr val="1A1A1A"/>
+                </a:solidFill>
+                <a:latin typeface="Segoe UI"/>
+              </a:rPr>
+              <a:t>•  </a:t>
+            </a:r>
+            <a:r>
+              <a:rPr sz="1900" b="1">
+                <a:solidFill>
+                  <a:srgbClr val="1A1A1A"/>
+                </a:solidFill>
+                <a:latin typeface="Segoe UI"/>
+              </a:rPr>
+              <a:t>Writes tests that assert the implementation, not the rule</a:t>
+            </a:r>
+            <a:r>
+              <a:rPr sz="1900" b="0">
+                <a:solidFill>
+                  <a:srgbClr val="1A1A1A"/>
+                </a:solidFill>
+                <a:latin typeface="Segoe UI"/>
+              </a:rPr>
+              <a:t> — they pass, and prove nothing</a:t>
+            </a:r>
+          </a:p>
+          <a:p>
+            <a:pPr>
+              <a:spcAft>
+                <a:spcPts val="1100"/>
+              </a:spcAft>
+            </a:pPr>
+            <a:r>
+              <a:rPr sz="1900" b="0">
+                <a:solidFill>
+                  <a:srgbClr val="1A1A1A"/>
+                </a:solidFill>
+                <a:latin typeface="Segoe UI"/>
+              </a:rPr>
+              <a:t>•  </a:t>
+            </a:r>
+            <a:r>
+              <a:rPr sz="1900" b="1">
+                <a:solidFill>
+                  <a:srgbClr val="1A1A1A"/>
+                </a:solidFill>
+                <a:latin typeface="Segoe UI"/>
+              </a:rPr>
+              <a:t>Knows nothing of our naming, packages or transports</a:t>
+            </a:r>
+            <a:r>
+              <a:rPr sz="1900" b="0">
+                <a:solidFill>
+                  <a:srgbClr val="1A1A1A"/>
+                </a:solidFill>
+                <a:latin typeface="Segoe UI"/>
+              </a:rPr>
+              <a:t> unless we tell it</a:t>
             </a:r>
           </a:p>
         </p:txBody>
@@ -5325,147 +5572,14 @@
       <p:grpSpPr/>
       <p:sp>
         <p:nvSpPr>
-          <p:cNvPr id="2" name="Title 1"/>
-          <p:cNvSpPr>
-            <a:spLocks noGrp="1"/>
-          </p:cNvSpPr>
-          <p:nvPr>
-            <p:ph type="title"/>
-          </p:nvPr>
-        </p:nvSpPr>
-        <p:spPr/>
-        <p:txBody>
-          <a:bodyPr/>
-          <a:lstStyle/>
-          <a:p>
-            <a:r>
-              <a:rPr sz="3000" b="1">
-                <a:solidFill>
-                  <a:srgbClr val="1A1A1A"/>
-                </a:solidFill>
-                <a:latin typeface="Segoe UI"/>
-              </a:rPr>
-              <a:t>The Two Rules That Don't Change</a:t>
-            </a:r>
-          </a:p>
-        </p:txBody>
-      </p:sp>
-      <p:sp>
-        <p:nvSpPr>
-          <p:cNvPr id="3" name="Content Placeholder 2"/>
-          <p:cNvSpPr>
-            <a:spLocks noGrp="1"/>
-          </p:cNvSpPr>
-          <p:nvPr>
-            <p:ph idx="1"/>
-          </p:nvPr>
+          <p:cNvPr id="2" name="TextBox 1"/>
+          <p:cNvSpPr txBox="1"/>
+          <p:nvPr/>
         </p:nvSpPr>
         <p:spPr>
           <a:xfrm>
-            <a:ext cx="10789920" cy="0"/>
-          </a:xfrm>
-        </p:spPr>
-        <p:txBody>
-          <a:bodyPr wrap="square"/>
-          <a:lstStyle/>
-          <a:p>
-            <a:pPr>
-              <a:spcAft>
-                <a:spcPts val="800"/>
-              </a:spcAft>
-            </a:pPr>
-            <a:r>
-              <a:rPr b="1" sz="1900">
-                <a:solidFill>
-                  <a:srgbClr val="1A1A1A"/>
-                </a:solidFill>
-                <a:latin typeface="Segoe UI"/>
-              </a:rPr>
-              <a:t>1. AI authorship is not compliance.</a:t>
-            </a:r>
-            <a:r>
-              <a:rPr sz="1900">
-                <a:solidFill>
-                  <a:srgbClr val="1A1A1A"/>
-                </a:solidFill>
-                <a:latin typeface="Segoe UI"/>
-              </a:rPr>
-              <a:t> A generated </a:t>
-            </a:r>
-            <a:r>
-              <a:rPr sz="1900">
-                <a:solidFill>
-                  <a:srgbClr val="1A1A1A"/>
-                </a:solidFill>
-                <a:latin typeface="Consolas"/>
-              </a:rPr>
-              <a:t>SELECT</a:t>
-            </a:r>
-            <a:r>
-              <a:rPr sz="1900">
-                <a:solidFill>
-                  <a:srgbClr val="1A1A1A"/>
-                </a:solidFill>
-                <a:latin typeface="Segoe UI"/>
-              </a:rPr>
-              <a:t> on a non-released table is still a Clean Core violation. The released-API rules apply to every line regardless of who wrote it.</a:t>
-            </a:r>
-          </a:p>
-          <a:p>
-            <a:pPr>
-              <a:spcAft>
-                <a:spcPts val="800"/>
-              </a:spcAft>
-            </a:pPr>
-            <a:r>
-              <a:rPr b="1" sz="1900">
-                <a:solidFill>
-                  <a:srgbClr val="1A1A1A"/>
-                </a:solidFill>
-                <a:latin typeface="Segoe UI"/>
-              </a:rPr>
-              <a:t>2. Generated code is reviewed exactly like hand-written code.</a:t>
-            </a:r>
-            <a:r>
-              <a:rPr sz="1900">
-                <a:solidFill>
-                  <a:srgbClr val="1A1A1A"/>
-                </a:solidFill>
-                <a:latin typeface="Segoe UI"/>
-              </a:rPr>
-              <a:t> Same checklist, same severities — and </a:t>
-            </a:r>
-            <a:r>
-              <a:rPr b="1" sz="1900">
-                <a:solidFill>
-                  <a:srgbClr val="1A1A1A"/>
-                </a:solidFill>
-                <a:latin typeface="Segoe UI"/>
-              </a:rPr>
-              <a:t>the author owns it</a:t>
-            </a:r>
-            <a:r>
-              <a:rPr sz="1900">
-                <a:solidFill>
-                  <a:srgbClr val="1A1A1A"/>
-                </a:solidFill>
-                <a:latin typeface="Segoe UI"/>
-              </a:rPr>
-              <a:t>. "Copilot wrote it" is not a defence in review.</a:t>
-            </a:r>
-          </a:p>
-        </p:txBody>
-      </p:sp>
-      <p:sp>
-        <p:nvSpPr>
-          <p:cNvPr id="4" name="TextBox 3"/>
-          <p:cNvSpPr txBox="1"/>
-          <p:nvPr/>
-        </p:nvSpPr>
-        <p:spPr>
-          <a:xfrm>
-            <a:off x="10332720" y="256032"/>
-            <a:ext cx="1645920" cy="365760"/>
+            <a:off x="685800" y="384048"/>
+            <a:ext cx="9326880" cy="868680"/>
           </a:xfrm>
           <a:prstGeom prst="rect">
             <a:avLst/>
@@ -5473,12 +5587,91 @@
           <a:noFill/>
         </p:spPr>
         <p:txBody>
-          <a:bodyPr wrap="none">
+          <a:bodyPr wrap="square" anchor="t">
             <a:spAutoFit/>
           </a:bodyPr>
           <a:lstStyle/>
           <a:p>
             <a:r>
+              <a:rPr sz="2900" b="1">
+                <a:solidFill>
+                  <a:srgbClr val="1A1A1A"/>
+                </a:solidFill>
+                <a:latin typeface="Segoe UI"/>
+              </a:rPr>
+              <a:t>The Two Rules That Don't Change</a:t>
+            </a:r>
+          </a:p>
+        </p:txBody>
+      </p:sp>
+      <p:sp>
+        <p:nvSpPr>
+          <p:cNvPr id="3" name="Rectangle 2"/>
+          <p:cNvSpPr/>
+          <p:nvPr/>
+        </p:nvSpPr>
+        <p:spPr>
+          <a:xfrm>
+            <a:off x="685800" y="1316736"/>
+            <a:ext cx="1051560" cy="50292"/>
+          </a:xfrm>
+          <a:prstGeom prst="rect">
+            <a:avLst/>
+          </a:prstGeom>
+          <a:solidFill>
+            <a:srgbClr val="0A6ED1"/>
+          </a:solidFill>
+          <a:ln>
+            <a:noFill/>
+          </a:ln>
+          <a:effectLst/>
+        </p:spPr>
+        <p:style>
+          <a:lnRef idx="1">
+            <a:schemeClr val="accent1"/>
+          </a:lnRef>
+          <a:fillRef idx="3">
+            <a:schemeClr val="accent1"/>
+          </a:fillRef>
+          <a:effectRef idx="2">
+            <a:schemeClr val="accent1"/>
+          </a:effectRef>
+          <a:fontRef idx="minor">
+            <a:schemeClr val="lt1"/>
+          </a:fontRef>
+        </p:style>
+        <p:txBody>
+          <a:bodyPr rtlCol="0" anchor="ctr"/>
+          <a:lstStyle/>
+          <a:p>
+            <a:pPr algn="ctr"/>
+          </a:p>
+        </p:txBody>
+      </p:sp>
+      <p:sp>
+        <p:nvSpPr>
+          <p:cNvPr id="4" name="TextBox 3"/>
+          <p:cNvSpPr txBox="1"/>
+          <p:nvPr/>
+        </p:nvSpPr>
+        <p:spPr>
+          <a:xfrm>
+            <a:off x="10378440" y="457200"/>
+            <a:ext cx="1188720" cy="365760"/>
+          </a:xfrm>
+          <a:prstGeom prst="rect">
+            <a:avLst/>
+          </a:prstGeom>
+          <a:noFill/>
+        </p:spPr>
+        <p:txBody>
+          <a:bodyPr wrap="square">
+            <a:spAutoFit/>
+          </a:bodyPr>
+          <a:lstStyle/>
+          <a:p>
+            <a:pPr algn="r"/>
+            <a:r>
               <a:rPr sz="1200" b="1">
                 <a:solidFill>
                   <a:srgbClr val="0A6ED1"/>
@@ -5486,6 +5679,133 @@
                 <a:latin typeface="Segoe UI"/>
               </a:rPr>
               <a:t>2:00</a:t>
+            </a:r>
+          </a:p>
+        </p:txBody>
+      </p:sp>
+      <p:sp>
+        <p:nvSpPr>
+          <p:cNvPr id="5" name="TextBox 4"/>
+          <p:cNvSpPr txBox="1"/>
+          <p:nvPr/>
+        </p:nvSpPr>
+        <p:spPr>
+          <a:xfrm>
+            <a:off x="685800" y="1600200"/>
+            <a:ext cx="10817352" cy="4709160"/>
+          </a:xfrm>
+          <a:prstGeom prst="rect">
+            <a:avLst/>
+          </a:prstGeom>
+          <a:noFill/>
+        </p:spPr>
+        <p:txBody>
+          <a:bodyPr wrap="square">
+            <a:spAutoFit/>
+          </a:bodyPr>
+          <a:lstStyle/>
+          <a:p>
+            <a:pPr>
+              <a:spcAft>
+                <a:spcPts val="1100"/>
+              </a:spcAft>
+            </a:pPr>
+            <a:r>
+              <a:rPr sz="1900" b="0">
+                <a:solidFill>
+                  <a:srgbClr val="1A1A1A"/>
+                </a:solidFill>
+                <a:latin typeface="Segoe UI"/>
+              </a:rPr>
+              <a:t>•  </a:t>
+            </a:r>
+            <a:r>
+              <a:rPr sz="1900" b="1">
+                <a:solidFill>
+                  <a:srgbClr val="1A1A1A"/>
+                </a:solidFill>
+                <a:latin typeface="Segoe UI"/>
+              </a:rPr>
+              <a:t>1. AI authorship is not compliance.</a:t>
+            </a:r>
+            <a:r>
+              <a:rPr sz="1900" b="0">
+                <a:solidFill>
+                  <a:srgbClr val="1A1A1A"/>
+                </a:solidFill>
+                <a:latin typeface="Segoe UI"/>
+              </a:rPr>
+              <a:t> A generated </a:t>
+            </a:r>
+            <a:r>
+              <a:rPr sz="1900" b="0">
+                <a:solidFill>
+                  <a:srgbClr val="1A1A1A"/>
+                </a:solidFill>
+                <a:latin typeface="Consolas"/>
+              </a:rPr>
+              <a:t>SELECT</a:t>
+            </a:r>
+            <a:r>
+              <a:rPr sz="1900" b="0">
+                <a:solidFill>
+                  <a:srgbClr val="1A1A1A"/>
+                </a:solidFill>
+                <a:latin typeface="Segoe UI"/>
+              </a:rPr>
+              <a:t> on a non-released table is still a Clean Core violation. The released-API rules apply to every line regardless of who wrote it.</a:t>
+            </a:r>
+          </a:p>
+          <a:p>
+            <a:pPr>
+              <a:spcAft>
+                <a:spcPts val="1100"/>
+              </a:spcAft>
+            </a:pPr>
+            <a:r>
+              <a:rPr sz="1900" b="0">
+                <a:solidFill>
+                  <a:srgbClr val="1A1A1A"/>
+                </a:solidFill>
+                <a:latin typeface="Segoe UI"/>
+              </a:rPr>
+              <a:t>•  </a:t>
+            </a:r>
+            <a:r>
+              <a:rPr sz="1900" b="1">
+                <a:solidFill>
+                  <a:srgbClr val="1A1A1A"/>
+                </a:solidFill>
+                <a:latin typeface="Segoe UI"/>
+              </a:rPr>
+              <a:t>2. Generated code is reviewed exactly like hand-written code.</a:t>
+            </a:r>
+            <a:r>
+              <a:rPr sz="1900" b="0">
+                <a:solidFill>
+                  <a:srgbClr val="1A1A1A"/>
+                </a:solidFill>
+                <a:latin typeface="Segoe UI"/>
+              </a:rPr>
+              <a:t> Same checklist, same severities — and </a:t>
+            </a:r>
+            <a:r>
+              <a:rPr sz="1900" b="1">
+                <a:solidFill>
+                  <a:srgbClr val="1A1A1A"/>
+                </a:solidFill>
+                <a:latin typeface="Segoe UI"/>
+              </a:rPr>
+              <a:t>the author owns it</a:t>
+            </a:r>
+            <a:r>
+              <a:rPr sz="1900" b="0">
+                <a:solidFill>
+                  <a:srgbClr val="1A1A1A"/>
+                </a:solidFill>
+                <a:latin typeface="Segoe UI"/>
+              </a:rPr>
+              <a:t>. "Copilot wrote it" is not a defence in review.</a:t>
             </a:r>
           </a:p>
         </p:txBody>
@@ -5510,339 +5830,14 @@
       <p:grpSpPr/>
       <p:sp>
         <p:nvSpPr>
-          <p:cNvPr id="2" name="Title 1"/>
-          <p:cNvSpPr>
-            <a:spLocks noGrp="1"/>
-          </p:cNvSpPr>
-          <p:nvPr>
-            <p:ph type="title"/>
-          </p:nvPr>
-        </p:nvSpPr>
-        <p:spPr/>
-        <p:txBody>
-          <a:bodyPr/>
-          <a:lstStyle/>
-          <a:p>
-            <a:r>
-              <a:rPr sz="3000" b="1">
-                <a:solidFill>
-                  <a:srgbClr val="1A1A1A"/>
-                </a:solidFill>
-                <a:latin typeface="Segoe UI"/>
-              </a:rPr>
-              <a:t>What to Do on Monday</a:t>
-            </a:r>
-          </a:p>
-        </p:txBody>
-      </p:sp>
-      <p:sp>
-        <p:nvSpPr>
-          <p:cNvPr id="3" name="Content Placeholder 2"/>
-          <p:cNvSpPr>
-            <a:spLocks noGrp="1"/>
-          </p:cNvSpPr>
-          <p:nvPr>
-            <p:ph idx="1"/>
-          </p:nvPr>
+          <p:cNvPr id="2" name="TextBox 1"/>
+          <p:cNvSpPr txBox="1"/>
+          <p:nvPr/>
         </p:nvSpPr>
         <p:spPr>
           <a:xfrm>
-            <a:ext cx="10789920" cy="0"/>
-          </a:xfrm>
-        </p:spPr>
-        <p:txBody>
-          <a:bodyPr wrap="square"/>
-          <a:lstStyle/>
-          <a:p>
-            <a:pPr>
-              <a:spcAft>
-                <a:spcPts val="800"/>
-              </a:spcAft>
-            </a:pPr>
-            <a:r>
-              <a:rPr sz="1900">
-                <a:solidFill>
-                  <a:srgbClr val="1A1A1A"/>
-                </a:solidFill>
-                <a:latin typeface="Segoe UI"/>
-              </a:rPr>
-              <a:t>Copy </a:t>
-            </a:r>
-            <a:r>
-              <a:rPr sz="1900">
-                <a:solidFill>
-                  <a:srgbClr val="1A1A1A"/>
-                </a:solidFill>
-                <a:latin typeface="Consolas"/>
-              </a:rPr>
-              <a:t>.github/copilot-instructions.md</a:t>
-            </a:r>
-            <a:r>
-              <a:rPr sz="1900">
-                <a:solidFill>
-                  <a:srgbClr val="1A1A1A"/>
-                </a:solidFill>
-                <a:latin typeface="Segoe UI"/>
-              </a:rPr>
-              <a:t> from </a:t>
-            </a:r>
-            <a:r>
-              <a:rPr sz="1900">
-                <a:solidFill>
-                  <a:srgbClr val="1A1A1A"/>
-                </a:solidFill>
-                <a:latin typeface="Consolas"/>
-              </a:rPr>
-              <a:t>sap-technical-assets</a:t>
-            </a:r>
-            <a:r>
-              <a:rPr sz="1900">
-                <a:solidFill>
-                  <a:srgbClr val="1A1A1A"/>
-                </a:solidFill>
-                <a:latin typeface="Segoe UI"/>
-              </a:rPr>
-              <a:t> into </a:t>
-            </a:r>
-            <a:r>
-              <a:rPr b="1" sz="1900">
-                <a:solidFill>
-                  <a:srgbClr val="1A1A1A"/>
-                </a:solidFill>
-                <a:latin typeface="Segoe UI"/>
-              </a:rPr>
-              <a:t>your</a:t>
-            </a:r>
-            <a:r>
-              <a:rPr sz="1900">
-                <a:solidFill>
-                  <a:srgbClr val="1A1A1A"/>
-                </a:solidFill>
-                <a:latin typeface="Segoe UI"/>
-              </a:rPr>
-              <a:t> project repo</a:t>
-            </a:r>
-          </a:p>
-          <a:p>
-            <a:pPr>
-              <a:spcAft>
-                <a:spcPts val="800"/>
-              </a:spcAft>
-            </a:pPr>
-            <a:r>
-              <a:rPr sz="1900">
-                <a:solidFill>
-                  <a:srgbClr val="1A1A1A"/>
-                </a:solidFill>
-                <a:latin typeface="Segoe UI"/>
-              </a:rPr>
-              <a:t>Copy </a:t>
-            </a:r>
-            <a:r>
-              <a:rPr sz="1900">
-                <a:solidFill>
-                  <a:srgbClr val="1A1A1A"/>
-                </a:solidFill>
-                <a:latin typeface="Consolas"/>
-              </a:rPr>
-              <a:t>.github/prompts/*.prompt.md</a:t>
-            </a:r>
-            <a:r>
-              <a:rPr sz="1900">
-                <a:solidFill>
-                  <a:srgbClr val="1A1A1A"/>
-                </a:solidFill>
-                <a:latin typeface="Segoe UI"/>
-              </a:rPr>
-              <a:t> into the same repo</a:t>
-            </a:r>
-          </a:p>
-          <a:p>
-            <a:pPr>
-              <a:spcAft>
-                <a:spcPts val="800"/>
-              </a:spcAft>
-            </a:pPr>
-            <a:r>
-              <a:rPr sz="1900">
-                <a:solidFill>
-                  <a:srgbClr val="1A1A1A"/>
-                </a:solidFill>
-                <a:latin typeface="Segoe UI"/>
-              </a:rPr>
-              <a:t>Use: </a:t>
-            </a:r>
-            <a:r>
-              <a:rPr sz="1900">
-                <a:solidFill>
-                  <a:srgbClr val="1A1A1A"/>
-                </a:solidFill>
-                <a:latin typeface="Consolas"/>
-              </a:rPr>
-              <a:t>/rap-bo-scaffold</a:t>
-            </a:r>
-            <a:r>
-              <a:rPr sz="1900">
-                <a:solidFill>
-                  <a:srgbClr val="1A1A1A"/>
-                </a:solidFill>
-                <a:latin typeface="Segoe UI"/>
-              </a:rPr>
-              <a:t> · </a:t>
-            </a:r>
-            <a:r>
-              <a:rPr sz="1900">
-                <a:solidFill>
-                  <a:srgbClr val="1A1A1A"/>
-                </a:solidFill>
-                <a:latin typeface="Consolas"/>
-              </a:rPr>
-              <a:t>/cds-view-scaffold</a:t>
-            </a:r>
-            <a:r>
-              <a:rPr sz="1900">
-                <a:solidFill>
-                  <a:srgbClr val="1A1A1A"/>
-                </a:solidFill>
-                <a:latin typeface="Segoe UI"/>
-              </a:rPr>
-              <a:t> · </a:t>
-            </a:r>
-            <a:r>
-              <a:rPr sz="1900">
-                <a:solidFill>
-                  <a:srgbClr val="1A1A1A"/>
-                </a:solidFill>
-                <a:latin typeface="Consolas"/>
-              </a:rPr>
-              <a:t>/abap-unit-test</a:t>
-            </a:r>
-            <a:r>
-              <a:rPr sz="1900">
-                <a:solidFill>
-                  <a:srgbClr val="1A1A1A"/>
-                </a:solidFill>
-                <a:latin typeface="Segoe UI"/>
-              </a:rPr>
-              <a:t> · </a:t>
-            </a:r>
-            <a:r>
-              <a:rPr sz="1900">
-                <a:solidFill>
-                  <a:srgbClr val="1A1A1A"/>
-                </a:solidFill>
-                <a:latin typeface="Consolas"/>
-              </a:rPr>
-              <a:t>/odata-service-expose</a:t>
-            </a:r>
-            <a:r>
-              <a:rPr sz="1900">
-                <a:solidFill>
-                  <a:srgbClr val="1A1A1A"/>
-                </a:solidFill>
-                <a:latin typeface="Segoe UI"/>
-              </a:rPr>
-              <a:t> · </a:t>
-            </a:r>
-            <a:r>
-              <a:rPr sz="1900">
-                <a:solidFill>
-                  <a:srgbClr val="1A1A1A"/>
-                </a:solidFill>
-                <a:latin typeface="Consolas"/>
-              </a:rPr>
-              <a:t>/clean-abap-review</a:t>
-            </a:r>
-            <a:r>
-              <a:rPr sz="1900">
-                <a:solidFill>
-                  <a:srgbClr val="1A1A1A"/>
-                </a:solidFill>
-                <a:latin typeface="Segoe UI"/>
-              </a:rPr>
-              <a:t> · </a:t>
-            </a:r>
-            <a:r>
-              <a:rPr sz="1900">
-                <a:solidFill>
-                  <a:srgbClr val="1A1A1A"/>
-                </a:solidFill>
-                <a:latin typeface="Consolas"/>
-              </a:rPr>
-              <a:t>/abap-cloud-readiness</a:t>
-            </a:r>
-          </a:p>
-          <a:p>
-            <a:pPr>
-              <a:spcAft>
-                <a:spcPts val="800"/>
-              </a:spcAft>
-            </a:pPr>
-            <a:r>
-              <a:rPr b="1" sz="1900">
-                <a:solidFill>
-                  <a:srgbClr val="1A1A1A"/>
-                </a:solidFill>
-                <a:latin typeface="Segoe UI"/>
-              </a:rPr>
-              <a:t>Select the code or spec text first</a:t>
-            </a:r>
-            <a:r>
-              <a:rPr sz="1900">
-                <a:solidFill>
-                  <a:srgbClr val="1A1A1A"/>
-                </a:solidFill>
-                <a:latin typeface="Segoe UI"/>
-              </a:rPr>
-              <a:t> — that's what </a:t>
-            </a:r>
-            <a:r>
-              <a:rPr sz="1900">
-                <a:solidFill>
-                  <a:srgbClr val="1A1A1A"/>
-                </a:solidFill>
-                <a:latin typeface="Consolas"/>
-              </a:rPr>
-              <a:t>${selection}</a:t>
-            </a:r>
-            <a:r>
-              <a:rPr sz="1900">
-                <a:solidFill>
-                  <a:srgbClr val="1A1A1A"/>
-                </a:solidFill>
-                <a:latin typeface="Segoe UI"/>
-              </a:rPr>
-              <a:t> works on</a:t>
-            </a:r>
-          </a:p>
-          <a:p>
-            <a:pPr>
-              <a:spcAft>
-                <a:spcPts val="800"/>
-              </a:spcAft>
-            </a:pPr>
-            <a:r>
-              <a:rPr sz="1900">
-                <a:solidFill>
-                  <a:srgbClr val="1A1A1A"/>
-                </a:solidFill>
-                <a:latin typeface="Segoe UI"/>
-              </a:rPr>
-              <a:t>Connect the ABAP MCP server for anything where system truth matters</a:t>
-            </a:r>
-          </a:p>
-        </p:txBody>
-      </p:sp>
-      <p:sp>
-        <p:nvSpPr>
-          <p:cNvPr id="4" name="TextBox 3"/>
-          <p:cNvSpPr txBox="1"/>
-          <p:nvPr/>
-        </p:nvSpPr>
-        <p:spPr>
-          <a:xfrm>
-            <a:off x="10332720" y="256032"/>
-            <a:ext cx="1645920" cy="365760"/>
+            <a:off x="685800" y="384048"/>
+            <a:ext cx="9326880" cy="868680"/>
           </a:xfrm>
           <a:prstGeom prst="rect">
             <a:avLst/>
@@ -5850,12 +5845,91 @@
           <a:noFill/>
         </p:spPr>
         <p:txBody>
-          <a:bodyPr wrap="none">
+          <a:bodyPr wrap="square" anchor="t">
             <a:spAutoFit/>
           </a:bodyPr>
           <a:lstStyle/>
           <a:p>
             <a:r>
+              <a:rPr sz="2900" b="1">
+                <a:solidFill>
+                  <a:srgbClr val="1A1A1A"/>
+                </a:solidFill>
+                <a:latin typeface="Segoe UI"/>
+              </a:rPr>
+              <a:t>What to Do on Monday</a:t>
+            </a:r>
+          </a:p>
+        </p:txBody>
+      </p:sp>
+      <p:sp>
+        <p:nvSpPr>
+          <p:cNvPr id="3" name="Rectangle 2"/>
+          <p:cNvSpPr/>
+          <p:nvPr/>
+        </p:nvSpPr>
+        <p:spPr>
+          <a:xfrm>
+            <a:off x="685800" y="1316736"/>
+            <a:ext cx="1051560" cy="50292"/>
+          </a:xfrm>
+          <a:prstGeom prst="rect">
+            <a:avLst/>
+          </a:prstGeom>
+          <a:solidFill>
+            <a:srgbClr val="0A6ED1"/>
+          </a:solidFill>
+          <a:ln>
+            <a:noFill/>
+          </a:ln>
+          <a:effectLst/>
+        </p:spPr>
+        <p:style>
+          <a:lnRef idx="1">
+            <a:schemeClr val="accent1"/>
+          </a:lnRef>
+          <a:fillRef idx="3">
+            <a:schemeClr val="accent1"/>
+          </a:fillRef>
+          <a:effectRef idx="2">
+            <a:schemeClr val="accent1"/>
+          </a:effectRef>
+          <a:fontRef idx="minor">
+            <a:schemeClr val="lt1"/>
+          </a:fontRef>
+        </p:style>
+        <p:txBody>
+          <a:bodyPr rtlCol="0" anchor="ctr"/>
+          <a:lstStyle/>
+          <a:p>
+            <a:pPr algn="ctr"/>
+          </a:p>
+        </p:txBody>
+      </p:sp>
+      <p:sp>
+        <p:nvSpPr>
+          <p:cNvPr id="4" name="TextBox 3"/>
+          <p:cNvSpPr txBox="1"/>
+          <p:nvPr/>
+        </p:nvSpPr>
+        <p:spPr>
+          <a:xfrm>
+            <a:off x="10378440" y="457200"/>
+            <a:ext cx="1188720" cy="365760"/>
+          </a:xfrm>
+          <a:prstGeom prst="rect">
+            <a:avLst/>
+          </a:prstGeom>
+          <a:noFill/>
+        </p:spPr>
+        <p:txBody>
+          <a:bodyPr wrap="square">
+            <a:spAutoFit/>
+          </a:bodyPr>
+          <a:lstStyle/>
+          <a:p>
+            <a:pPr algn="r"/>
+            <a:r>
               <a:rPr sz="1200" b="1">
                 <a:solidFill>
                   <a:srgbClr val="0A6ED1"/>
@@ -5863,6 +5937,653 @@
                 <a:latin typeface="Segoe UI"/>
               </a:rPr>
               <a:t>3:00</a:t>
+            </a:r>
+          </a:p>
+        </p:txBody>
+      </p:sp>
+      <p:sp>
+        <p:nvSpPr>
+          <p:cNvPr id="5" name="Rounded Rectangle 4"/>
+          <p:cNvSpPr/>
+          <p:nvPr/>
+        </p:nvSpPr>
+        <p:spPr>
+          <a:xfrm>
+            <a:off x="685800" y="2304379"/>
+            <a:ext cx="1871411" cy="2733873"/>
+          </a:xfrm>
+          <a:prstGeom prst="roundRect">
+            <a:avLst/>
+          </a:prstGeom>
+          <a:solidFill>
+            <a:srgbClr val="E8F1FB"/>
+          </a:solidFill>
+          <a:ln w="15875">
+            <a:solidFill>
+              <a:srgbClr val="0A6ED1"/>
+            </a:solidFill>
+          </a:ln>
+          <a:effectLst/>
+        </p:spPr>
+        <p:style>
+          <a:lnRef idx="1">
+            <a:schemeClr val="accent1"/>
+          </a:lnRef>
+          <a:fillRef idx="3">
+            <a:schemeClr val="accent1"/>
+          </a:fillRef>
+          <a:effectRef idx="2">
+            <a:schemeClr val="accent1"/>
+          </a:effectRef>
+          <a:fontRef idx="minor">
+            <a:schemeClr val="lt1"/>
+          </a:fontRef>
+        </p:style>
+        <p:txBody>
+          <a:bodyPr rtlCol="0" anchor="ctr" wrap="square" lIns="146304" rIns="146304" tIns="109728" bIns="109728"/>
+          <a:lstStyle/>
+          <a:p>
+            <a:pPr algn="ctr"/>
+            <a:r>
+              <a:rPr sz="1600" b="1">
+                <a:solidFill>
+                  <a:srgbClr val="054A8F"/>
+                </a:solidFill>
+                <a:latin typeface="Segoe UI"/>
+              </a:rPr>
+              <a:t>1. Copy</a:t>
+            </a:r>
+          </a:p>
+          <a:p>
+            <a:pPr algn="ctr">
+              <a:spcBef>
+                <a:spcPts val="400"/>
+              </a:spcBef>
+            </a:pPr>
+            <a:r>
+              <a:rPr sz="1250" b="0">
+                <a:solidFill>
+                  <a:srgbClr val="1A1A1A"/>
+                </a:solidFill>
+                <a:latin typeface="Consolas"/>
+              </a:rPr>
+              <a:t>.github/copilot-instructions.md</a:t>
+            </a:r>
+            <a:r>
+              <a:rPr sz="1250" b="0">
+                <a:solidFill>
+                  <a:srgbClr val="1A1A1A"/>
+                </a:solidFill>
+                <a:latin typeface="Segoe UI"/>
+              </a:rPr>
+              <a:t> into </a:t>
+            </a:r>
+            <a:r>
+              <a:rPr sz="1250" b="1">
+                <a:solidFill>
+                  <a:srgbClr val="1A1A1A"/>
+                </a:solidFill>
+                <a:latin typeface="Segoe UI"/>
+              </a:rPr>
+              <a:t>your</a:t>
+            </a:r>
+            <a:r>
+              <a:rPr sz="1250" b="0">
+                <a:solidFill>
+                  <a:srgbClr val="1A1A1A"/>
+                </a:solidFill>
+                <a:latin typeface="Segoe UI"/>
+              </a:rPr>
+              <a:t> project repo</a:t>
+            </a:r>
+          </a:p>
+        </p:txBody>
+      </p:sp>
+      <p:sp>
+        <p:nvSpPr>
+          <p:cNvPr id="6" name="Right Arrow 5"/>
+          <p:cNvSpPr/>
+          <p:nvPr/>
+        </p:nvSpPr>
+        <p:spPr>
+          <a:xfrm>
+            <a:off x="2602931" y="3552444"/>
+            <a:ext cx="274320" cy="237744"/>
+          </a:xfrm>
+          <a:prstGeom prst="rightArrow">
+            <a:avLst/>
+          </a:prstGeom>
+          <a:solidFill>
+            <a:srgbClr val="0A6ED1"/>
+          </a:solidFill>
+          <a:ln>
+            <a:noFill/>
+          </a:ln>
+          <a:effectLst/>
+        </p:spPr>
+        <p:style>
+          <a:lnRef idx="1">
+            <a:schemeClr val="accent1"/>
+          </a:lnRef>
+          <a:fillRef idx="3">
+            <a:schemeClr val="accent1"/>
+          </a:fillRef>
+          <a:effectRef idx="2">
+            <a:schemeClr val="accent1"/>
+          </a:effectRef>
+          <a:fontRef idx="minor">
+            <a:schemeClr val="lt1"/>
+          </a:fontRef>
+        </p:style>
+        <p:txBody>
+          <a:bodyPr rtlCol="0" anchor="ctr"/>
+          <a:lstStyle/>
+          <a:p>
+            <a:pPr algn="ctr"/>
+          </a:p>
+        </p:txBody>
+      </p:sp>
+      <p:sp>
+        <p:nvSpPr>
+          <p:cNvPr id="7" name="Rounded Rectangle 6"/>
+          <p:cNvSpPr/>
+          <p:nvPr/>
+        </p:nvSpPr>
+        <p:spPr>
+          <a:xfrm>
+            <a:off x="2922971" y="2304379"/>
+            <a:ext cx="1871411" cy="2733873"/>
+          </a:xfrm>
+          <a:prstGeom prst="roundRect">
+            <a:avLst/>
+          </a:prstGeom>
+          <a:solidFill>
+            <a:srgbClr val="E8F1FB"/>
+          </a:solidFill>
+          <a:ln w="15875">
+            <a:solidFill>
+              <a:srgbClr val="0A6ED1"/>
+            </a:solidFill>
+          </a:ln>
+          <a:effectLst/>
+        </p:spPr>
+        <p:style>
+          <a:lnRef idx="1">
+            <a:schemeClr val="accent1"/>
+          </a:lnRef>
+          <a:fillRef idx="3">
+            <a:schemeClr val="accent1"/>
+          </a:fillRef>
+          <a:effectRef idx="2">
+            <a:schemeClr val="accent1"/>
+          </a:effectRef>
+          <a:fontRef idx="minor">
+            <a:schemeClr val="lt1"/>
+          </a:fontRef>
+        </p:style>
+        <p:txBody>
+          <a:bodyPr rtlCol="0" anchor="ctr" wrap="square" lIns="146304" rIns="146304" tIns="109728" bIns="109728"/>
+          <a:lstStyle/>
+          <a:p>
+            <a:pPr algn="ctr"/>
+            <a:r>
+              <a:rPr sz="1600" b="1">
+                <a:solidFill>
+                  <a:srgbClr val="054A8F"/>
+                </a:solidFill>
+                <a:latin typeface="Segoe UI"/>
+              </a:rPr>
+              <a:t>2. Copy</a:t>
+            </a:r>
+          </a:p>
+          <a:p>
+            <a:pPr algn="ctr">
+              <a:spcBef>
+                <a:spcPts val="400"/>
+              </a:spcBef>
+            </a:pPr>
+            <a:r>
+              <a:rPr sz="1250" b="0">
+                <a:solidFill>
+                  <a:srgbClr val="1A1A1A"/>
+                </a:solidFill>
+                <a:latin typeface="Consolas"/>
+              </a:rPr>
+              <a:t>.github/prompts/*.prompt.md</a:t>
+            </a:r>
+            <a:r>
+              <a:rPr sz="1250" b="0">
+                <a:solidFill>
+                  <a:srgbClr val="1A1A1A"/>
+                </a:solidFill>
+                <a:latin typeface="Segoe UI"/>
+              </a:rPr>
+              <a:t> into the same repo</a:t>
+            </a:r>
+          </a:p>
+        </p:txBody>
+      </p:sp>
+      <p:sp>
+        <p:nvSpPr>
+          <p:cNvPr id="8" name="Right Arrow 7"/>
+          <p:cNvSpPr/>
+          <p:nvPr/>
+        </p:nvSpPr>
+        <p:spPr>
+          <a:xfrm>
+            <a:off x="4840102" y="3552444"/>
+            <a:ext cx="274320" cy="237744"/>
+          </a:xfrm>
+          <a:prstGeom prst="rightArrow">
+            <a:avLst/>
+          </a:prstGeom>
+          <a:solidFill>
+            <a:srgbClr val="0A6ED1"/>
+          </a:solidFill>
+          <a:ln>
+            <a:noFill/>
+          </a:ln>
+          <a:effectLst/>
+        </p:spPr>
+        <p:style>
+          <a:lnRef idx="1">
+            <a:schemeClr val="accent1"/>
+          </a:lnRef>
+          <a:fillRef idx="3">
+            <a:schemeClr val="accent1"/>
+          </a:fillRef>
+          <a:effectRef idx="2">
+            <a:schemeClr val="accent1"/>
+          </a:effectRef>
+          <a:fontRef idx="minor">
+            <a:schemeClr val="lt1"/>
+          </a:fontRef>
+        </p:style>
+        <p:txBody>
+          <a:bodyPr rtlCol="0" anchor="ctr"/>
+          <a:lstStyle/>
+          <a:p>
+            <a:pPr algn="ctr"/>
+          </a:p>
+        </p:txBody>
+      </p:sp>
+      <p:sp>
+        <p:nvSpPr>
+          <p:cNvPr id="9" name="Rounded Rectangle 8"/>
+          <p:cNvSpPr/>
+          <p:nvPr/>
+        </p:nvSpPr>
+        <p:spPr>
+          <a:xfrm>
+            <a:off x="5160142" y="2304379"/>
+            <a:ext cx="1871411" cy="2733873"/>
+          </a:xfrm>
+          <a:prstGeom prst="roundRect">
+            <a:avLst/>
+          </a:prstGeom>
+          <a:solidFill>
+            <a:srgbClr val="E8F1FB"/>
+          </a:solidFill>
+          <a:ln w="15875">
+            <a:solidFill>
+              <a:srgbClr val="0A6ED1"/>
+            </a:solidFill>
+          </a:ln>
+          <a:effectLst/>
+        </p:spPr>
+        <p:style>
+          <a:lnRef idx="1">
+            <a:schemeClr val="accent1"/>
+          </a:lnRef>
+          <a:fillRef idx="3">
+            <a:schemeClr val="accent1"/>
+          </a:fillRef>
+          <a:effectRef idx="2">
+            <a:schemeClr val="accent1"/>
+          </a:effectRef>
+          <a:fontRef idx="minor">
+            <a:schemeClr val="lt1"/>
+          </a:fontRef>
+        </p:style>
+        <p:txBody>
+          <a:bodyPr rtlCol="0" anchor="ctr" wrap="square" lIns="146304" rIns="146304" tIns="109728" bIns="109728"/>
+          <a:lstStyle/>
+          <a:p>
+            <a:pPr algn="ctr"/>
+            <a:r>
+              <a:rPr sz="1600" b="1">
+                <a:solidFill>
+                  <a:srgbClr val="054A8F"/>
+                </a:solidFill>
+                <a:latin typeface="Segoe UI"/>
+              </a:rPr>
+              <a:t>3. Select</a:t>
+            </a:r>
+          </a:p>
+          <a:p>
+            <a:pPr algn="ctr">
+              <a:spcBef>
+                <a:spcPts val="400"/>
+              </a:spcBef>
+            </a:pPr>
+            <a:r>
+              <a:rPr sz="1250" b="0">
+                <a:solidFill>
+                  <a:srgbClr val="1A1A1A"/>
+                </a:solidFill>
+                <a:latin typeface="Segoe UI"/>
+              </a:rPr>
+              <a:t>Highlight the code or spec text first — that's </a:t>
+            </a:r>
+            <a:r>
+              <a:rPr sz="1250" b="0">
+                <a:solidFill>
+                  <a:srgbClr val="1A1A1A"/>
+                </a:solidFill>
+                <a:latin typeface="Consolas"/>
+              </a:rPr>
+              <a:t>${selection}</a:t>
+            </a:r>
+          </a:p>
+        </p:txBody>
+      </p:sp>
+      <p:sp>
+        <p:nvSpPr>
+          <p:cNvPr id="10" name="Right Arrow 9"/>
+          <p:cNvSpPr/>
+          <p:nvPr/>
+        </p:nvSpPr>
+        <p:spPr>
+          <a:xfrm>
+            <a:off x="7077273" y="3552444"/>
+            <a:ext cx="274320" cy="237744"/>
+          </a:xfrm>
+          <a:prstGeom prst="rightArrow">
+            <a:avLst/>
+          </a:prstGeom>
+          <a:solidFill>
+            <a:srgbClr val="0A6ED1"/>
+          </a:solidFill>
+          <a:ln>
+            <a:noFill/>
+          </a:ln>
+          <a:effectLst/>
+        </p:spPr>
+        <p:style>
+          <a:lnRef idx="1">
+            <a:schemeClr val="accent1"/>
+          </a:lnRef>
+          <a:fillRef idx="3">
+            <a:schemeClr val="accent1"/>
+          </a:fillRef>
+          <a:effectRef idx="2">
+            <a:schemeClr val="accent1"/>
+          </a:effectRef>
+          <a:fontRef idx="minor">
+            <a:schemeClr val="lt1"/>
+          </a:fontRef>
+        </p:style>
+        <p:txBody>
+          <a:bodyPr rtlCol="0" anchor="ctr"/>
+          <a:lstStyle/>
+          <a:p>
+            <a:pPr algn="ctr"/>
+          </a:p>
+        </p:txBody>
+      </p:sp>
+      <p:sp>
+        <p:nvSpPr>
+          <p:cNvPr id="11" name="Rounded Rectangle 10"/>
+          <p:cNvSpPr/>
+          <p:nvPr/>
+        </p:nvSpPr>
+        <p:spPr>
+          <a:xfrm>
+            <a:off x="7397313" y="2304379"/>
+            <a:ext cx="1871411" cy="2733873"/>
+          </a:xfrm>
+          <a:prstGeom prst="roundRect">
+            <a:avLst/>
+          </a:prstGeom>
+          <a:solidFill>
+            <a:srgbClr val="E8F1FB"/>
+          </a:solidFill>
+          <a:ln w="15875">
+            <a:solidFill>
+              <a:srgbClr val="0A6ED1"/>
+            </a:solidFill>
+          </a:ln>
+          <a:effectLst/>
+        </p:spPr>
+        <p:style>
+          <a:lnRef idx="1">
+            <a:schemeClr val="accent1"/>
+          </a:lnRef>
+          <a:fillRef idx="3">
+            <a:schemeClr val="accent1"/>
+          </a:fillRef>
+          <a:effectRef idx="2">
+            <a:schemeClr val="accent1"/>
+          </a:effectRef>
+          <a:fontRef idx="minor">
+            <a:schemeClr val="lt1"/>
+          </a:fontRef>
+        </p:style>
+        <p:txBody>
+          <a:bodyPr rtlCol="0" anchor="ctr" wrap="square" lIns="146304" rIns="146304" tIns="109728" bIns="109728"/>
+          <a:lstStyle/>
+          <a:p>
+            <a:pPr algn="ctr"/>
+            <a:r>
+              <a:rPr sz="1600" b="1">
+                <a:solidFill>
+                  <a:srgbClr val="054A8F"/>
+                </a:solidFill>
+                <a:latin typeface="Segoe UI"/>
+              </a:rPr>
+              <a:t>4. Run</a:t>
+            </a:r>
+          </a:p>
+          <a:p>
+            <a:pPr algn="ctr">
+              <a:spcBef>
+                <a:spcPts val="400"/>
+              </a:spcBef>
+            </a:pPr>
+            <a:r>
+              <a:rPr sz="1250" b="0">
+                <a:solidFill>
+                  <a:srgbClr val="1A1A1A"/>
+                </a:solidFill>
+                <a:latin typeface="Consolas"/>
+              </a:rPr>
+              <a:t>/rap-bo-scaffold</a:t>
+            </a:r>
+            <a:r>
+              <a:rPr sz="1250" b="0">
+                <a:solidFill>
+                  <a:srgbClr val="1A1A1A"/>
+                </a:solidFill>
+                <a:latin typeface="Segoe UI"/>
+              </a:rPr>
+              <a:t> · </a:t>
+            </a:r>
+            <a:r>
+              <a:rPr sz="1250" b="0">
+                <a:solidFill>
+                  <a:srgbClr val="1A1A1A"/>
+                </a:solidFill>
+                <a:latin typeface="Consolas"/>
+              </a:rPr>
+              <a:t>/abap-unit-test</a:t>
+            </a:r>
+            <a:r>
+              <a:rPr sz="1250" b="0">
+                <a:solidFill>
+                  <a:srgbClr val="1A1A1A"/>
+                </a:solidFill>
+                <a:latin typeface="Segoe UI"/>
+              </a:rPr>
+              <a:t> · </a:t>
+            </a:r>
+            <a:r>
+              <a:rPr sz="1250" b="0">
+                <a:solidFill>
+                  <a:srgbClr val="1A1A1A"/>
+                </a:solidFill>
+                <a:latin typeface="Consolas"/>
+              </a:rPr>
+              <a:t>/clean-abap-review</a:t>
+            </a:r>
+          </a:p>
+        </p:txBody>
+      </p:sp>
+      <p:sp>
+        <p:nvSpPr>
+          <p:cNvPr id="12" name="Right Arrow 11"/>
+          <p:cNvSpPr/>
+          <p:nvPr/>
+        </p:nvSpPr>
+        <p:spPr>
+          <a:xfrm>
+            <a:off x="9314444" y="3552444"/>
+            <a:ext cx="274320" cy="237744"/>
+          </a:xfrm>
+          <a:prstGeom prst="rightArrow">
+            <a:avLst/>
+          </a:prstGeom>
+          <a:solidFill>
+            <a:srgbClr val="0A6ED1"/>
+          </a:solidFill>
+          <a:ln>
+            <a:noFill/>
+          </a:ln>
+          <a:effectLst/>
+        </p:spPr>
+        <p:style>
+          <a:lnRef idx="1">
+            <a:schemeClr val="accent1"/>
+          </a:lnRef>
+          <a:fillRef idx="3">
+            <a:schemeClr val="accent1"/>
+          </a:fillRef>
+          <a:effectRef idx="2">
+            <a:schemeClr val="accent1"/>
+          </a:effectRef>
+          <a:fontRef idx="minor">
+            <a:schemeClr val="lt1"/>
+          </a:fontRef>
+        </p:style>
+        <p:txBody>
+          <a:bodyPr rtlCol="0" anchor="ctr"/>
+          <a:lstStyle/>
+          <a:p>
+            <a:pPr algn="ctr"/>
+          </a:p>
+        </p:txBody>
+      </p:sp>
+      <p:sp>
+        <p:nvSpPr>
+          <p:cNvPr id="13" name="Rounded Rectangle 12"/>
+          <p:cNvSpPr/>
+          <p:nvPr/>
+        </p:nvSpPr>
+        <p:spPr>
+          <a:xfrm>
+            <a:off x="9634484" y="2304379"/>
+            <a:ext cx="1871411" cy="2733873"/>
+          </a:xfrm>
+          <a:prstGeom prst="roundRect">
+            <a:avLst/>
+          </a:prstGeom>
+          <a:solidFill>
+            <a:srgbClr val="E8F1FB"/>
+          </a:solidFill>
+          <a:ln w="15875">
+            <a:solidFill>
+              <a:srgbClr val="0A6ED1"/>
+            </a:solidFill>
+          </a:ln>
+          <a:effectLst/>
+        </p:spPr>
+        <p:style>
+          <a:lnRef idx="1">
+            <a:schemeClr val="accent1"/>
+          </a:lnRef>
+          <a:fillRef idx="3">
+            <a:schemeClr val="accent1"/>
+          </a:fillRef>
+          <a:effectRef idx="2">
+            <a:schemeClr val="accent1"/>
+          </a:effectRef>
+          <a:fontRef idx="minor">
+            <a:schemeClr val="lt1"/>
+          </a:fontRef>
+        </p:style>
+        <p:txBody>
+          <a:bodyPr rtlCol="0" anchor="ctr" wrap="square" lIns="146304" rIns="146304" tIns="109728" bIns="109728"/>
+          <a:lstStyle/>
+          <a:p>
+            <a:pPr algn="ctr"/>
+            <a:r>
+              <a:rPr sz="1600" b="1">
+                <a:solidFill>
+                  <a:srgbClr val="054A8F"/>
+                </a:solidFill>
+                <a:latin typeface="Segoe UI"/>
+              </a:rPr>
+              <a:t>5. Connect</a:t>
+            </a:r>
+          </a:p>
+          <a:p>
+            <a:pPr algn="ctr">
+              <a:spcBef>
+                <a:spcPts val="400"/>
+              </a:spcBef>
+            </a:pPr>
+            <a:r>
+              <a:rPr sz="1250" b="0">
+                <a:solidFill>
+                  <a:srgbClr val="1A1A1A"/>
+                </a:solidFill>
+                <a:latin typeface="Segoe UI"/>
+              </a:rPr>
+              <a:t>The ABAP MCP server, when system truth matters</a:t>
+            </a:r>
+          </a:p>
+        </p:txBody>
+      </p:sp>
+      <p:sp>
+        <p:nvSpPr>
+          <p:cNvPr id="14" name="TextBox 13"/>
+          <p:cNvSpPr txBox="1"/>
+          <p:nvPr/>
+        </p:nvSpPr>
+        <p:spPr>
+          <a:xfrm>
+            <a:off x="685800" y="5852160"/>
+            <a:ext cx="10817352" cy="411480"/>
+          </a:xfrm>
+          <a:prstGeom prst="rect">
+            <a:avLst/>
+          </a:prstGeom>
+          <a:noFill/>
+        </p:spPr>
+        <p:txBody>
+          <a:bodyPr wrap="square">
+            <a:spAutoFit/>
+          </a:bodyPr>
+          <a:lstStyle/>
+          <a:p>
+            <a:pPr algn="ctr"/>
+            <a:r>
+              <a:rPr sz="1600" b="1">
+                <a:solidFill>
+                  <a:srgbClr val="054A8F"/>
+                </a:solidFill>
+                <a:latin typeface="Segoe UI"/>
+              </a:rPr>
+              <a:t>Steps 1 and 2 take two minutes and are the biggest single win.</a:t>
             </a:r>
           </a:p>
         </p:txBody>
@@ -5887,339 +6608,14 @@
       <p:grpSpPr/>
       <p:sp>
         <p:nvSpPr>
-          <p:cNvPr id="2" name="Title 1"/>
-          <p:cNvSpPr>
-            <a:spLocks noGrp="1"/>
-          </p:cNvSpPr>
-          <p:nvPr>
-            <p:ph type="title"/>
-          </p:nvPr>
-        </p:nvSpPr>
-        <p:spPr/>
-        <p:txBody>
-          <a:bodyPr/>
-          <a:lstStyle/>
-          <a:p>
-            <a:r>
-              <a:rPr sz="3000" b="1">
-                <a:solidFill>
-                  <a:srgbClr val="1A1A1A"/>
-                </a:solidFill>
-                <a:latin typeface="Segoe UI"/>
-              </a:rPr>
-              <a:t>Cheat Sheet — Screenshot This One</a:t>
-            </a:r>
-          </a:p>
-        </p:txBody>
-      </p:sp>
-      <p:sp>
-        <p:nvSpPr>
-          <p:cNvPr id="3" name="Content Placeholder 2"/>
-          <p:cNvSpPr>
-            <a:spLocks noGrp="1"/>
-          </p:cNvSpPr>
-          <p:nvPr>
-            <p:ph idx="1"/>
-          </p:nvPr>
+          <p:cNvPr id="2" name="TextBox 1"/>
+          <p:cNvSpPr txBox="1"/>
+          <p:nvPr/>
         </p:nvSpPr>
         <p:spPr>
           <a:xfrm>
-            <a:ext cx="10789920" cy="0"/>
-          </a:xfrm>
-        </p:spPr>
-        <p:txBody>
-          <a:bodyPr wrap="square"/>
-          <a:lstStyle/>
-          <a:p>
-            <a:pPr>
-              <a:spcAft>
-                <a:spcPts val="800"/>
-              </a:spcAft>
-            </a:pPr>
-            <a:r>
-              <a:rPr b="1" sz="1900">
-                <a:solidFill>
-                  <a:srgbClr val="1A1A1A"/>
-                </a:solidFill>
-                <a:latin typeface="Segoe UI"/>
-              </a:rPr>
-              <a:t>L1 Ungrounded</a:t>
-            </a:r>
-            <a:r>
-              <a:rPr sz="1900">
-                <a:solidFill>
-                  <a:srgbClr val="1A1A1A"/>
-                </a:solidFill>
-                <a:latin typeface="Segoe UI"/>
-              </a:rPr>
-              <a:t> — plain Copilot. Invents SAP names, writes classic ABAP.</a:t>
-            </a:r>
-          </a:p>
-          <a:p>
-            <a:pPr>
-              <a:spcAft>
-                <a:spcPts val="800"/>
-              </a:spcAft>
-            </a:pPr>
-            <a:r>
-              <a:rPr b="1" sz="1900">
-                <a:solidFill>
-                  <a:srgbClr val="1A1A1A"/>
-                </a:solidFill>
-                <a:latin typeface="Segoe UI"/>
-              </a:rPr>
-              <a:t>L2 Instructed</a:t>
-            </a:r>
-            <a:r>
-              <a:rPr sz="1900">
-                <a:solidFill>
-                  <a:srgbClr val="1A1A1A"/>
-                </a:solidFill>
-                <a:latin typeface="Segoe UI"/>
-              </a:rPr>
-              <a:t> — copy </a:t>
-            </a:r>
-            <a:r>
-              <a:rPr sz="1900">
-                <a:solidFill>
-                  <a:srgbClr val="1A1A1A"/>
-                </a:solidFill>
-                <a:latin typeface="Consolas"/>
-              </a:rPr>
-              <a:t>copilot-instructions.md</a:t>
-            </a:r>
-            <a:r>
-              <a:rPr sz="1900">
-                <a:solidFill>
-                  <a:srgbClr val="1A1A1A"/>
-                </a:solidFill>
-                <a:latin typeface="Segoe UI"/>
-              </a:rPr>
-              <a:t> + </a:t>
-            </a:r>
-            <a:r>
-              <a:rPr sz="1900">
-                <a:solidFill>
-                  <a:srgbClr val="1A1A1A"/>
-                </a:solidFill>
-                <a:latin typeface="Consolas"/>
-              </a:rPr>
-              <a:t>prompts/</a:t>
-            </a:r>
-            <a:r>
-              <a:rPr sz="1900">
-                <a:solidFill>
-                  <a:srgbClr val="1A1A1A"/>
-                </a:solidFill>
-                <a:latin typeface="Segoe UI"/>
-              </a:rPr>
-              <a:t> into your repo. One file copy. Biggest single win.</a:t>
-            </a:r>
-          </a:p>
-          <a:p>
-            <a:pPr>
-              <a:spcAft>
-                <a:spcPts val="800"/>
-              </a:spcAft>
-            </a:pPr>
-            <a:r>
-              <a:rPr b="1" sz="1900">
-                <a:solidFill>
-                  <a:srgbClr val="1A1A1A"/>
-                </a:solidFill>
-                <a:latin typeface="Segoe UI"/>
-              </a:rPr>
-              <a:t>L3 Grounded</a:t>
-            </a:r>
-            <a:r>
-              <a:rPr sz="1900">
-                <a:solidFill>
-                  <a:srgbClr val="1A1A1A"/>
-                </a:solidFill>
-                <a:latin typeface="Segoe UI"/>
-              </a:rPr>
-              <a:t> — connect the ABAP MCP server. Real objects, real field lists, real API states.</a:t>
-            </a:r>
-          </a:p>
-          <a:p>
-            <a:pPr>
-              <a:spcAft>
-                <a:spcPts val="800"/>
-              </a:spcAft>
-            </a:pPr>
-            <a:r>
-              <a:rPr b="1" sz="1900">
-                <a:solidFill>
-                  <a:srgbClr val="1A1A1A"/>
-                </a:solidFill>
-                <a:latin typeface="Segoe UI"/>
-              </a:rPr>
-              <a:t>Prompts:</a:t>
-            </a:r>
-            <a:r>
-              <a:rPr sz="1900">
-                <a:solidFill>
-                  <a:srgbClr val="1A1A1A"/>
-                </a:solidFill>
-                <a:latin typeface="Segoe UI"/>
-              </a:rPr>
-              <a:t> </a:t>
-            </a:r>
-            <a:r>
-              <a:rPr sz="1900">
-                <a:solidFill>
-                  <a:srgbClr val="1A1A1A"/>
-                </a:solidFill>
-                <a:latin typeface="Consolas"/>
-              </a:rPr>
-              <a:t>/rap-bo-scaffold</a:t>
-            </a:r>
-            <a:r>
-              <a:rPr sz="1900">
-                <a:solidFill>
-                  <a:srgbClr val="1A1A1A"/>
-                </a:solidFill>
-                <a:latin typeface="Segoe UI"/>
-              </a:rPr>
-              <a:t> </a:t>
-            </a:r>
-            <a:r>
-              <a:rPr sz="1900">
-                <a:solidFill>
-                  <a:srgbClr val="1A1A1A"/>
-                </a:solidFill>
-                <a:latin typeface="Consolas"/>
-              </a:rPr>
-              <a:t>/cds-view-scaffold</a:t>
-            </a:r>
-            <a:r>
-              <a:rPr sz="1900">
-                <a:solidFill>
-                  <a:srgbClr val="1A1A1A"/>
-                </a:solidFill>
-                <a:latin typeface="Segoe UI"/>
-              </a:rPr>
-              <a:t> </a:t>
-            </a:r>
-            <a:r>
-              <a:rPr sz="1900">
-                <a:solidFill>
-                  <a:srgbClr val="1A1A1A"/>
-                </a:solidFill>
-                <a:latin typeface="Consolas"/>
-              </a:rPr>
-              <a:t>/abap-unit-test</a:t>
-            </a:r>
-            <a:r>
-              <a:rPr sz="1900">
-                <a:solidFill>
-                  <a:srgbClr val="1A1A1A"/>
-                </a:solidFill>
-                <a:latin typeface="Segoe UI"/>
-              </a:rPr>
-              <a:t> </a:t>
-            </a:r>
-            <a:r>
-              <a:rPr sz="1900">
-                <a:solidFill>
-                  <a:srgbClr val="1A1A1A"/>
-                </a:solidFill>
-                <a:latin typeface="Consolas"/>
-              </a:rPr>
-              <a:t>/odata-service-expose</a:t>
-            </a:r>
-            <a:r>
-              <a:rPr sz="1900">
-                <a:solidFill>
-                  <a:srgbClr val="1A1A1A"/>
-                </a:solidFill>
-                <a:latin typeface="Segoe UI"/>
-              </a:rPr>
-              <a:t> </a:t>
-            </a:r>
-            <a:r>
-              <a:rPr sz="1900">
-                <a:solidFill>
-                  <a:srgbClr val="1A1A1A"/>
-                </a:solidFill>
-                <a:latin typeface="Consolas"/>
-              </a:rPr>
-              <a:t>/clean-abap-review</a:t>
-            </a:r>
-            <a:r>
-              <a:rPr sz="1900">
-                <a:solidFill>
-                  <a:srgbClr val="1A1A1A"/>
-                </a:solidFill>
-                <a:latin typeface="Segoe UI"/>
-              </a:rPr>
-              <a:t> </a:t>
-            </a:r>
-            <a:r>
-              <a:rPr sz="1900">
-                <a:solidFill>
-                  <a:srgbClr val="1A1A1A"/>
-                </a:solidFill>
-                <a:latin typeface="Consolas"/>
-              </a:rPr>
-              <a:t>/abap-cloud-readiness</a:t>
-            </a:r>
-          </a:p>
-          <a:p>
-            <a:pPr>
-              <a:spcAft>
-                <a:spcPts val="800"/>
-              </a:spcAft>
-            </a:pPr>
-            <a:r>
-              <a:rPr b="1" sz="1900">
-                <a:solidFill>
-                  <a:srgbClr val="1A1A1A"/>
-                </a:solidFill>
-                <a:latin typeface="Segoe UI"/>
-              </a:rPr>
-              <a:t>Rule 1:</a:t>
-            </a:r>
-            <a:r>
-              <a:rPr sz="1900">
-                <a:solidFill>
-                  <a:srgbClr val="1A1A1A"/>
-                </a:solidFill>
-                <a:latin typeface="Segoe UI"/>
-              </a:rPr>
-              <a:t> AI authorship ≠ compliance. · </a:t>
-            </a:r>
-            <a:r>
-              <a:rPr b="1" sz="1900">
-                <a:solidFill>
-                  <a:srgbClr val="1A1A1A"/>
-                </a:solidFill>
-                <a:latin typeface="Segoe UI"/>
-              </a:rPr>
-              <a:t>Rule 2:</a:t>
-            </a:r>
-            <a:r>
-              <a:rPr sz="1900">
-                <a:solidFill>
-                  <a:srgbClr val="1A1A1A"/>
-                </a:solidFill>
-                <a:latin typeface="Segoe UI"/>
-              </a:rPr>
-              <a:t> Generated code is reviewed like hand-written. The author owns it.</a:t>
-            </a:r>
-          </a:p>
-        </p:txBody>
-      </p:sp>
-      <p:sp>
-        <p:nvSpPr>
-          <p:cNvPr id="4" name="TextBox 3"/>
-          <p:cNvSpPr txBox="1"/>
-          <p:nvPr/>
-        </p:nvSpPr>
-        <p:spPr>
-          <a:xfrm>
-            <a:off x="10332720" y="256032"/>
-            <a:ext cx="1645920" cy="365760"/>
+            <a:off x="685800" y="384048"/>
+            <a:ext cx="9326880" cy="868680"/>
           </a:xfrm>
           <a:prstGeom prst="rect">
             <a:avLst/>
@@ -6227,12 +6623,91 @@
           <a:noFill/>
         </p:spPr>
         <p:txBody>
-          <a:bodyPr wrap="none">
+          <a:bodyPr wrap="square" anchor="t">
             <a:spAutoFit/>
           </a:bodyPr>
           <a:lstStyle/>
           <a:p>
             <a:r>
+              <a:rPr sz="2900" b="1">
+                <a:solidFill>
+                  <a:srgbClr val="1A1A1A"/>
+                </a:solidFill>
+                <a:latin typeface="Segoe UI"/>
+              </a:rPr>
+              <a:t>Cheat Sheet — Screenshot This One</a:t>
+            </a:r>
+          </a:p>
+        </p:txBody>
+      </p:sp>
+      <p:sp>
+        <p:nvSpPr>
+          <p:cNvPr id="3" name="Rectangle 2"/>
+          <p:cNvSpPr/>
+          <p:nvPr/>
+        </p:nvSpPr>
+        <p:spPr>
+          <a:xfrm>
+            <a:off x="685800" y="1316736"/>
+            <a:ext cx="1051560" cy="50292"/>
+          </a:xfrm>
+          <a:prstGeom prst="rect">
+            <a:avLst/>
+          </a:prstGeom>
+          <a:solidFill>
+            <a:srgbClr val="0A6ED1"/>
+          </a:solidFill>
+          <a:ln>
+            <a:noFill/>
+          </a:ln>
+          <a:effectLst/>
+        </p:spPr>
+        <p:style>
+          <a:lnRef idx="1">
+            <a:schemeClr val="accent1"/>
+          </a:lnRef>
+          <a:fillRef idx="3">
+            <a:schemeClr val="accent1"/>
+          </a:fillRef>
+          <a:effectRef idx="2">
+            <a:schemeClr val="accent1"/>
+          </a:effectRef>
+          <a:fontRef idx="minor">
+            <a:schemeClr val="lt1"/>
+          </a:fontRef>
+        </p:style>
+        <p:txBody>
+          <a:bodyPr rtlCol="0" anchor="ctr"/>
+          <a:lstStyle/>
+          <a:p>
+            <a:pPr algn="ctr"/>
+          </a:p>
+        </p:txBody>
+      </p:sp>
+      <p:sp>
+        <p:nvSpPr>
+          <p:cNvPr id="4" name="TextBox 3"/>
+          <p:cNvSpPr txBox="1"/>
+          <p:nvPr/>
+        </p:nvSpPr>
+        <p:spPr>
+          <a:xfrm>
+            <a:off x="10378440" y="457200"/>
+            <a:ext cx="1188720" cy="365760"/>
+          </a:xfrm>
+          <a:prstGeom prst="rect">
+            <a:avLst/>
+          </a:prstGeom>
+          <a:noFill/>
+        </p:spPr>
+        <p:txBody>
+          <a:bodyPr wrap="square">
+            <a:spAutoFit/>
+          </a:bodyPr>
+          <a:lstStyle/>
+          <a:p>
+            <a:pPr algn="r"/>
+            <a:r>
               <a:rPr sz="1200" b="1">
                 <a:solidFill>
                   <a:srgbClr val="0A6ED1"/>
@@ -6240,6 +6715,352 @@
                 <a:latin typeface="Segoe UI"/>
               </a:rPr>
               <a:t>1:00</a:t>
+            </a:r>
+          </a:p>
+        </p:txBody>
+      </p:sp>
+      <p:sp>
+        <p:nvSpPr>
+          <p:cNvPr id="5" name="TextBox 4"/>
+          <p:cNvSpPr txBox="1"/>
+          <p:nvPr/>
+        </p:nvSpPr>
+        <p:spPr>
+          <a:xfrm>
+            <a:off x="685800" y="1600200"/>
+            <a:ext cx="10817352" cy="4709160"/>
+          </a:xfrm>
+          <a:prstGeom prst="rect">
+            <a:avLst/>
+          </a:prstGeom>
+          <a:noFill/>
+        </p:spPr>
+        <p:txBody>
+          <a:bodyPr wrap="square">
+            <a:spAutoFit/>
+          </a:bodyPr>
+          <a:lstStyle/>
+          <a:p>
+            <a:pPr>
+              <a:spcAft>
+                <a:spcPts val="1100"/>
+              </a:spcAft>
+            </a:pPr>
+            <a:r>
+              <a:rPr sz="1900" b="0">
+                <a:solidFill>
+                  <a:srgbClr val="1A1A1A"/>
+                </a:solidFill>
+                <a:latin typeface="Segoe UI"/>
+              </a:rPr>
+              <a:t>•  </a:t>
+            </a:r>
+            <a:r>
+              <a:rPr sz="1900" b="1">
+                <a:solidFill>
+                  <a:srgbClr val="1A1A1A"/>
+                </a:solidFill>
+                <a:latin typeface="Segoe UI"/>
+              </a:rPr>
+              <a:t>L1 Ungrounded</a:t>
+            </a:r>
+            <a:r>
+              <a:rPr sz="1900" b="0">
+                <a:solidFill>
+                  <a:srgbClr val="1A1A1A"/>
+                </a:solidFill>
+                <a:latin typeface="Segoe UI"/>
+              </a:rPr>
+              <a:t> — plain Copilot. Invents SAP names, writes classic ABAP.</a:t>
+            </a:r>
+          </a:p>
+          <a:p>
+            <a:pPr>
+              <a:spcAft>
+                <a:spcPts val="1100"/>
+              </a:spcAft>
+            </a:pPr>
+            <a:r>
+              <a:rPr sz="1900" b="0">
+                <a:solidFill>
+                  <a:srgbClr val="1A1A1A"/>
+                </a:solidFill>
+                <a:latin typeface="Segoe UI"/>
+              </a:rPr>
+              <a:t>•  </a:t>
+            </a:r>
+            <a:r>
+              <a:rPr sz="1900" b="1">
+                <a:solidFill>
+                  <a:srgbClr val="1A1A1A"/>
+                </a:solidFill>
+                <a:latin typeface="Segoe UI"/>
+              </a:rPr>
+              <a:t>L2 Instructed</a:t>
+            </a:r>
+            <a:r>
+              <a:rPr sz="1900" b="0">
+                <a:solidFill>
+                  <a:srgbClr val="1A1A1A"/>
+                </a:solidFill>
+                <a:latin typeface="Segoe UI"/>
+              </a:rPr>
+              <a:t> — copy </a:t>
+            </a:r>
+            <a:r>
+              <a:rPr sz="1900" b="0">
+                <a:solidFill>
+                  <a:srgbClr val="1A1A1A"/>
+                </a:solidFill>
+                <a:latin typeface="Consolas"/>
+              </a:rPr>
+              <a:t>copilot-instructions.md</a:t>
+            </a:r>
+            <a:r>
+              <a:rPr sz="1900" b="0">
+                <a:solidFill>
+                  <a:srgbClr val="1A1A1A"/>
+                </a:solidFill>
+                <a:latin typeface="Segoe UI"/>
+              </a:rPr>
+              <a:t> + </a:t>
+            </a:r>
+            <a:r>
+              <a:rPr sz="1900" b="0">
+                <a:solidFill>
+                  <a:srgbClr val="1A1A1A"/>
+                </a:solidFill>
+                <a:latin typeface="Consolas"/>
+              </a:rPr>
+              <a:t>prompts/</a:t>
+            </a:r>
+            <a:r>
+              <a:rPr sz="1900" b="0">
+                <a:solidFill>
+                  <a:srgbClr val="1A1A1A"/>
+                </a:solidFill>
+                <a:latin typeface="Segoe UI"/>
+              </a:rPr>
+              <a:t> into your repo. One file copy. Biggest single win.</a:t>
+            </a:r>
+          </a:p>
+          <a:p>
+            <a:pPr>
+              <a:spcAft>
+                <a:spcPts val="1100"/>
+              </a:spcAft>
+            </a:pPr>
+            <a:r>
+              <a:rPr sz="1900" b="0">
+                <a:solidFill>
+                  <a:srgbClr val="1A1A1A"/>
+                </a:solidFill>
+                <a:latin typeface="Segoe UI"/>
+              </a:rPr>
+              <a:t>•  </a:t>
+            </a:r>
+            <a:r>
+              <a:rPr sz="1900" b="1">
+                <a:solidFill>
+                  <a:srgbClr val="1A1A1A"/>
+                </a:solidFill>
+                <a:latin typeface="Segoe UI"/>
+              </a:rPr>
+              <a:t>L3 Grounded</a:t>
+            </a:r>
+            <a:r>
+              <a:rPr sz="1900" b="0">
+                <a:solidFill>
+                  <a:srgbClr val="1A1A1A"/>
+                </a:solidFill>
+                <a:latin typeface="Segoe UI"/>
+              </a:rPr>
+              <a:t> — connect the ABAP MCP server. Real objects, real field lists, real API states.</a:t>
+            </a:r>
+          </a:p>
+          <a:p>
+            <a:pPr>
+              <a:spcAft>
+                <a:spcPts val="1100"/>
+              </a:spcAft>
+            </a:pPr>
+            <a:r>
+              <a:rPr sz="1900" b="0">
+                <a:solidFill>
+                  <a:srgbClr val="1A1A1A"/>
+                </a:solidFill>
+                <a:latin typeface="Segoe UI"/>
+              </a:rPr>
+              <a:t>•  </a:t>
+            </a:r>
+            <a:r>
+              <a:rPr sz="1900" b="1">
+                <a:solidFill>
+                  <a:srgbClr val="1A1A1A"/>
+                </a:solidFill>
+                <a:latin typeface="Segoe UI"/>
+              </a:rPr>
+              <a:t>Prompts:</a:t>
+            </a:r>
+            <a:r>
+              <a:rPr sz="1900" b="0">
+                <a:solidFill>
+                  <a:srgbClr val="1A1A1A"/>
+                </a:solidFill>
+                <a:latin typeface="Segoe UI"/>
+              </a:rPr>
+              <a:t> </a:t>
+            </a:r>
+            <a:r>
+              <a:rPr sz="1900" b="0">
+                <a:solidFill>
+                  <a:srgbClr val="1A1A1A"/>
+                </a:solidFill>
+                <a:latin typeface="Consolas"/>
+              </a:rPr>
+              <a:t>/rap-bo-scaffold</a:t>
+            </a:r>
+            <a:r>
+              <a:rPr sz="1900" b="0">
+                <a:solidFill>
+                  <a:srgbClr val="1A1A1A"/>
+                </a:solidFill>
+                <a:latin typeface="Segoe UI"/>
+              </a:rPr>
+              <a:t> </a:t>
+            </a:r>
+            <a:r>
+              <a:rPr sz="1900" b="0">
+                <a:solidFill>
+                  <a:srgbClr val="1A1A1A"/>
+                </a:solidFill>
+                <a:latin typeface="Consolas"/>
+              </a:rPr>
+              <a:t>/cds-view-scaffold</a:t>
+            </a:r>
+            <a:r>
+              <a:rPr sz="1900" b="0">
+                <a:solidFill>
+                  <a:srgbClr val="1A1A1A"/>
+                </a:solidFill>
+                <a:latin typeface="Segoe UI"/>
+              </a:rPr>
+              <a:t> </a:t>
+            </a:r>
+            <a:r>
+              <a:rPr sz="1900" b="0">
+                <a:solidFill>
+                  <a:srgbClr val="1A1A1A"/>
+                </a:solidFill>
+                <a:latin typeface="Consolas"/>
+              </a:rPr>
+              <a:t>/abap-unit-test</a:t>
+            </a:r>
+            <a:r>
+              <a:rPr sz="1900" b="0">
+                <a:solidFill>
+                  <a:srgbClr val="1A1A1A"/>
+                </a:solidFill>
+                <a:latin typeface="Segoe UI"/>
+              </a:rPr>
+              <a:t> </a:t>
+            </a:r>
+            <a:r>
+              <a:rPr sz="1900" b="0">
+                <a:solidFill>
+                  <a:srgbClr val="1A1A1A"/>
+                </a:solidFill>
+                <a:latin typeface="Consolas"/>
+              </a:rPr>
+              <a:t>/odata-service-expose</a:t>
+            </a:r>
+            <a:r>
+              <a:rPr sz="1900" b="0">
+                <a:solidFill>
+                  <a:srgbClr val="1A1A1A"/>
+                </a:solidFill>
+                <a:latin typeface="Segoe UI"/>
+              </a:rPr>
+              <a:t> </a:t>
+            </a:r>
+            <a:r>
+              <a:rPr sz="1900" b="0">
+                <a:solidFill>
+                  <a:srgbClr val="1A1A1A"/>
+                </a:solidFill>
+                <a:latin typeface="Consolas"/>
+              </a:rPr>
+              <a:t>/clean-abap-review</a:t>
+            </a:r>
+            <a:r>
+              <a:rPr sz="1900" b="0">
+                <a:solidFill>
+                  <a:srgbClr val="1A1A1A"/>
+                </a:solidFill>
+                <a:latin typeface="Segoe UI"/>
+              </a:rPr>
+              <a:t> </a:t>
+            </a:r>
+            <a:r>
+              <a:rPr sz="1900" b="0">
+                <a:solidFill>
+                  <a:srgbClr val="1A1A1A"/>
+                </a:solidFill>
+                <a:latin typeface="Consolas"/>
+              </a:rPr>
+              <a:t>/abap-cloud-readiness</a:t>
+            </a:r>
+          </a:p>
+          <a:p>
+            <a:pPr>
+              <a:spcAft>
+                <a:spcPts val="1100"/>
+              </a:spcAft>
+            </a:pPr>
+            <a:r>
+              <a:rPr sz="1900" b="0">
+                <a:solidFill>
+                  <a:srgbClr val="1A1A1A"/>
+                </a:solidFill>
+                <a:latin typeface="Segoe UI"/>
+              </a:rPr>
+              <a:t>•  </a:t>
+            </a:r>
+            <a:r>
+              <a:rPr sz="1900" b="1">
+                <a:solidFill>
+                  <a:srgbClr val="1A1A1A"/>
+                </a:solidFill>
+                <a:latin typeface="Segoe UI"/>
+              </a:rPr>
+              <a:t>Rule 1:</a:t>
+            </a:r>
+            <a:r>
+              <a:rPr sz="1900" b="0">
+                <a:solidFill>
+                  <a:srgbClr val="1A1A1A"/>
+                </a:solidFill>
+                <a:latin typeface="Segoe UI"/>
+              </a:rPr>
+              <a:t> AI authorship ≠ compliance. · </a:t>
+            </a:r>
+            <a:r>
+              <a:rPr sz="1900" b="1">
+                <a:solidFill>
+                  <a:srgbClr val="1A1A1A"/>
+                </a:solidFill>
+                <a:latin typeface="Segoe UI"/>
+              </a:rPr>
+              <a:t>Rule 2:</a:t>
+            </a:r>
+            <a:r>
+              <a:rPr sz="1900" b="0">
+                <a:solidFill>
+                  <a:srgbClr val="1A1A1A"/>
+                </a:solidFill>
+                <a:latin typeface="Segoe UI"/>
+              </a:rPr>
+              <a:t> Generated code is reviewed like hand-written. The author owns it.</a:t>
             </a:r>
           </a:p>
         </p:txBody>
@@ -6264,161 +7085,14 @@
       <p:grpSpPr/>
       <p:sp>
         <p:nvSpPr>
-          <p:cNvPr id="2" name="Title 1"/>
-          <p:cNvSpPr>
-            <a:spLocks noGrp="1"/>
-          </p:cNvSpPr>
-          <p:nvPr>
-            <p:ph type="title"/>
-          </p:nvPr>
-        </p:nvSpPr>
-        <p:spPr/>
-        <p:txBody>
-          <a:bodyPr/>
-          <a:lstStyle/>
-          <a:p>
-            <a:r>
-              <a:rPr sz="3000" b="1">
-                <a:solidFill>
-                  <a:srgbClr val="1A1A1A"/>
-                </a:solidFill>
-                <a:latin typeface="Segoe UI"/>
-              </a:rPr>
-              <a:t>Discussion + Next Session</a:t>
-            </a:r>
-          </a:p>
-        </p:txBody>
-      </p:sp>
-      <p:sp>
-        <p:nvSpPr>
-          <p:cNvPr id="3" name="Content Placeholder 2"/>
-          <p:cNvSpPr>
-            <a:spLocks noGrp="1"/>
-          </p:cNvSpPr>
-          <p:nvPr>
-            <p:ph idx="1"/>
-          </p:nvPr>
+          <p:cNvPr id="2" name="TextBox 1"/>
+          <p:cNvSpPr txBox="1"/>
+          <p:nvPr/>
         </p:nvSpPr>
         <p:spPr>
           <a:xfrm>
-            <a:ext cx="10789920" cy="0"/>
-          </a:xfrm>
-        </p:spPr>
-        <p:txBody>
-          <a:bodyPr wrap="square"/>
-          <a:lstStyle/>
-          <a:p>
-            <a:pPr>
-              <a:spcAft>
-                <a:spcPts val="800"/>
-              </a:spcAft>
-            </a:pPr>
-            <a:r>
-              <a:rPr sz="1900">
-                <a:solidFill>
-                  <a:srgbClr val="1A1A1A"/>
-                </a:solidFill>
-                <a:latin typeface="Segoe UI"/>
-              </a:rPr>
-              <a:t>Where did Copilot last give you something </a:t>
-            </a:r>
-            <a:r>
-              <a:rPr b="1" sz="1900">
-                <a:solidFill>
-                  <a:srgbClr val="1A1A1A"/>
-                </a:solidFill>
-                <a:latin typeface="Segoe UI"/>
-              </a:rPr>
-              <a:t>confidently wrong</a:t>
-            </a:r>
-            <a:r>
-              <a:rPr sz="1900">
-                <a:solidFill>
-                  <a:srgbClr val="1A1A1A"/>
-                </a:solidFill>
-                <a:latin typeface="Segoe UI"/>
-              </a:rPr>
-              <a:t> in ABAP — and what would have caught it: the instructions, the MCP connection, or review?</a:t>
-            </a:r>
-          </a:p>
-          <a:p>
-            <a:pPr>
-              <a:spcAft>
-                <a:spcPts val="800"/>
-              </a:spcAft>
-            </a:pPr>
-            <a:r>
-              <a:rPr sz="1900">
-                <a:solidFill>
-                  <a:srgbClr val="1A1A1A"/>
-                </a:solidFill>
-                <a:latin typeface="Segoe UI"/>
-              </a:rPr>
-              <a:t>If an agent can read objects, run syntax checks and touch transport requests — what should it </a:t>
-            </a:r>
-            <a:r>
-              <a:rPr b="1" sz="1900">
-                <a:solidFill>
-                  <a:srgbClr val="1A1A1A"/>
-                </a:solidFill>
-                <a:latin typeface="Segoe UI"/>
-              </a:rPr>
-              <a:t>never</a:t>
-            </a:r>
-            <a:r>
-              <a:rPr sz="1900">
-                <a:solidFill>
-                  <a:srgbClr val="1A1A1A"/>
-                </a:solidFill>
-                <a:latin typeface="Segoe UI"/>
-              </a:rPr>
-              <a:t> do without a human approving it first?</a:t>
-            </a:r>
-          </a:p>
-          <a:p>
-            <a:pPr>
-              <a:spcAft>
-                <a:spcPts val="800"/>
-              </a:spcAft>
-            </a:pPr>
-            <a:r>
-              <a:rPr b="1" sz="1900">
-                <a:solidFill>
-                  <a:srgbClr val="1A1A1A"/>
-                </a:solidFill>
-                <a:latin typeface="Segoe UI"/>
-              </a:rPr>
-              <a:t>Next: Session 02, 25 Sept — RAP managed Business Object end-to-end</a:t>
-            </a:r>
-          </a:p>
-          <a:p>
-            <a:pPr>
-              <a:spcAft>
-                <a:spcPts val="800"/>
-              </a:spcAft>
-            </a:pPr>
-            <a:r>
-              <a:rPr sz="1900">
-                <a:solidFill>
-                  <a:srgbClr val="1A1A1A"/>
-                </a:solidFill>
-                <a:latin typeface="Segoe UI"/>
-              </a:rPr>
-              <a:t>*It will write you a determination where the rule should have been a validation. Session 2 is how you tell.*</a:t>
-            </a:r>
-          </a:p>
-        </p:txBody>
-      </p:sp>
-      <p:sp>
-        <p:nvSpPr>
-          <p:cNvPr id="4" name="TextBox 3"/>
-          <p:cNvSpPr txBox="1"/>
-          <p:nvPr/>
-        </p:nvSpPr>
-        <p:spPr>
-          <a:xfrm>
-            <a:off x="10332720" y="256032"/>
-            <a:ext cx="1645920" cy="365760"/>
+            <a:off x="685800" y="384048"/>
+            <a:ext cx="9326880" cy="868680"/>
           </a:xfrm>
           <a:prstGeom prst="rect">
             <a:avLst/>
@@ -6426,12 +7100,91 @@
           <a:noFill/>
         </p:spPr>
         <p:txBody>
-          <a:bodyPr wrap="none">
+          <a:bodyPr wrap="square" anchor="t">
             <a:spAutoFit/>
           </a:bodyPr>
           <a:lstStyle/>
           <a:p>
             <a:r>
+              <a:rPr sz="2900" b="1">
+                <a:solidFill>
+                  <a:srgbClr val="1A1A1A"/>
+                </a:solidFill>
+                <a:latin typeface="Segoe UI"/>
+              </a:rPr>
+              <a:t>Discussion + Next Session</a:t>
+            </a:r>
+          </a:p>
+        </p:txBody>
+      </p:sp>
+      <p:sp>
+        <p:nvSpPr>
+          <p:cNvPr id="3" name="Rectangle 2"/>
+          <p:cNvSpPr/>
+          <p:nvPr/>
+        </p:nvSpPr>
+        <p:spPr>
+          <a:xfrm>
+            <a:off x="685800" y="1316736"/>
+            <a:ext cx="1051560" cy="50292"/>
+          </a:xfrm>
+          <a:prstGeom prst="rect">
+            <a:avLst/>
+          </a:prstGeom>
+          <a:solidFill>
+            <a:srgbClr val="0A6ED1"/>
+          </a:solidFill>
+          <a:ln>
+            <a:noFill/>
+          </a:ln>
+          <a:effectLst/>
+        </p:spPr>
+        <p:style>
+          <a:lnRef idx="1">
+            <a:schemeClr val="accent1"/>
+          </a:lnRef>
+          <a:fillRef idx="3">
+            <a:schemeClr val="accent1"/>
+          </a:fillRef>
+          <a:effectRef idx="2">
+            <a:schemeClr val="accent1"/>
+          </a:effectRef>
+          <a:fontRef idx="minor">
+            <a:schemeClr val="lt1"/>
+          </a:fontRef>
+        </p:style>
+        <p:txBody>
+          <a:bodyPr rtlCol="0" anchor="ctr"/>
+          <a:lstStyle/>
+          <a:p>
+            <a:pPr algn="ctr"/>
+          </a:p>
+        </p:txBody>
+      </p:sp>
+      <p:sp>
+        <p:nvSpPr>
+          <p:cNvPr id="4" name="TextBox 3"/>
+          <p:cNvSpPr txBox="1"/>
+          <p:nvPr/>
+        </p:nvSpPr>
+        <p:spPr>
+          <a:xfrm>
+            <a:off x="10378440" y="457200"/>
+            <a:ext cx="1188720" cy="365760"/>
+          </a:xfrm>
+          <a:prstGeom prst="rect">
+            <a:avLst/>
+          </a:prstGeom>
+          <a:noFill/>
+        </p:spPr>
+        <p:txBody>
+          <a:bodyPr wrap="square">
+            <a:spAutoFit/>
+          </a:bodyPr>
+          <a:lstStyle/>
+          <a:p>
+            <a:pPr algn="r"/>
+            <a:r>
               <a:rPr sz="1200" b="1">
                 <a:solidFill>
                   <a:srgbClr val="0A6ED1"/>
@@ -6439,6 +7192,138 @@
                 <a:latin typeface="Segoe UI"/>
               </a:rPr>
               <a:t>5:00</a:t>
+            </a:r>
+          </a:p>
+        </p:txBody>
+      </p:sp>
+      <p:sp>
+        <p:nvSpPr>
+          <p:cNvPr id="5" name="TextBox 4"/>
+          <p:cNvSpPr txBox="1"/>
+          <p:nvPr/>
+        </p:nvSpPr>
+        <p:spPr>
+          <a:xfrm>
+            <a:off x="685800" y="1600200"/>
+            <a:ext cx="10817352" cy="4709160"/>
+          </a:xfrm>
+          <a:prstGeom prst="rect">
+            <a:avLst/>
+          </a:prstGeom>
+          <a:noFill/>
+        </p:spPr>
+        <p:txBody>
+          <a:bodyPr wrap="square">
+            <a:spAutoFit/>
+          </a:bodyPr>
+          <a:lstStyle/>
+          <a:p>
+            <a:pPr>
+              <a:spcAft>
+                <a:spcPts val="1100"/>
+              </a:spcAft>
+            </a:pPr>
+            <a:r>
+              <a:rPr sz="1900" b="0">
+                <a:solidFill>
+                  <a:srgbClr val="1A1A1A"/>
+                </a:solidFill>
+                <a:latin typeface="Segoe UI"/>
+              </a:rPr>
+              <a:t>•  Where did Copilot last give you something </a:t>
+            </a:r>
+            <a:r>
+              <a:rPr sz="1900" b="1">
+                <a:solidFill>
+                  <a:srgbClr val="1A1A1A"/>
+                </a:solidFill>
+                <a:latin typeface="Segoe UI"/>
+              </a:rPr>
+              <a:t>confidently wrong</a:t>
+            </a:r>
+            <a:r>
+              <a:rPr sz="1900" b="0">
+                <a:solidFill>
+                  <a:srgbClr val="1A1A1A"/>
+                </a:solidFill>
+                <a:latin typeface="Segoe UI"/>
+              </a:rPr>
+              <a:t> in ABAP — and what would have caught it: the instructions, the MCP connection, or review?</a:t>
+            </a:r>
+          </a:p>
+          <a:p>
+            <a:pPr>
+              <a:spcAft>
+                <a:spcPts val="1100"/>
+              </a:spcAft>
+            </a:pPr>
+            <a:r>
+              <a:rPr sz="1900" b="0">
+                <a:solidFill>
+                  <a:srgbClr val="1A1A1A"/>
+                </a:solidFill>
+                <a:latin typeface="Segoe UI"/>
+              </a:rPr>
+              <a:t>•  If an agent can read objects, run syntax checks and touch transport requests — what should it </a:t>
+            </a:r>
+            <a:r>
+              <a:rPr sz="1900" b="1">
+                <a:solidFill>
+                  <a:srgbClr val="1A1A1A"/>
+                </a:solidFill>
+                <a:latin typeface="Segoe UI"/>
+              </a:rPr>
+              <a:t>never</a:t>
+            </a:r>
+            <a:r>
+              <a:rPr sz="1900" b="0">
+                <a:solidFill>
+                  <a:srgbClr val="1A1A1A"/>
+                </a:solidFill>
+                <a:latin typeface="Segoe UI"/>
+              </a:rPr>
+              <a:t> do without a human approving it first?</a:t>
+            </a:r>
+          </a:p>
+          <a:p>
+            <a:pPr>
+              <a:spcAft>
+                <a:spcPts val="1100"/>
+              </a:spcAft>
+            </a:pPr>
+            <a:r>
+              <a:rPr sz="1900" b="0">
+                <a:solidFill>
+                  <a:srgbClr val="1A1A1A"/>
+                </a:solidFill>
+                <a:latin typeface="Segoe UI"/>
+              </a:rPr>
+              <a:t>•  </a:t>
+            </a:r>
+            <a:r>
+              <a:rPr sz="1900" b="1">
+                <a:solidFill>
+                  <a:srgbClr val="1A1A1A"/>
+                </a:solidFill>
+                <a:latin typeface="Segoe UI"/>
+              </a:rPr>
+              <a:t>Next: Session 02, 25 Sept — RAP managed Business Object end-to-end</a:t>
+            </a:r>
+          </a:p>
+          <a:p>
+            <a:pPr>
+              <a:spcAft>
+                <a:spcPts val="1100"/>
+              </a:spcAft>
+            </a:pPr>
+            <a:r>
+              <a:rPr sz="1900" b="0">
+                <a:solidFill>
+                  <a:srgbClr val="1A1A1A"/>
+                </a:solidFill>
+                <a:latin typeface="Segoe UI"/>
+              </a:rPr>
+              <a:t>•  *It will write you a determination where the rule should have been a validation. Session 2 is how you tell.*</a:t>
             </a:r>
           </a:p>
         </p:txBody>
@@ -6463,213 +7348,14 @@
       <p:grpSpPr/>
       <p:sp>
         <p:nvSpPr>
-          <p:cNvPr id="2" name="Title 1"/>
-          <p:cNvSpPr>
-            <a:spLocks noGrp="1"/>
-          </p:cNvSpPr>
-          <p:nvPr>
-            <p:ph type="title"/>
-          </p:nvPr>
-        </p:nvSpPr>
-        <p:spPr/>
-        <p:txBody>
-          <a:bodyPr/>
-          <a:lstStyle/>
-          <a:p>
-            <a:r>
-              <a:rPr sz="3000" b="1">
-                <a:solidFill>
-                  <a:srgbClr val="1A1A1A"/>
-                </a:solidFill>
-                <a:latin typeface="Segoe UI"/>
-              </a:rPr>
-              <a:t>Why This Session, Now</a:t>
-            </a:r>
-          </a:p>
-        </p:txBody>
-      </p:sp>
-      <p:sp>
-        <p:nvSpPr>
-          <p:cNvPr id="3" name="Content Placeholder 2"/>
-          <p:cNvSpPr>
-            <a:spLocks noGrp="1"/>
-          </p:cNvSpPr>
-          <p:nvPr>
-            <p:ph idx="1"/>
-          </p:nvPr>
+          <p:cNvPr id="2" name="TextBox 1"/>
+          <p:cNvSpPr txBox="1"/>
+          <p:nvPr/>
         </p:nvSpPr>
         <p:spPr>
           <a:xfrm>
-            <a:ext cx="10789920" cy="0"/>
-          </a:xfrm>
-        </p:spPr>
-        <p:txBody>
-          <a:bodyPr wrap="square"/>
-          <a:lstStyle/>
-          <a:p>
-            <a:pPr>
-              <a:spcAft>
-                <a:spcPts val="800"/>
-              </a:spcAft>
-            </a:pPr>
-            <a:r>
-              <a:rPr sz="1900">
-                <a:solidFill>
-                  <a:srgbClr val="1A1A1A"/>
-                </a:solidFill>
-                <a:latin typeface="Segoe UI"/>
-              </a:rPr>
-              <a:t>No Joule for Developers licence on this project — SAP's ABAP AI assistant is not available to us</a:t>
-            </a:r>
-          </a:p>
-          <a:p>
-            <a:pPr>
-              <a:spcAft>
-                <a:spcPts val="800"/>
-              </a:spcAft>
-            </a:pPr>
-            <a:r>
-              <a:rPr sz="1900">
-                <a:solidFill>
-                  <a:srgbClr val="1A1A1A"/>
-                </a:solidFill>
-                <a:latin typeface="Segoe UI"/>
-              </a:rPr>
-              <a:t>But every one of you already has </a:t>
-            </a:r>
-            <a:r>
-              <a:rPr b="1" sz="1900">
-                <a:solidFill>
-                  <a:srgbClr val="1A1A1A"/>
-                </a:solidFill>
-                <a:latin typeface="Segoe UI"/>
-              </a:rPr>
-              <a:t>GitHub Copilot</a:t>
-            </a:r>
-            <a:r>
-              <a:rPr sz="1900">
-                <a:solidFill>
-                  <a:srgbClr val="1A1A1A"/>
-                </a:solidFill>
-                <a:latin typeface="Segoe UI"/>
-              </a:rPr>
-              <a:t> in VS Code and Eclipse</a:t>
-            </a:r>
-          </a:p>
-          <a:p>
-            <a:pPr>
-              <a:spcAft>
-                <a:spcPts val="800"/>
-              </a:spcAft>
-            </a:pPr>
-            <a:r>
-              <a:rPr sz="1900">
-                <a:solidFill>
-                  <a:srgbClr val="1A1A1A"/>
-                </a:solidFill>
-                <a:latin typeface="Segoe UI"/>
-              </a:rPr>
-              <a:t>We have an </a:t>
-            </a:r>
-            <a:r>
-              <a:rPr b="1" sz="1900">
-                <a:solidFill>
-                  <a:srgbClr val="1A1A1A"/>
-                </a:solidFill>
-                <a:latin typeface="Segoe UI"/>
-              </a:rPr>
-              <a:t>ABAP MCP server</a:t>
-            </a:r>
-            <a:r>
-              <a:rPr sz="1900">
-                <a:solidFill>
-                  <a:srgbClr val="1A1A1A"/>
-                </a:solidFill>
-                <a:latin typeface="Segoe UI"/>
-              </a:rPr>
-              <a:t> configured that almost nobody uses</a:t>
-            </a:r>
-          </a:p>
-          <a:p>
-            <a:pPr>
-              <a:spcAft>
-                <a:spcPts val="800"/>
-              </a:spcAft>
-            </a:pPr>
-            <a:r>
-              <a:rPr sz="1900">
-                <a:solidFill>
-                  <a:srgbClr val="1A1A1A"/>
-                </a:solidFill>
-                <a:latin typeface="Segoe UI"/>
-              </a:rPr>
-              <a:t>Our </a:t>
-            </a:r>
-            <a:r>
-              <a:rPr sz="1900">
-                <a:solidFill>
-                  <a:srgbClr val="1A1A1A"/>
-                </a:solidFill>
-                <a:latin typeface="Consolas"/>
-              </a:rPr>
-              <a:t>sap-technical-assets</a:t>
-            </a:r>
-            <a:r>
-              <a:rPr sz="1900">
-                <a:solidFill>
-                  <a:srgbClr val="1A1A1A"/>
-                </a:solidFill>
-                <a:latin typeface="Segoe UI"/>
-              </a:rPr>
-              <a:t> repo has </a:t>
-            </a:r>
-            <a:r>
-              <a:rPr b="1" sz="1900">
-                <a:solidFill>
-                  <a:srgbClr val="1A1A1A"/>
-                </a:solidFill>
-                <a:latin typeface="Segoe UI"/>
-              </a:rPr>
-              <a:t>repo-wide Copilot instructions and 11 prompt files</a:t>
-            </a:r>
-            <a:r>
-              <a:rPr sz="1900">
-                <a:solidFill>
-                  <a:srgbClr val="1A1A1A"/>
-                </a:solidFill>
-                <a:latin typeface="Segoe UI"/>
-              </a:rPr>
-              <a:t> — written, committed, and unused</a:t>
-            </a:r>
-          </a:p>
-          <a:p>
-            <a:pPr>
-              <a:spcAft>
-                <a:spcPts val="800"/>
-              </a:spcAft>
-            </a:pPr>
-            <a:r>
-              <a:rPr sz="1900">
-                <a:solidFill>
-                  <a:srgbClr val="1A1A1A"/>
-                </a:solidFill>
-                <a:latin typeface="Segoe UI"/>
-              </a:rPr>
-              <a:t>The gap is not licensing. We are running level 1 tooling that goes to level 3.</a:t>
-            </a:r>
-          </a:p>
-        </p:txBody>
-      </p:sp>
-      <p:sp>
-        <p:nvSpPr>
-          <p:cNvPr id="4" name="TextBox 3"/>
-          <p:cNvSpPr txBox="1"/>
-          <p:nvPr/>
-        </p:nvSpPr>
-        <p:spPr>
-          <a:xfrm>
-            <a:off x="10332720" y="256032"/>
-            <a:ext cx="1645920" cy="365760"/>
+            <a:off x="685800" y="384048"/>
+            <a:ext cx="9326880" cy="868680"/>
           </a:xfrm>
           <a:prstGeom prst="rect">
             <a:avLst/>
@@ -6677,12 +7363,91 @@
           <a:noFill/>
         </p:spPr>
         <p:txBody>
-          <a:bodyPr wrap="none">
+          <a:bodyPr wrap="square" anchor="t">
             <a:spAutoFit/>
           </a:bodyPr>
           <a:lstStyle/>
           <a:p>
             <a:r>
+              <a:rPr sz="2900" b="1">
+                <a:solidFill>
+                  <a:srgbClr val="1A1A1A"/>
+                </a:solidFill>
+                <a:latin typeface="Segoe UI"/>
+              </a:rPr>
+              <a:t>Why This Session, Now</a:t>
+            </a:r>
+          </a:p>
+        </p:txBody>
+      </p:sp>
+      <p:sp>
+        <p:nvSpPr>
+          <p:cNvPr id="3" name="Rectangle 2"/>
+          <p:cNvSpPr/>
+          <p:nvPr/>
+        </p:nvSpPr>
+        <p:spPr>
+          <a:xfrm>
+            <a:off x="685800" y="1316736"/>
+            <a:ext cx="1051560" cy="50292"/>
+          </a:xfrm>
+          <a:prstGeom prst="rect">
+            <a:avLst/>
+          </a:prstGeom>
+          <a:solidFill>
+            <a:srgbClr val="0A6ED1"/>
+          </a:solidFill>
+          <a:ln>
+            <a:noFill/>
+          </a:ln>
+          <a:effectLst/>
+        </p:spPr>
+        <p:style>
+          <a:lnRef idx="1">
+            <a:schemeClr val="accent1"/>
+          </a:lnRef>
+          <a:fillRef idx="3">
+            <a:schemeClr val="accent1"/>
+          </a:fillRef>
+          <a:effectRef idx="2">
+            <a:schemeClr val="accent1"/>
+          </a:effectRef>
+          <a:fontRef idx="minor">
+            <a:schemeClr val="lt1"/>
+          </a:fontRef>
+        </p:style>
+        <p:txBody>
+          <a:bodyPr rtlCol="0" anchor="ctr"/>
+          <a:lstStyle/>
+          <a:p>
+            <a:pPr algn="ctr"/>
+          </a:p>
+        </p:txBody>
+      </p:sp>
+      <p:sp>
+        <p:nvSpPr>
+          <p:cNvPr id="4" name="TextBox 3"/>
+          <p:cNvSpPr txBox="1"/>
+          <p:nvPr/>
+        </p:nvSpPr>
+        <p:spPr>
+          <a:xfrm>
+            <a:off x="10378440" y="457200"/>
+            <a:ext cx="1188720" cy="365760"/>
+          </a:xfrm>
+          <a:prstGeom prst="rect">
+            <a:avLst/>
+          </a:prstGeom>
+          <a:noFill/>
+        </p:spPr>
+        <p:txBody>
+          <a:bodyPr wrap="square">
+            <a:spAutoFit/>
+          </a:bodyPr>
+          <a:lstStyle/>
+          <a:p>
+            <a:pPr algn="r"/>
+            <a:r>
               <a:rPr sz="1200" b="1">
                 <a:solidFill>
                   <a:srgbClr val="0A6ED1"/>
@@ -6690,6 +7455,181 @@
                 <a:latin typeface="Segoe UI"/>
               </a:rPr>
               <a:t>1:30</a:t>
+            </a:r>
+          </a:p>
+        </p:txBody>
+      </p:sp>
+      <p:sp>
+        <p:nvSpPr>
+          <p:cNvPr id="5" name="TextBox 4"/>
+          <p:cNvSpPr txBox="1"/>
+          <p:nvPr/>
+        </p:nvSpPr>
+        <p:spPr>
+          <a:xfrm>
+            <a:off x="685800" y="1600200"/>
+            <a:ext cx="10817352" cy="4709160"/>
+          </a:xfrm>
+          <a:prstGeom prst="rect">
+            <a:avLst/>
+          </a:prstGeom>
+          <a:noFill/>
+        </p:spPr>
+        <p:txBody>
+          <a:bodyPr wrap="square">
+            <a:spAutoFit/>
+          </a:bodyPr>
+          <a:lstStyle/>
+          <a:p>
+            <a:pPr>
+              <a:spcAft>
+                <a:spcPts val="1100"/>
+              </a:spcAft>
+            </a:pPr>
+            <a:r>
+              <a:rPr sz="1900" b="0">
+                <a:solidFill>
+                  <a:srgbClr val="1A1A1A"/>
+                </a:solidFill>
+                <a:latin typeface="Segoe UI"/>
+              </a:rPr>
+              <a:t>•  No Joule for Developers licence on this project — SAP's ABAP AI assistant is not available to us</a:t>
+            </a:r>
+          </a:p>
+          <a:p>
+            <a:pPr>
+              <a:spcAft>
+                <a:spcPts val="1100"/>
+              </a:spcAft>
+            </a:pPr>
+            <a:r>
+              <a:rPr sz="1900" b="0">
+                <a:solidFill>
+                  <a:srgbClr val="1A1A1A"/>
+                </a:solidFill>
+                <a:latin typeface="Segoe UI"/>
+              </a:rPr>
+              <a:t>•  But every one of you already has </a:t>
+            </a:r>
+            <a:r>
+              <a:rPr sz="1900" b="1">
+                <a:solidFill>
+                  <a:srgbClr val="1A1A1A"/>
+                </a:solidFill>
+                <a:latin typeface="Segoe UI"/>
+              </a:rPr>
+              <a:t>GitHub Copilot</a:t>
+            </a:r>
+            <a:r>
+              <a:rPr sz="1900" b="0">
+                <a:solidFill>
+                  <a:srgbClr val="1A1A1A"/>
+                </a:solidFill>
+                <a:latin typeface="Segoe UI"/>
+              </a:rPr>
+              <a:t> in VS Code and Eclipse</a:t>
+            </a:r>
+          </a:p>
+          <a:p>
+            <a:pPr>
+              <a:spcAft>
+                <a:spcPts val="1100"/>
+              </a:spcAft>
+            </a:pPr>
+            <a:r>
+              <a:rPr sz="1900" b="0">
+                <a:solidFill>
+                  <a:srgbClr val="1A1A1A"/>
+                </a:solidFill>
+                <a:latin typeface="Segoe UI"/>
+              </a:rPr>
+              <a:t>•  We have an </a:t>
+            </a:r>
+            <a:r>
+              <a:rPr sz="1900" b="1">
+                <a:solidFill>
+                  <a:srgbClr val="1A1A1A"/>
+                </a:solidFill>
+                <a:latin typeface="Segoe UI"/>
+              </a:rPr>
+              <a:t>ABAP MCP server</a:t>
+            </a:r>
+            <a:r>
+              <a:rPr sz="1900" b="0">
+                <a:solidFill>
+                  <a:srgbClr val="1A1A1A"/>
+                </a:solidFill>
+                <a:latin typeface="Segoe UI"/>
+              </a:rPr>
+              <a:t> configured that almost nobody uses</a:t>
+            </a:r>
+          </a:p>
+          <a:p>
+            <a:pPr>
+              <a:spcAft>
+                <a:spcPts val="1100"/>
+              </a:spcAft>
+            </a:pPr>
+            <a:r>
+              <a:rPr sz="1900" b="0">
+                <a:solidFill>
+                  <a:srgbClr val="1A1A1A"/>
+                </a:solidFill>
+                <a:latin typeface="Segoe UI"/>
+              </a:rPr>
+              <a:t>•  Our </a:t>
+            </a:r>
+            <a:r>
+              <a:rPr sz="1900" b="0">
+                <a:solidFill>
+                  <a:srgbClr val="1A1A1A"/>
+                </a:solidFill>
+                <a:latin typeface="Consolas"/>
+              </a:rPr>
+              <a:t>sap-technical-assets</a:t>
+            </a:r>
+            <a:r>
+              <a:rPr sz="1900" b="0">
+                <a:solidFill>
+                  <a:srgbClr val="1A1A1A"/>
+                </a:solidFill>
+                <a:latin typeface="Segoe UI"/>
+              </a:rPr>
+              <a:t> repo has </a:t>
+            </a:r>
+            <a:r>
+              <a:rPr sz="1900" b="1">
+                <a:solidFill>
+                  <a:srgbClr val="1A1A1A"/>
+                </a:solidFill>
+                <a:latin typeface="Segoe UI"/>
+              </a:rPr>
+              <a:t>repo-wide Copilot instructions and 11 prompt files</a:t>
+            </a:r>
+            <a:r>
+              <a:rPr sz="1900" b="0">
+                <a:solidFill>
+                  <a:srgbClr val="1A1A1A"/>
+                </a:solidFill>
+                <a:latin typeface="Segoe UI"/>
+              </a:rPr>
+              <a:t> — written, committed, and unused</a:t>
+            </a:r>
+          </a:p>
+          <a:p>
+            <a:pPr>
+              <a:spcAft>
+                <a:spcPts val="1100"/>
+              </a:spcAft>
+            </a:pPr>
+            <a:r>
+              <a:rPr sz="1900" b="0">
+                <a:solidFill>
+                  <a:srgbClr val="1A1A1A"/>
+                </a:solidFill>
+                <a:latin typeface="Segoe UI"/>
+              </a:rPr>
+              <a:t>•  The gap is not licensing. We are running level 1 tooling that goes to level 3.</a:t>
             </a:r>
           </a:p>
         </p:txBody>
@@ -6714,199 +7654,14 @@
       <p:grpSpPr/>
       <p:sp>
         <p:nvSpPr>
-          <p:cNvPr id="2" name="Title 1"/>
-          <p:cNvSpPr>
-            <a:spLocks noGrp="1"/>
-          </p:cNvSpPr>
-          <p:nvPr>
-            <p:ph type="title"/>
-          </p:nvPr>
-        </p:nvSpPr>
-        <p:spPr/>
-        <p:txBody>
-          <a:bodyPr/>
-          <a:lstStyle/>
-          <a:p>
-            <a:r>
-              <a:rPr sz="3000" b="1">
-                <a:solidFill>
-                  <a:srgbClr val="1A1A1A"/>
-                </a:solidFill>
-                <a:latin typeface="Segoe UI"/>
-              </a:rPr>
-              <a:t>What You'll Be Able to Do After This</a:t>
-            </a:r>
-          </a:p>
-        </p:txBody>
-      </p:sp>
-      <p:sp>
-        <p:nvSpPr>
-          <p:cNvPr id="3" name="Content Placeholder 2"/>
-          <p:cNvSpPr>
-            <a:spLocks noGrp="1"/>
-          </p:cNvSpPr>
-          <p:nvPr>
-            <p:ph idx="1"/>
-          </p:nvPr>
+          <p:cNvPr id="2" name="TextBox 1"/>
+          <p:cNvSpPr txBox="1"/>
+          <p:nvPr/>
         </p:nvSpPr>
         <p:spPr>
           <a:xfrm>
-            <a:ext cx="10789920" cy="0"/>
-          </a:xfrm>
-        </p:spPr>
-        <p:txBody>
-          <a:bodyPr wrap="square"/>
-          <a:lstStyle/>
-          <a:p>
-            <a:pPr>
-              <a:spcAft>
-                <a:spcPts val="800"/>
-              </a:spcAft>
-            </a:pPr>
-            <a:r>
-              <a:rPr sz="1900">
-                <a:solidFill>
-                  <a:srgbClr val="1A1A1A"/>
-                </a:solidFill>
-                <a:latin typeface="Segoe UI"/>
-              </a:rPr>
-              <a:t>Install our Copilot instructions and prompt files in </a:t>
-            </a:r>
-            <a:r>
-              <a:rPr b="1" sz="1900">
-                <a:solidFill>
-                  <a:srgbClr val="1A1A1A"/>
-                </a:solidFill>
-                <a:latin typeface="Segoe UI"/>
-              </a:rPr>
-              <a:t>your own project repo</a:t>
-            </a:r>
-            <a:r>
-              <a:rPr sz="1900">
-                <a:solidFill>
-                  <a:srgbClr val="1A1A1A"/>
-                </a:solidFill>
-                <a:latin typeface="Segoe UI"/>
-              </a:rPr>
-              <a:t>, and run </a:t>
-            </a:r>
-            <a:r>
-              <a:rPr sz="1900">
-                <a:solidFill>
-                  <a:srgbClr val="1A1A1A"/>
-                </a:solidFill>
-                <a:latin typeface="Consolas"/>
-              </a:rPr>
-              <a:t>/rap-bo-scaffold</a:t>
-            </a:r>
-            <a:r>
-              <a:rPr sz="1900">
-                <a:solidFill>
-                  <a:srgbClr val="1A1A1A"/>
-                </a:solidFill>
-                <a:latin typeface="Segoe UI"/>
-              </a:rPr>
-              <a:t> and </a:t>
-            </a:r>
-            <a:r>
-              <a:rPr sz="1900">
-                <a:solidFill>
-                  <a:srgbClr val="1A1A1A"/>
-                </a:solidFill>
-                <a:latin typeface="Consolas"/>
-              </a:rPr>
-              <a:t>/abap-unit-test</a:t>
-            </a:r>
-            <a:r>
-              <a:rPr sz="1900">
-                <a:solidFill>
-                  <a:srgbClr val="1A1A1A"/>
-                </a:solidFill>
-                <a:latin typeface="Segoe UI"/>
-              </a:rPr>
-              <a:t> end to end</a:t>
-            </a:r>
-          </a:p>
-          <a:p>
-            <a:pPr>
-              <a:spcAft>
-                <a:spcPts val="800"/>
-              </a:spcAft>
-            </a:pPr>
-            <a:r>
-              <a:rPr sz="1900">
-                <a:solidFill>
-                  <a:srgbClr val="1A1A1A"/>
-                </a:solidFill>
-                <a:latin typeface="Segoe UI"/>
-              </a:rPr>
-              <a:t>Explain and demonstrate why an </a:t>
-            </a:r>
-            <a:r>
-              <a:rPr b="1" sz="1900">
-                <a:solidFill>
-                  <a:srgbClr val="1A1A1A"/>
-                </a:solidFill>
-                <a:latin typeface="Segoe UI"/>
-              </a:rPr>
-              <a:t>MCP-connected agent</a:t>
-            </a:r>
-            <a:r>
-              <a:rPr sz="1900">
-                <a:solidFill>
-                  <a:srgbClr val="1A1A1A"/>
-                </a:solidFill>
-                <a:latin typeface="Segoe UI"/>
-              </a:rPr>
-              <a:t> answers differently from plain chat — and say when that difference matters</a:t>
-            </a:r>
-          </a:p>
-          <a:p>
-            <a:pPr>
-              <a:spcAft>
-                <a:spcPts val="800"/>
-              </a:spcAft>
-            </a:pPr>
-            <a:r>
-              <a:rPr sz="1900">
-                <a:solidFill>
-                  <a:srgbClr val="1A1A1A"/>
-                </a:solidFill>
-                <a:latin typeface="Segoe UI"/>
-              </a:rPr>
-              <a:t>Apply the </a:t>
-            </a:r>
-            <a:r>
-              <a:rPr b="1" sz="1900">
-                <a:solidFill>
-                  <a:srgbClr val="1A1A1A"/>
-                </a:solidFill>
-                <a:latin typeface="Segoe UI"/>
-              </a:rPr>
-              <a:t>two guardrails</a:t>
-            </a:r>
-            <a:r>
-              <a:rPr sz="1900">
-                <a:solidFill>
-                  <a:srgbClr val="1A1A1A"/>
-                </a:solidFill>
-                <a:latin typeface="Segoe UI"/>
-              </a:rPr>
-              <a:t> to any generated line: the released-API check still applies, and generated code is reviewed like hand-written code</a:t>
-            </a:r>
-          </a:p>
-        </p:txBody>
-      </p:sp>
-      <p:sp>
-        <p:nvSpPr>
-          <p:cNvPr id="4" name="TextBox 3"/>
-          <p:cNvSpPr txBox="1"/>
-          <p:nvPr/>
-        </p:nvSpPr>
-        <p:spPr>
-          <a:xfrm>
-            <a:off x="10332720" y="256032"/>
-            <a:ext cx="1645920" cy="365760"/>
+            <a:off x="685800" y="384048"/>
+            <a:ext cx="9326880" cy="868680"/>
           </a:xfrm>
           <a:prstGeom prst="rect">
             <a:avLst/>
@@ -6914,12 +7669,91 @@
           <a:noFill/>
         </p:spPr>
         <p:txBody>
-          <a:bodyPr wrap="none">
+          <a:bodyPr wrap="square" anchor="t">
             <a:spAutoFit/>
           </a:bodyPr>
           <a:lstStyle/>
           <a:p>
             <a:r>
+              <a:rPr sz="2900" b="1">
+                <a:solidFill>
+                  <a:srgbClr val="1A1A1A"/>
+                </a:solidFill>
+                <a:latin typeface="Segoe UI"/>
+              </a:rPr>
+              <a:t>What You'll Be Able to Do After This</a:t>
+            </a:r>
+          </a:p>
+        </p:txBody>
+      </p:sp>
+      <p:sp>
+        <p:nvSpPr>
+          <p:cNvPr id="3" name="Rectangle 2"/>
+          <p:cNvSpPr/>
+          <p:nvPr/>
+        </p:nvSpPr>
+        <p:spPr>
+          <a:xfrm>
+            <a:off x="685800" y="1316736"/>
+            <a:ext cx="1051560" cy="50292"/>
+          </a:xfrm>
+          <a:prstGeom prst="rect">
+            <a:avLst/>
+          </a:prstGeom>
+          <a:solidFill>
+            <a:srgbClr val="0A6ED1"/>
+          </a:solidFill>
+          <a:ln>
+            <a:noFill/>
+          </a:ln>
+          <a:effectLst/>
+        </p:spPr>
+        <p:style>
+          <a:lnRef idx="1">
+            <a:schemeClr val="accent1"/>
+          </a:lnRef>
+          <a:fillRef idx="3">
+            <a:schemeClr val="accent1"/>
+          </a:fillRef>
+          <a:effectRef idx="2">
+            <a:schemeClr val="accent1"/>
+          </a:effectRef>
+          <a:fontRef idx="minor">
+            <a:schemeClr val="lt1"/>
+          </a:fontRef>
+        </p:style>
+        <p:txBody>
+          <a:bodyPr rtlCol="0" anchor="ctr"/>
+          <a:lstStyle/>
+          <a:p>
+            <a:pPr algn="ctr"/>
+          </a:p>
+        </p:txBody>
+      </p:sp>
+      <p:sp>
+        <p:nvSpPr>
+          <p:cNvPr id="4" name="TextBox 3"/>
+          <p:cNvSpPr txBox="1"/>
+          <p:nvPr/>
+        </p:nvSpPr>
+        <p:spPr>
+          <a:xfrm>
+            <a:off x="10378440" y="457200"/>
+            <a:ext cx="1188720" cy="365760"/>
+          </a:xfrm>
+          <a:prstGeom prst="rect">
+            <a:avLst/>
+          </a:prstGeom>
+          <a:noFill/>
+        </p:spPr>
+        <p:txBody>
+          <a:bodyPr wrap="square">
+            <a:spAutoFit/>
+          </a:bodyPr>
+          <a:lstStyle/>
+          <a:p>
+            <a:pPr algn="r"/>
+            <a:r>
               <a:rPr sz="1200" b="1">
                 <a:solidFill>
                   <a:srgbClr val="0A6ED1"/>
@@ -6927,6 +7761,167 @@
                 <a:latin typeface="Segoe UI"/>
               </a:rPr>
               <a:t>1:00</a:t>
+            </a:r>
+          </a:p>
+        </p:txBody>
+      </p:sp>
+      <p:sp>
+        <p:nvSpPr>
+          <p:cNvPr id="5" name="TextBox 4"/>
+          <p:cNvSpPr txBox="1"/>
+          <p:nvPr/>
+        </p:nvSpPr>
+        <p:spPr>
+          <a:xfrm>
+            <a:off x="685800" y="1600200"/>
+            <a:ext cx="10817352" cy="4709160"/>
+          </a:xfrm>
+          <a:prstGeom prst="rect">
+            <a:avLst/>
+          </a:prstGeom>
+          <a:noFill/>
+        </p:spPr>
+        <p:txBody>
+          <a:bodyPr wrap="square">
+            <a:spAutoFit/>
+          </a:bodyPr>
+          <a:lstStyle/>
+          <a:p>
+            <a:pPr>
+              <a:spcAft>
+                <a:spcPts val="1100"/>
+              </a:spcAft>
+            </a:pPr>
+            <a:r>
+              <a:rPr sz="1900" b="0">
+                <a:solidFill>
+                  <a:srgbClr val="1A1A1A"/>
+                </a:solidFill>
+                <a:latin typeface="Segoe UI"/>
+              </a:rPr>
+              <a:t>•  Install our Copilot instructions and prompt files in </a:t>
+            </a:r>
+            <a:r>
+              <a:rPr sz="1900" b="1">
+                <a:solidFill>
+                  <a:srgbClr val="1A1A1A"/>
+                </a:solidFill>
+                <a:latin typeface="Segoe UI"/>
+              </a:rPr>
+              <a:t>your own project repo</a:t>
+            </a:r>
+            <a:r>
+              <a:rPr sz="1900" b="0">
+                <a:solidFill>
+                  <a:srgbClr val="1A1A1A"/>
+                </a:solidFill>
+                <a:latin typeface="Segoe UI"/>
+              </a:rPr>
+              <a:t>, and run </a:t>
+            </a:r>
+            <a:r>
+              <a:rPr sz="1900" b="0">
+                <a:solidFill>
+                  <a:srgbClr val="1A1A1A"/>
+                </a:solidFill>
+                <a:latin typeface="Consolas"/>
+              </a:rPr>
+              <a:t>/rap-bo-scaffold</a:t>
+            </a:r>
+            <a:r>
+              <a:rPr sz="1900" b="0">
+                <a:solidFill>
+                  <a:srgbClr val="1A1A1A"/>
+                </a:solidFill>
+                <a:latin typeface="Segoe UI"/>
+              </a:rPr>
+              <a:t> and </a:t>
+            </a:r>
+            <a:r>
+              <a:rPr sz="1900" b="0">
+                <a:solidFill>
+                  <a:srgbClr val="1A1A1A"/>
+                </a:solidFill>
+                <a:latin typeface="Consolas"/>
+              </a:rPr>
+              <a:t>/abap-unit-test</a:t>
+            </a:r>
+            <a:r>
+              <a:rPr sz="1900" b="0">
+                <a:solidFill>
+                  <a:srgbClr val="1A1A1A"/>
+                </a:solidFill>
+                <a:latin typeface="Segoe UI"/>
+              </a:rPr>
+              <a:t> end to end</a:t>
+            </a:r>
+          </a:p>
+          <a:p>
+            <a:pPr>
+              <a:spcAft>
+                <a:spcPts val="1100"/>
+              </a:spcAft>
+            </a:pPr>
+            <a:r>
+              <a:rPr sz="1900" b="0">
+                <a:solidFill>
+                  <a:srgbClr val="1A1A1A"/>
+                </a:solidFill>
+                <a:latin typeface="Segoe UI"/>
+              </a:rPr>
+              <a:t>•  Explain and demonstrate why an </a:t>
+            </a:r>
+            <a:r>
+              <a:rPr sz="1900" b="1">
+                <a:solidFill>
+                  <a:srgbClr val="1A1A1A"/>
+                </a:solidFill>
+                <a:latin typeface="Segoe UI"/>
+              </a:rPr>
+              <a:t>MCP-connected agent</a:t>
+            </a:r>
+            <a:r>
+              <a:rPr sz="1900" b="0">
+                <a:solidFill>
+                  <a:srgbClr val="1A1A1A"/>
+                </a:solidFill>
+                <a:latin typeface="Segoe UI"/>
+              </a:rPr>
+              <a:t> answers differently from plain chat — and say when that difference matters</a:t>
+            </a:r>
+          </a:p>
+          <a:p>
+            <a:pPr>
+              <a:spcAft>
+                <a:spcPts val="1100"/>
+              </a:spcAft>
+            </a:pPr>
+            <a:r>
+              <a:rPr sz="1900" b="0">
+                <a:solidFill>
+                  <a:srgbClr val="1A1A1A"/>
+                </a:solidFill>
+                <a:latin typeface="Segoe UI"/>
+              </a:rPr>
+              <a:t>•  Apply the </a:t>
+            </a:r>
+            <a:r>
+              <a:rPr sz="1900" b="1">
+                <a:solidFill>
+                  <a:srgbClr val="1A1A1A"/>
+                </a:solidFill>
+                <a:latin typeface="Segoe UI"/>
+              </a:rPr>
+              <a:t>two guardrails</a:t>
+            </a:r>
+            <a:r>
+              <a:rPr sz="1900" b="0">
+                <a:solidFill>
+                  <a:srgbClr val="1A1A1A"/>
+                </a:solidFill>
+                <a:latin typeface="Segoe UI"/>
+              </a:rPr>
+              <a:t> to any generated line: the released-API check still applies, and generated code is reviewed like hand-written code</a:t>
             </a:r>
           </a:p>
         </p:txBody>
@@ -6951,161 +7946,14 @@
       <p:grpSpPr/>
       <p:sp>
         <p:nvSpPr>
-          <p:cNvPr id="2" name="Title 1"/>
-          <p:cNvSpPr>
-            <a:spLocks noGrp="1"/>
-          </p:cNvSpPr>
-          <p:nvPr>
-            <p:ph type="title"/>
-          </p:nvPr>
-        </p:nvSpPr>
-        <p:spPr/>
-        <p:txBody>
-          <a:bodyPr/>
-          <a:lstStyle/>
-          <a:p>
-            <a:r>
-              <a:rPr sz="3000" b="1">
-                <a:solidFill>
-                  <a:srgbClr val="1A1A1A"/>
-                </a:solidFill>
-                <a:latin typeface="Segoe UI"/>
-              </a:rPr>
-              <a:t>The Three Levels of AI Assistance</a:t>
-            </a:r>
-          </a:p>
-        </p:txBody>
-      </p:sp>
-      <p:sp>
-        <p:nvSpPr>
-          <p:cNvPr id="3" name="Content Placeholder 2"/>
-          <p:cNvSpPr>
-            <a:spLocks noGrp="1"/>
-          </p:cNvSpPr>
-          <p:nvPr>
-            <p:ph idx="1"/>
-          </p:nvPr>
+          <p:cNvPr id="2" name="TextBox 1"/>
+          <p:cNvSpPr txBox="1"/>
+          <p:nvPr/>
         </p:nvSpPr>
         <p:spPr>
           <a:xfrm>
-            <a:ext cx="10789920" cy="0"/>
-          </a:xfrm>
-        </p:spPr>
-        <p:txBody>
-          <a:bodyPr wrap="square"/>
-          <a:lstStyle/>
-          <a:p>
-            <a:pPr>
-              <a:spcAft>
-                <a:spcPts val="800"/>
-              </a:spcAft>
-            </a:pPr>
-            <a:r>
-              <a:rPr b="1" sz="1900">
-                <a:solidFill>
-                  <a:srgbClr val="1A1A1A"/>
-                </a:solidFill>
-                <a:latin typeface="Segoe UI"/>
-              </a:rPr>
-              <a:t>Level 1 — Ungrounded.</a:t>
-            </a:r>
-            <a:r>
-              <a:rPr sz="1900">
-                <a:solidFill>
-                  <a:srgbClr val="1A1A1A"/>
-                </a:solidFill>
-                <a:latin typeface="Segoe UI"/>
-              </a:rPr>
-              <a:t> Plain Copilot, no configuration. Knows generic ABAP from its training data.</a:t>
-            </a:r>
-          </a:p>
-          <a:p>
-            <a:pPr>
-              <a:spcAft>
-                <a:spcPts val="800"/>
-              </a:spcAft>
-            </a:pPr>
-            <a:r>
-              <a:rPr b="1" sz="1900">
-                <a:solidFill>
-                  <a:srgbClr val="1A1A1A"/>
-                </a:solidFill>
-                <a:latin typeface="Segoe UI"/>
-              </a:rPr>
-              <a:t>Level 2 — Instructed.</a:t>
-            </a:r>
-            <a:r>
-              <a:rPr sz="1900">
-                <a:solidFill>
-                  <a:srgbClr val="1A1A1A"/>
-                </a:solidFill>
-                <a:latin typeface="Segoe UI"/>
-              </a:rPr>
-              <a:t> Add repo-wide instructions and reusable prompt files. Now it knows *our* platform, standards, naming and Clean Core rules.</a:t>
-            </a:r>
-          </a:p>
-          <a:p>
-            <a:pPr>
-              <a:spcAft>
-                <a:spcPts val="800"/>
-              </a:spcAft>
-            </a:pPr>
-            <a:r>
-              <a:rPr b="1" sz="1900">
-                <a:solidFill>
-                  <a:srgbClr val="1A1A1A"/>
-                </a:solidFill>
-                <a:latin typeface="Segoe UI"/>
-              </a:rPr>
-              <a:t>Level 3 — Grounded / agentic.</a:t>
-            </a:r>
-            <a:r>
-              <a:rPr sz="1900">
-                <a:solidFill>
-                  <a:srgbClr val="1A1A1A"/>
-                </a:solidFill>
-                <a:latin typeface="Segoe UI"/>
-              </a:rPr>
-              <a:t> Add the MCP server. Now it reads the *actual* objects, field lists and API release states from our system.</a:t>
-            </a:r>
-          </a:p>
-          <a:p>
-            <a:pPr>
-              <a:spcAft>
-                <a:spcPts val="800"/>
-              </a:spcAft>
-            </a:pPr>
-            <a:r>
-              <a:rPr sz="1900">
-                <a:solidFill>
-                  <a:srgbClr val="1A1A1A"/>
-                </a:solidFill>
-                <a:latin typeface="Segoe UI"/>
-              </a:rPr>
-              <a:t>The model does not get smarter between levels. </a:t>
-            </a:r>
-            <a:r>
-              <a:rPr b="1" sz="1900">
-                <a:solidFill>
-                  <a:srgbClr val="1A1A1A"/>
-                </a:solidFill>
-                <a:latin typeface="Segoe UI"/>
-              </a:rPr>
-              <a:t>We give it context.</a:t>
-            </a:r>
-          </a:p>
-        </p:txBody>
-      </p:sp>
-      <p:sp>
-        <p:nvSpPr>
-          <p:cNvPr id="4" name="TextBox 3"/>
-          <p:cNvSpPr txBox="1"/>
-          <p:nvPr/>
-        </p:nvSpPr>
-        <p:spPr>
-          <a:xfrm>
-            <a:off x="10332720" y="256032"/>
-            <a:ext cx="1645920" cy="365760"/>
+            <a:off x="685800" y="384048"/>
+            <a:ext cx="9326880" cy="868680"/>
           </a:xfrm>
           <a:prstGeom prst="rect">
             <a:avLst/>
@@ -7113,12 +7961,91 @@
           <a:noFill/>
         </p:spPr>
         <p:txBody>
-          <a:bodyPr wrap="none">
+          <a:bodyPr wrap="square" anchor="t">
             <a:spAutoFit/>
           </a:bodyPr>
           <a:lstStyle/>
           <a:p>
             <a:r>
+              <a:rPr sz="2900" b="1">
+                <a:solidFill>
+                  <a:srgbClr val="1A1A1A"/>
+                </a:solidFill>
+                <a:latin typeface="Segoe UI"/>
+              </a:rPr>
+              <a:t>The Three Levels of AI Assistance</a:t>
+            </a:r>
+          </a:p>
+        </p:txBody>
+      </p:sp>
+      <p:sp>
+        <p:nvSpPr>
+          <p:cNvPr id="3" name="Rectangle 2"/>
+          <p:cNvSpPr/>
+          <p:nvPr/>
+        </p:nvSpPr>
+        <p:spPr>
+          <a:xfrm>
+            <a:off x="685800" y="1316736"/>
+            <a:ext cx="1051560" cy="50292"/>
+          </a:xfrm>
+          <a:prstGeom prst="rect">
+            <a:avLst/>
+          </a:prstGeom>
+          <a:solidFill>
+            <a:srgbClr val="0A6ED1"/>
+          </a:solidFill>
+          <a:ln>
+            <a:noFill/>
+          </a:ln>
+          <a:effectLst/>
+        </p:spPr>
+        <p:style>
+          <a:lnRef idx="1">
+            <a:schemeClr val="accent1"/>
+          </a:lnRef>
+          <a:fillRef idx="3">
+            <a:schemeClr val="accent1"/>
+          </a:fillRef>
+          <a:effectRef idx="2">
+            <a:schemeClr val="accent1"/>
+          </a:effectRef>
+          <a:fontRef idx="minor">
+            <a:schemeClr val="lt1"/>
+          </a:fontRef>
+        </p:style>
+        <p:txBody>
+          <a:bodyPr rtlCol="0" anchor="ctr"/>
+          <a:lstStyle/>
+          <a:p>
+            <a:pPr algn="ctr"/>
+          </a:p>
+        </p:txBody>
+      </p:sp>
+      <p:sp>
+        <p:nvSpPr>
+          <p:cNvPr id="4" name="TextBox 3"/>
+          <p:cNvSpPr txBox="1"/>
+          <p:nvPr/>
+        </p:nvSpPr>
+        <p:spPr>
+          <a:xfrm>
+            <a:off x="10378440" y="457200"/>
+            <a:ext cx="1188720" cy="365760"/>
+          </a:xfrm>
+          <a:prstGeom prst="rect">
+            <a:avLst/>
+          </a:prstGeom>
+          <a:noFill/>
+        </p:spPr>
+        <p:txBody>
+          <a:bodyPr wrap="square">
+            <a:spAutoFit/>
+          </a:bodyPr>
+          <a:lstStyle/>
+          <a:p>
+            <a:pPr algn="r"/>
+            <a:r>
               <a:rPr sz="1200" b="1">
                 <a:solidFill>
                   <a:srgbClr val="0A6ED1"/>
@@ -7126,6 +8053,378 @@
                 <a:latin typeface="Segoe UI"/>
               </a:rPr>
               <a:t>3:00</a:t>
+            </a:r>
+          </a:p>
+        </p:txBody>
+      </p:sp>
+      <p:sp>
+        <p:nvSpPr>
+          <p:cNvPr id="5" name="Rounded Rectangle 4"/>
+          <p:cNvSpPr/>
+          <p:nvPr/>
+        </p:nvSpPr>
+        <p:spPr>
+          <a:xfrm>
+            <a:off x="685800" y="3082625"/>
+            <a:ext cx="3436010" cy="2494117"/>
+          </a:xfrm>
+          <a:prstGeom prst="roundRect">
+            <a:avLst/>
+          </a:prstGeom>
+          <a:solidFill>
+            <a:srgbClr val="E8F1FB"/>
+          </a:solidFill>
+          <a:ln w="15875">
+            <a:solidFill>
+              <a:srgbClr val="0A6ED1"/>
+            </a:solidFill>
+          </a:ln>
+          <a:effectLst/>
+        </p:spPr>
+        <p:style>
+          <a:lnRef idx="1">
+            <a:schemeClr val="accent1"/>
+          </a:lnRef>
+          <a:fillRef idx="3">
+            <a:schemeClr val="accent1"/>
+          </a:fillRef>
+          <a:effectRef idx="2">
+            <a:schemeClr val="accent1"/>
+          </a:effectRef>
+          <a:fontRef idx="minor">
+            <a:schemeClr val="lt1"/>
+          </a:fontRef>
+        </p:style>
+        <p:txBody>
+          <a:bodyPr rtlCol="0" anchor="ctr" wrap="square" lIns="146304" rIns="146304" tIns="109728" bIns="109728"/>
+          <a:lstStyle/>
+          <a:p>
+            <a:pPr algn="ctr"/>
+            <a:r>
+              <a:rPr sz="1800" b="1">
+                <a:solidFill>
+                  <a:srgbClr val="054A8F"/>
+                </a:solidFill>
+                <a:latin typeface="Segoe UI"/>
+              </a:rPr>
+              <a:t>Level 1 — Ungrounded</a:t>
+            </a:r>
+          </a:p>
+          <a:p>
+            <a:pPr algn="ctr">
+              <a:spcBef>
+                <a:spcPts val="400"/>
+              </a:spcBef>
+            </a:pPr>
+            <a:r>
+              <a:rPr sz="1300" b="0">
+                <a:solidFill>
+                  <a:srgbClr val="1A1A1A"/>
+                </a:solidFill>
+                <a:latin typeface="Segoe UI"/>
+              </a:rPr>
+              <a:t>Plain Copilot, no configuration. Generic ABAP from its training data.</a:t>
+            </a:r>
+          </a:p>
+        </p:txBody>
+      </p:sp>
+      <p:sp>
+        <p:nvSpPr>
+          <p:cNvPr id="6" name="Right Arrow 5"/>
+          <p:cNvSpPr/>
+          <p:nvPr/>
+        </p:nvSpPr>
+        <p:spPr>
+          <a:xfrm>
+            <a:off x="4140098" y="3570732"/>
+            <a:ext cx="219456" cy="201168"/>
+          </a:xfrm>
+          <a:prstGeom prst="rightArrow">
+            <a:avLst/>
+          </a:prstGeom>
+          <a:solidFill>
+            <a:srgbClr val="0A6ED1"/>
+          </a:solidFill>
+          <a:ln>
+            <a:noFill/>
+          </a:ln>
+          <a:effectLst/>
+        </p:spPr>
+        <p:style>
+          <a:lnRef idx="1">
+            <a:schemeClr val="accent1"/>
+          </a:lnRef>
+          <a:fillRef idx="3">
+            <a:schemeClr val="accent1"/>
+          </a:fillRef>
+          <a:effectRef idx="2">
+            <a:schemeClr val="accent1"/>
+          </a:effectRef>
+          <a:fontRef idx="minor">
+            <a:schemeClr val="lt1"/>
+          </a:fontRef>
+        </p:style>
+        <p:txBody>
+          <a:bodyPr rtlCol="0" anchor="ctr"/>
+          <a:lstStyle/>
+          <a:p>
+            <a:pPr algn="ctr"/>
+          </a:p>
+        </p:txBody>
+      </p:sp>
+      <p:sp>
+        <p:nvSpPr>
+          <p:cNvPr id="7" name="Rounded Rectangle 6"/>
+          <p:cNvSpPr/>
+          <p:nvPr/>
+        </p:nvSpPr>
+        <p:spPr>
+          <a:xfrm>
+            <a:off x="4377842" y="2424257"/>
+            <a:ext cx="3436010" cy="2494117"/>
+          </a:xfrm>
+          <a:prstGeom prst="roundRect">
+            <a:avLst/>
+          </a:prstGeom>
+          <a:solidFill>
+            <a:srgbClr val="8FC0EC"/>
+          </a:solidFill>
+          <a:ln w="15875">
+            <a:solidFill>
+              <a:srgbClr val="0A6ED1"/>
+            </a:solidFill>
+          </a:ln>
+          <a:effectLst/>
+        </p:spPr>
+        <p:style>
+          <a:lnRef idx="1">
+            <a:schemeClr val="accent1"/>
+          </a:lnRef>
+          <a:fillRef idx="3">
+            <a:schemeClr val="accent1"/>
+          </a:fillRef>
+          <a:effectRef idx="2">
+            <a:schemeClr val="accent1"/>
+          </a:effectRef>
+          <a:fontRef idx="minor">
+            <a:schemeClr val="lt1"/>
+          </a:fontRef>
+        </p:style>
+        <p:txBody>
+          <a:bodyPr rtlCol="0" anchor="ctr" wrap="square" lIns="146304" rIns="146304" tIns="109728" bIns="109728"/>
+          <a:lstStyle/>
+          <a:p>
+            <a:pPr algn="ctr"/>
+            <a:r>
+              <a:rPr sz="1800" b="1">
+                <a:solidFill>
+                  <a:srgbClr val="054A8F"/>
+                </a:solidFill>
+                <a:latin typeface="Segoe UI"/>
+              </a:rPr>
+              <a:t>Level 2 — Instructed</a:t>
+            </a:r>
+          </a:p>
+          <a:p>
+            <a:pPr algn="ctr">
+              <a:spcBef>
+                <a:spcPts val="400"/>
+              </a:spcBef>
+            </a:pPr>
+            <a:r>
+              <a:rPr sz="1300" b="0">
+                <a:solidFill>
+                  <a:srgbClr val="1A1A1A"/>
+                </a:solidFill>
+                <a:latin typeface="Segoe UI"/>
+              </a:rPr>
+              <a:t>+ repo-wide instructions and prompt files. Knows </a:t>
+            </a:r>
+            <a:r>
+              <a:rPr sz="1300" b="1">
+                <a:solidFill>
+                  <a:srgbClr val="1A1A1A"/>
+                </a:solidFill>
+                <a:latin typeface="Segoe UI"/>
+              </a:rPr>
+              <a:t>our</a:t>
+            </a:r>
+            <a:r>
+              <a:rPr sz="1300" b="0">
+                <a:solidFill>
+                  <a:srgbClr val="1A1A1A"/>
+                </a:solidFill>
+                <a:latin typeface="Segoe UI"/>
+              </a:rPr>
+              <a:t> platform, standards, naming, Clean Core rules.</a:t>
+            </a:r>
+          </a:p>
+        </p:txBody>
+      </p:sp>
+      <p:sp>
+        <p:nvSpPr>
+          <p:cNvPr id="8" name="Right Arrow 7"/>
+          <p:cNvSpPr/>
+          <p:nvPr/>
+        </p:nvSpPr>
+        <p:spPr>
+          <a:xfrm>
+            <a:off x="7832140" y="2912364"/>
+            <a:ext cx="219456" cy="201168"/>
+          </a:xfrm>
+          <a:prstGeom prst="rightArrow">
+            <a:avLst/>
+          </a:prstGeom>
+          <a:solidFill>
+            <a:srgbClr val="0A6ED1"/>
+          </a:solidFill>
+          <a:ln>
+            <a:noFill/>
+          </a:ln>
+          <a:effectLst/>
+        </p:spPr>
+        <p:style>
+          <a:lnRef idx="1">
+            <a:schemeClr val="accent1"/>
+          </a:lnRef>
+          <a:fillRef idx="3">
+            <a:schemeClr val="accent1"/>
+          </a:fillRef>
+          <a:effectRef idx="2">
+            <a:schemeClr val="accent1"/>
+          </a:effectRef>
+          <a:fontRef idx="minor">
+            <a:schemeClr val="lt1"/>
+          </a:fontRef>
+        </p:style>
+        <p:txBody>
+          <a:bodyPr rtlCol="0" anchor="ctr"/>
+          <a:lstStyle/>
+          <a:p>
+            <a:pPr algn="ctr"/>
+          </a:p>
+        </p:txBody>
+      </p:sp>
+      <p:sp>
+        <p:nvSpPr>
+          <p:cNvPr id="9" name="Rounded Rectangle 8"/>
+          <p:cNvSpPr/>
+          <p:nvPr/>
+        </p:nvSpPr>
+        <p:spPr>
+          <a:xfrm>
+            <a:off x="8069884" y="1765889"/>
+            <a:ext cx="3436010" cy="2494117"/>
+          </a:xfrm>
+          <a:prstGeom prst="roundRect">
+            <a:avLst/>
+          </a:prstGeom>
+          <a:solidFill>
+            <a:srgbClr val="0A6ED1"/>
+          </a:solidFill>
+          <a:ln w="15875">
+            <a:solidFill>
+              <a:srgbClr val="0A6ED1"/>
+            </a:solidFill>
+          </a:ln>
+          <a:effectLst/>
+        </p:spPr>
+        <p:style>
+          <a:lnRef idx="1">
+            <a:schemeClr val="accent1"/>
+          </a:lnRef>
+          <a:fillRef idx="3">
+            <a:schemeClr val="accent1"/>
+          </a:fillRef>
+          <a:effectRef idx="2">
+            <a:schemeClr val="accent1"/>
+          </a:effectRef>
+          <a:fontRef idx="minor">
+            <a:schemeClr val="lt1"/>
+          </a:fontRef>
+        </p:style>
+        <p:txBody>
+          <a:bodyPr rtlCol="0" anchor="ctr" wrap="square" lIns="146304" rIns="146304" tIns="109728" bIns="109728"/>
+          <a:lstStyle/>
+          <a:p>
+            <a:pPr algn="ctr"/>
+            <a:r>
+              <a:rPr sz="1800" b="1">
+                <a:solidFill>
+                  <a:srgbClr val="FFFFFF"/>
+                </a:solidFill>
+                <a:latin typeface="Segoe UI"/>
+              </a:rPr>
+              <a:t>Level 3 — Grounded</a:t>
+            </a:r>
+          </a:p>
+          <a:p>
+            <a:pPr algn="ctr">
+              <a:spcBef>
+                <a:spcPts val="400"/>
+              </a:spcBef>
+            </a:pPr>
+            <a:r>
+              <a:rPr sz="1300" b="0">
+                <a:solidFill>
+                  <a:srgbClr val="FFFFFF"/>
+                </a:solidFill>
+                <a:latin typeface="Segoe UI"/>
+              </a:rPr>
+              <a:t>+ MCP server. Reads the </a:t>
+            </a:r>
+            <a:r>
+              <a:rPr sz="1300" b="1">
+                <a:solidFill>
+                  <a:srgbClr val="FFFFFF"/>
+                </a:solidFill>
+                <a:latin typeface="Segoe UI"/>
+              </a:rPr>
+              <a:t>actual</a:t>
+            </a:r>
+            <a:r>
+              <a:rPr sz="1300" b="0">
+                <a:solidFill>
+                  <a:srgbClr val="FFFFFF"/>
+                </a:solidFill>
+                <a:latin typeface="Segoe UI"/>
+              </a:rPr>
+              <a:t> objects, field lists and API release states from our system.</a:t>
+            </a:r>
+          </a:p>
+        </p:txBody>
+      </p:sp>
+      <p:sp>
+        <p:nvSpPr>
+          <p:cNvPr id="10" name="TextBox 9"/>
+          <p:cNvSpPr txBox="1"/>
+          <p:nvPr/>
+        </p:nvSpPr>
+        <p:spPr>
+          <a:xfrm>
+            <a:off x="685800" y="5852160"/>
+            <a:ext cx="10817352" cy="411480"/>
+          </a:xfrm>
+          <a:prstGeom prst="rect">
+            <a:avLst/>
+          </a:prstGeom>
+          <a:noFill/>
+        </p:spPr>
+        <p:txBody>
+          <a:bodyPr wrap="square">
+            <a:spAutoFit/>
+          </a:bodyPr>
+          <a:lstStyle/>
+          <a:p>
+            <a:pPr algn="ctr"/>
+            <a:r>
+              <a:rPr sz="1600" b="1">
+                <a:solidFill>
+                  <a:srgbClr val="054A8F"/>
+                </a:solidFill>
+                <a:latin typeface="Segoe UI"/>
+              </a:rPr>
+              <a:t>The model does not get smarter between levels. We give it context.</a:t>
             </a:r>
           </a:p>
         </p:txBody>
@@ -7150,159 +8449,14 @@
       <p:grpSpPr/>
       <p:sp>
         <p:nvSpPr>
-          <p:cNvPr id="2" name="Title 1"/>
-          <p:cNvSpPr>
-            <a:spLocks noGrp="1"/>
-          </p:cNvSpPr>
-          <p:nvPr>
-            <p:ph type="title"/>
-          </p:nvPr>
-        </p:nvSpPr>
-        <p:spPr/>
-        <p:txBody>
-          <a:bodyPr/>
-          <a:lstStyle/>
-          <a:p>
-            <a:r>
-              <a:rPr sz="3000" b="1">
-                <a:solidFill>
-                  <a:srgbClr val="1A1A1A"/>
-                </a:solidFill>
-                <a:latin typeface="Segoe UI"/>
-              </a:rPr>
-              <a:t>Level 1 — What You Get Today</a:t>
-            </a:r>
-          </a:p>
-        </p:txBody>
-      </p:sp>
-      <p:sp>
-        <p:nvSpPr>
-          <p:cNvPr id="3" name="Content Placeholder 2"/>
-          <p:cNvSpPr>
-            <a:spLocks noGrp="1"/>
-          </p:cNvSpPr>
-          <p:nvPr>
-            <p:ph idx="1"/>
-          </p:nvPr>
+          <p:cNvPr id="2" name="TextBox 1"/>
+          <p:cNvSpPr txBox="1"/>
+          <p:nvPr/>
         </p:nvSpPr>
         <p:spPr>
           <a:xfrm>
-            <a:ext cx="10789920" cy="0"/>
-          </a:xfrm>
-        </p:spPr>
-        <p:txBody>
-          <a:bodyPr wrap="square"/>
-          <a:lstStyle/>
-          <a:p>
-            <a:pPr>
-              <a:spcAft>
-                <a:spcPts val="800"/>
-              </a:spcAft>
-            </a:pPr>
-            <a:r>
-              <a:rPr sz="1900">
-                <a:solidFill>
-                  <a:srgbClr val="1A1A1A"/>
-                </a:solidFill>
-                <a:latin typeface="Segoe UI"/>
-              </a:rPr>
-              <a:t>Copilot with no instructions is working from public ABAP on the internet</a:t>
-            </a:r>
-          </a:p>
-          <a:p>
-            <a:pPr>
-              <a:spcAft>
-                <a:spcPts val="800"/>
-              </a:spcAft>
-            </a:pPr>
-            <a:r>
-              <a:rPr sz="1900">
-                <a:solidFill>
-                  <a:srgbClr val="1A1A1A"/>
-                </a:solidFill>
-                <a:latin typeface="Segoe UI"/>
-              </a:rPr>
-              <a:t>That corpus is overwhelmingly </a:t>
-            </a:r>
-            <a:r>
-              <a:rPr b="1" sz="1900">
-                <a:solidFill>
-                  <a:srgbClr val="1A1A1A"/>
-                </a:solidFill>
-                <a:latin typeface="Segoe UI"/>
-              </a:rPr>
-              <a:t>classic, on-premise ABAP</a:t>
-            </a:r>
-            <a:r>
-              <a:rPr sz="1900">
-                <a:solidFill>
-                  <a:srgbClr val="1A1A1A"/>
-                </a:solidFill>
-                <a:latin typeface="Segoe UI"/>
-              </a:rPr>
-              <a:t> — so that is what it writes</a:t>
-            </a:r>
-          </a:p>
-          <a:p>
-            <a:pPr>
-              <a:spcAft>
-                <a:spcPts val="800"/>
-              </a:spcAft>
-            </a:pPr>
-            <a:r>
-              <a:rPr sz="1900">
-                <a:solidFill>
-                  <a:srgbClr val="1A1A1A"/>
-                </a:solidFill>
-                <a:latin typeface="Segoe UI"/>
-              </a:rPr>
-              <a:t>It does not know: our release, ABAP Cloud restrictions, what is released in *our* system, our naming, our packages</a:t>
-            </a:r>
-          </a:p>
-          <a:p>
-            <a:pPr>
-              <a:spcAft>
-                <a:spcPts val="800"/>
-              </a:spcAft>
-            </a:pPr>
-            <a:r>
-              <a:rPr sz="1900">
-                <a:solidFill>
-                  <a:srgbClr val="1A1A1A"/>
-                </a:solidFill>
-                <a:latin typeface="Segoe UI"/>
-              </a:rPr>
-              <a:t>It will invent SAP table, field and BAPI names that look completely plausible</a:t>
-            </a:r>
-          </a:p>
-          <a:p>
-            <a:pPr>
-              <a:spcAft>
-                <a:spcPts val="800"/>
-              </a:spcAft>
-            </a:pPr>
-            <a:r>
-              <a:rPr sz="1900">
-                <a:solidFill>
-                  <a:srgbClr val="1A1A1A"/>
-                </a:solidFill>
-                <a:latin typeface="Segoe UI"/>
-              </a:rPr>
-              <a:t>This is not a criticism of the tool. It is a description of an unconfigured tool.</a:t>
-            </a:r>
-          </a:p>
-        </p:txBody>
-      </p:sp>
-      <p:sp>
-        <p:nvSpPr>
-          <p:cNvPr id="4" name="TextBox 3"/>
-          <p:cNvSpPr txBox="1"/>
-          <p:nvPr/>
-        </p:nvSpPr>
-        <p:spPr>
-          <a:xfrm>
-            <a:off x="10332720" y="256032"/>
-            <a:ext cx="1645920" cy="365760"/>
+            <a:off x="685800" y="384048"/>
+            <a:ext cx="9326880" cy="868680"/>
           </a:xfrm>
           <a:prstGeom prst="rect">
             <a:avLst/>
@@ -7310,12 +8464,91 @@
           <a:noFill/>
         </p:spPr>
         <p:txBody>
-          <a:bodyPr wrap="none">
+          <a:bodyPr wrap="square" anchor="t">
             <a:spAutoFit/>
           </a:bodyPr>
           <a:lstStyle/>
           <a:p>
             <a:r>
+              <a:rPr sz="2900" b="1">
+                <a:solidFill>
+                  <a:srgbClr val="1A1A1A"/>
+                </a:solidFill>
+                <a:latin typeface="Segoe UI"/>
+              </a:rPr>
+              <a:t>Level 1 — What You Get Today</a:t>
+            </a:r>
+          </a:p>
+        </p:txBody>
+      </p:sp>
+      <p:sp>
+        <p:nvSpPr>
+          <p:cNvPr id="3" name="Rectangle 2"/>
+          <p:cNvSpPr/>
+          <p:nvPr/>
+        </p:nvSpPr>
+        <p:spPr>
+          <a:xfrm>
+            <a:off x="685800" y="1316736"/>
+            <a:ext cx="1051560" cy="50292"/>
+          </a:xfrm>
+          <a:prstGeom prst="rect">
+            <a:avLst/>
+          </a:prstGeom>
+          <a:solidFill>
+            <a:srgbClr val="0A6ED1"/>
+          </a:solidFill>
+          <a:ln>
+            <a:noFill/>
+          </a:ln>
+          <a:effectLst/>
+        </p:spPr>
+        <p:style>
+          <a:lnRef idx="1">
+            <a:schemeClr val="accent1"/>
+          </a:lnRef>
+          <a:fillRef idx="3">
+            <a:schemeClr val="accent1"/>
+          </a:fillRef>
+          <a:effectRef idx="2">
+            <a:schemeClr val="accent1"/>
+          </a:effectRef>
+          <a:fontRef idx="minor">
+            <a:schemeClr val="lt1"/>
+          </a:fontRef>
+        </p:style>
+        <p:txBody>
+          <a:bodyPr rtlCol="0" anchor="ctr"/>
+          <a:lstStyle/>
+          <a:p>
+            <a:pPr algn="ctr"/>
+          </a:p>
+        </p:txBody>
+      </p:sp>
+      <p:sp>
+        <p:nvSpPr>
+          <p:cNvPr id="4" name="TextBox 3"/>
+          <p:cNvSpPr txBox="1"/>
+          <p:nvPr/>
+        </p:nvSpPr>
+        <p:spPr>
+          <a:xfrm>
+            <a:off x="10378440" y="457200"/>
+            <a:ext cx="1188720" cy="365760"/>
+          </a:xfrm>
+          <a:prstGeom prst="rect">
+            <a:avLst/>
+          </a:prstGeom>
+          <a:noFill/>
+        </p:spPr>
+        <p:txBody>
+          <a:bodyPr wrap="square">
+            <a:spAutoFit/>
+          </a:bodyPr>
+          <a:lstStyle/>
+          <a:p>
+            <a:pPr algn="r"/>
+            <a:r>
               <a:rPr sz="1200" b="1">
                 <a:solidFill>
                   <a:srgbClr val="0A6ED1"/>
@@ -7323,6 +8556,127 @@
                 <a:latin typeface="Segoe UI"/>
               </a:rPr>
               <a:t>2:00</a:t>
+            </a:r>
+          </a:p>
+        </p:txBody>
+      </p:sp>
+      <p:sp>
+        <p:nvSpPr>
+          <p:cNvPr id="5" name="TextBox 4"/>
+          <p:cNvSpPr txBox="1"/>
+          <p:nvPr/>
+        </p:nvSpPr>
+        <p:spPr>
+          <a:xfrm>
+            <a:off x="685800" y="1600200"/>
+            <a:ext cx="10817352" cy="4709160"/>
+          </a:xfrm>
+          <a:prstGeom prst="rect">
+            <a:avLst/>
+          </a:prstGeom>
+          <a:noFill/>
+        </p:spPr>
+        <p:txBody>
+          <a:bodyPr wrap="square">
+            <a:spAutoFit/>
+          </a:bodyPr>
+          <a:lstStyle/>
+          <a:p>
+            <a:pPr>
+              <a:spcAft>
+                <a:spcPts val="1100"/>
+              </a:spcAft>
+            </a:pPr>
+            <a:r>
+              <a:rPr sz="1900" b="0">
+                <a:solidFill>
+                  <a:srgbClr val="1A1A1A"/>
+                </a:solidFill>
+                <a:latin typeface="Segoe UI"/>
+              </a:rPr>
+              <a:t>•  Copilot with no instructions is working from public ABAP on the internet</a:t>
+            </a:r>
+          </a:p>
+          <a:p>
+            <a:pPr>
+              <a:spcAft>
+                <a:spcPts val="1100"/>
+              </a:spcAft>
+            </a:pPr>
+            <a:r>
+              <a:rPr sz="1900" b="0">
+                <a:solidFill>
+                  <a:srgbClr val="1A1A1A"/>
+                </a:solidFill>
+                <a:latin typeface="Segoe UI"/>
+              </a:rPr>
+              <a:t>•  That corpus is overwhelmingly </a:t>
+            </a:r>
+            <a:r>
+              <a:rPr sz="1900" b="1">
+                <a:solidFill>
+                  <a:srgbClr val="1A1A1A"/>
+                </a:solidFill>
+                <a:latin typeface="Segoe UI"/>
+              </a:rPr>
+              <a:t>classic, on-premise ABAP</a:t>
+            </a:r>
+            <a:r>
+              <a:rPr sz="1900" b="0">
+                <a:solidFill>
+                  <a:srgbClr val="1A1A1A"/>
+                </a:solidFill>
+                <a:latin typeface="Segoe UI"/>
+              </a:rPr>
+              <a:t> — so that is what it writes</a:t>
+            </a:r>
+          </a:p>
+          <a:p>
+            <a:pPr>
+              <a:spcAft>
+                <a:spcPts val="1100"/>
+              </a:spcAft>
+            </a:pPr>
+            <a:r>
+              <a:rPr sz="1900" b="0">
+                <a:solidFill>
+                  <a:srgbClr val="1A1A1A"/>
+                </a:solidFill>
+                <a:latin typeface="Segoe UI"/>
+              </a:rPr>
+              <a:t>•  It does not know: our release, ABAP Cloud restrictions, what is released in *our* system, our naming, our packages</a:t>
+            </a:r>
+          </a:p>
+          <a:p>
+            <a:pPr>
+              <a:spcAft>
+                <a:spcPts val="1100"/>
+              </a:spcAft>
+            </a:pPr>
+            <a:r>
+              <a:rPr sz="1900" b="0">
+                <a:solidFill>
+                  <a:srgbClr val="1A1A1A"/>
+                </a:solidFill>
+                <a:latin typeface="Segoe UI"/>
+              </a:rPr>
+              <a:t>•  It will invent SAP table, field and BAPI names that look completely plausible</a:t>
+            </a:r>
+          </a:p>
+          <a:p>
+            <a:pPr>
+              <a:spcAft>
+                <a:spcPts val="1100"/>
+              </a:spcAft>
+            </a:pPr>
+            <a:r>
+              <a:rPr sz="1900" b="0">
+                <a:solidFill>
+                  <a:srgbClr val="1A1A1A"/>
+                </a:solidFill>
+                <a:latin typeface="Segoe UI"/>
+              </a:rPr>
+              <a:t>•  This is not a criticism of the tool. It is a description of an unconfigured tool.</a:t>
             </a:r>
           </a:p>
         </p:txBody>
@@ -7347,179 +8701,14 @@
       <p:grpSpPr/>
       <p:sp>
         <p:nvSpPr>
-          <p:cNvPr id="2" name="Title 1"/>
-          <p:cNvSpPr>
-            <a:spLocks noGrp="1"/>
-          </p:cNvSpPr>
-          <p:nvPr>
-            <p:ph type="title"/>
-          </p:nvPr>
-        </p:nvSpPr>
-        <p:spPr/>
-        <p:txBody>
-          <a:bodyPr/>
-          <a:lstStyle/>
-          <a:p>
-            <a:r>
-              <a:rPr sz="3000" b="1">
-                <a:solidFill>
-                  <a:srgbClr val="1A1A1A"/>
-                </a:solidFill>
-                <a:latin typeface="Segoe UI"/>
-              </a:rPr>
-              <a:t>Level 2 — One File Copy</a:t>
-            </a:r>
-          </a:p>
-        </p:txBody>
-      </p:sp>
-      <p:sp>
-        <p:nvSpPr>
-          <p:cNvPr id="3" name="Content Placeholder 2"/>
-          <p:cNvSpPr>
-            <a:spLocks noGrp="1"/>
-          </p:cNvSpPr>
-          <p:nvPr>
-            <p:ph idx="1"/>
-          </p:nvPr>
+          <p:cNvPr id="2" name="TextBox 1"/>
+          <p:cNvSpPr txBox="1"/>
+          <p:nvPr/>
         </p:nvSpPr>
         <p:spPr>
           <a:xfrm>
-            <a:ext cx="10789920" cy="0"/>
-          </a:xfrm>
-        </p:spPr>
-        <p:txBody>
-          <a:bodyPr wrap="square"/>
-          <a:lstStyle/>
-          <a:p>
-            <a:pPr>
-              <a:spcAft>
-                <a:spcPts val="800"/>
-              </a:spcAft>
-            </a:pPr>
-            <a:r>
-              <a:rPr sz="1900">
-                <a:solidFill>
-                  <a:srgbClr val="1A1A1A"/>
-                </a:solidFill>
-                <a:latin typeface="Consolas"/>
-              </a:rPr>
-              <a:t>.github/copilot-instructions.md</a:t>
-            </a:r>
-            <a:r>
-              <a:rPr sz="1900">
-                <a:solidFill>
-                  <a:srgbClr val="1A1A1A"/>
-                </a:solidFill>
-                <a:latin typeface="Segoe UI"/>
-              </a:rPr>
-              <a:t> — repo-wide context Copilot Chat picks up for </a:t>
-            </a:r>
-            <a:r>
-              <a:rPr b="1" sz="1900">
-                <a:solidFill>
-                  <a:srgbClr val="1A1A1A"/>
-                </a:solidFill>
-                <a:latin typeface="Segoe UI"/>
-              </a:rPr>
-              <a:t>every</a:t>
-            </a:r>
-            <a:r>
-              <a:rPr sz="1900">
-                <a:solidFill>
-                  <a:srgbClr val="1A1A1A"/>
-                </a:solidFill>
-                <a:latin typeface="Segoe UI"/>
-              </a:rPr>
-              <a:t> chat in that repo</a:t>
-            </a:r>
-          </a:p>
-          <a:p>
-            <a:pPr>
-              <a:spcAft>
-                <a:spcPts val="800"/>
-              </a:spcAft>
-            </a:pPr>
-            <a:r>
-              <a:rPr sz="1900">
-                <a:solidFill>
-                  <a:srgbClr val="1A1A1A"/>
-                </a:solidFill>
-                <a:latin typeface="Segoe UI"/>
-              </a:rPr>
-              <a:t>Tells it: S/4HANA Cloud Private Edition 2025 · ABAP Cloud language version · released APIs only · Clean ABAP · our naming · RAP defaults</a:t>
-            </a:r>
-          </a:p>
-          <a:p>
-            <a:pPr>
-              <a:spcAft>
-                <a:spcPts val="800"/>
-              </a:spcAft>
-            </a:pPr>
-            <a:r>
-              <a:rPr sz="1900">
-                <a:solidFill>
-                  <a:srgbClr val="1A1A1A"/>
-                </a:solidFill>
-                <a:latin typeface="Consolas"/>
-              </a:rPr>
-              <a:t>.github/prompts/*.prompt.md</a:t>
-            </a:r>
-            <a:r>
-              <a:rPr sz="1900">
-                <a:solidFill>
-                  <a:srgbClr val="1A1A1A"/>
-                </a:solidFill>
-                <a:latin typeface="Segoe UI"/>
-              </a:rPr>
-              <a:t> — reusable prompts you invoke with </a:t>
-            </a:r>
-            <a:r>
-              <a:rPr sz="1900">
-                <a:solidFill>
-                  <a:srgbClr val="1A1A1A"/>
-                </a:solidFill>
-                <a:latin typeface="Consolas"/>
-              </a:rPr>
-              <a:t>/name</a:t>
-            </a:r>
-            <a:r>
-              <a:rPr sz="1900">
-                <a:solidFill>
-                  <a:srgbClr val="1A1A1A"/>
-                </a:solidFill>
-                <a:latin typeface="Segoe UI"/>
-              </a:rPr>
-              <a:t> on a selection</a:t>
-            </a:r>
-          </a:p>
-          <a:p>
-            <a:pPr>
-              <a:spcAft>
-                <a:spcPts val="800"/>
-              </a:spcAft>
-            </a:pPr>
-            <a:r>
-              <a:rPr sz="1900">
-                <a:solidFill>
-                  <a:srgbClr val="1A1A1A"/>
-                </a:solidFill>
-                <a:latin typeface="Segoe UI"/>
-              </a:rPr>
-              <a:t>Same model. Same question. Very different answer.</a:t>
-            </a:r>
-          </a:p>
-        </p:txBody>
-      </p:sp>
-      <p:sp>
-        <p:nvSpPr>
-          <p:cNvPr id="4" name="TextBox 3"/>
-          <p:cNvSpPr txBox="1"/>
-          <p:nvPr/>
-        </p:nvSpPr>
-        <p:spPr>
-          <a:xfrm>
-            <a:off x="10332720" y="256032"/>
-            <a:ext cx="1645920" cy="365760"/>
+            <a:off x="685800" y="384048"/>
+            <a:ext cx="9326880" cy="868680"/>
           </a:xfrm>
           <a:prstGeom prst="rect">
             <a:avLst/>
@@ -7527,12 +8716,91 @@
           <a:noFill/>
         </p:spPr>
         <p:txBody>
-          <a:bodyPr wrap="none">
+          <a:bodyPr wrap="square" anchor="t">
             <a:spAutoFit/>
           </a:bodyPr>
           <a:lstStyle/>
           <a:p>
             <a:r>
+              <a:rPr sz="2900" b="1">
+                <a:solidFill>
+                  <a:srgbClr val="1A1A1A"/>
+                </a:solidFill>
+                <a:latin typeface="Segoe UI"/>
+              </a:rPr>
+              <a:t>Level 2 — One File Copy</a:t>
+            </a:r>
+          </a:p>
+        </p:txBody>
+      </p:sp>
+      <p:sp>
+        <p:nvSpPr>
+          <p:cNvPr id="3" name="Rectangle 2"/>
+          <p:cNvSpPr/>
+          <p:nvPr/>
+        </p:nvSpPr>
+        <p:spPr>
+          <a:xfrm>
+            <a:off x="685800" y="1316736"/>
+            <a:ext cx="1051560" cy="50292"/>
+          </a:xfrm>
+          <a:prstGeom prst="rect">
+            <a:avLst/>
+          </a:prstGeom>
+          <a:solidFill>
+            <a:srgbClr val="0A6ED1"/>
+          </a:solidFill>
+          <a:ln>
+            <a:noFill/>
+          </a:ln>
+          <a:effectLst/>
+        </p:spPr>
+        <p:style>
+          <a:lnRef idx="1">
+            <a:schemeClr val="accent1"/>
+          </a:lnRef>
+          <a:fillRef idx="3">
+            <a:schemeClr val="accent1"/>
+          </a:fillRef>
+          <a:effectRef idx="2">
+            <a:schemeClr val="accent1"/>
+          </a:effectRef>
+          <a:fontRef idx="minor">
+            <a:schemeClr val="lt1"/>
+          </a:fontRef>
+        </p:style>
+        <p:txBody>
+          <a:bodyPr rtlCol="0" anchor="ctr"/>
+          <a:lstStyle/>
+          <a:p>
+            <a:pPr algn="ctr"/>
+          </a:p>
+        </p:txBody>
+      </p:sp>
+      <p:sp>
+        <p:nvSpPr>
+          <p:cNvPr id="4" name="TextBox 3"/>
+          <p:cNvSpPr txBox="1"/>
+          <p:nvPr/>
+        </p:nvSpPr>
+        <p:spPr>
+          <a:xfrm>
+            <a:off x="10378440" y="457200"/>
+            <a:ext cx="1188720" cy="365760"/>
+          </a:xfrm>
+          <a:prstGeom prst="rect">
+            <a:avLst/>
+          </a:prstGeom>
+          <a:noFill/>
+        </p:spPr>
+        <p:txBody>
+          <a:bodyPr wrap="square">
+            <a:spAutoFit/>
+          </a:bodyPr>
+          <a:lstStyle/>
+          <a:p>
+            <a:pPr algn="r"/>
+            <a:r>
               <a:rPr sz="1200" b="1">
                 <a:solidFill>
                   <a:srgbClr val="0A6ED1"/>
@@ -7540,6 +8808,165 @@
                 <a:latin typeface="Segoe UI"/>
               </a:rPr>
               <a:t>2:00</a:t>
+            </a:r>
+          </a:p>
+        </p:txBody>
+      </p:sp>
+      <p:sp>
+        <p:nvSpPr>
+          <p:cNvPr id="5" name="TextBox 4"/>
+          <p:cNvSpPr txBox="1"/>
+          <p:nvPr/>
+        </p:nvSpPr>
+        <p:spPr>
+          <a:xfrm>
+            <a:off x="685800" y="1600200"/>
+            <a:ext cx="10817352" cy="4709160"/>
+          </a:xfrm>
+          <a:prstGeom prst="rect">
+            <a:avLst/>
+          </a:prstGeom>
+          <a:noFill/>
+        </p:spPr>
+        <p:txBody>
+          <a:bodyPr wrap="square">
+            <a:spAutoFit/>
+          </a:bodyPr>
+          <a:lstStyle/>
+          <a:p>
+            <a:pPr>
+              <a:spcAft>
+                <a:spcPts val="1100"/>
+              </a:spcAft>
+            </a:pPr>
+            <a:r>
+              <a:rPr sz="1900" b="0">
+                <a:solidFill>
+                  <a:srgbClr val="1A1A1A"/>
+                </a:solidFill>
+                <a:latin typeface="Segoe UI"/>
+              </a:rPr>
+              <a:t>•  </a:t>
+            </a:r>
+            <a:r>
+              <a:rPr sz="1900" b="0">
+                <a:solidFill>
+                  <a:srgbClr val="1A1A1A"/>
+                </a:solidFill>
+                <a:latin typeface="Consolas"/>
+              </a:rPr>
+              <a:t>.github/copilot-instructions.md</a:t>
+            </a:r>
+            <a:r>
+              <a:rPr sz="1900" b="0">
+                <a:solidFill>
+                  <a:srgbClr val="1A1A1A"/>
+                </a:solidFill>
+                <a:latin typeface="Segoe UI"/>
+              </a:rPr>
+              <a:t> — repo-wide context Copilot Chat picks up for </a:t>
+            </a:r>
+            <a:r>
+              <a:rPr sz="1900" b="1">
+                <a:solidFill>
+                  <a:srgbClr val="1A1A1A"/>
+                </a:solidFill>
+                <a:latin typeface="Segoe UI"/>
+              </a:rPr>
+              <a:t>every</a:t>
+            </a:r>
+            <a:r>
+              <a:rPr sz="1900" b="0">
+                <a:solidFill>
+                  <a:srgbClr val="1A1A1A"/>
+                </a:solidFill>
+                <a:latin typeface="Segoe UI"/>
+              </a:rPr>
+              <a:t> chat in that repo</a:t>
+            </a:r>
+          </a:p>
+          <a:p>
+            <a:pPr>
+              <a:spcAft>
+                <a:spcPts val="1100"/>
+              </a:spcAft>
+            </a:pPr>
+            <a:r>
+              <a:rPr sz="1900" b="0">
+                <a:solidFill>
+                  <a:srgbClr val="1A1A1A"/>
+                </a:solidFill>
+                <a:latin typeface="Segoe UI"/>
+              </a:rPr>
+              <a:t>•  Tells it: S/4HANA Cloud Private Edition 2025 · ABAP Cloud language version · released APIs only · Clean ABAP · our naming · RAP defaults</a:t>
+            </a:r>
+          </a:p>
+          <a:p>
+            <a:pPr>
+              <a:spcAft>
+                <a:spcPts val="1100"/>
+              </a:spcAft>
+            </a:pPr>
+            <a:r>
+              <a:rPr sz="1900" b="0">
+                <a:solidFill>
+                  <a:srgbClr val="1A1A1A"/>
+                </a:solidFill>
+                <a:latin typeface="Segoe UI"/>
+              </a:rPr>
+              <a:t>•  </a:t>
+            </a:r>
+            <a:r>
+              <a:rPr sz="1900" b="0">
+                <a:solidFill>
+                  <a:srgbClr val="1A1A1A"/>
+                </a:solidFill>
+                <a:latin typeface="Consolas"/>
+              </a:rPr>
+              <a:t>.github/prompts/*.prompt.md</a:t>
+            </a:r>
+            <a:r>
+              <a:rPr sz="1900" b="0">
+                <a:solidFill>
+                  <a:srgbClr val="1A1A1A"/>
+                </a:solidFill>
+                <a:latin typeface="Segoe UI"/>
+              </a:rPr>
+              <a:t> — reusable prompts you invoke with </a:t>
+            </a:r>
+            <a:r>
+              <a:rPr sz="1900" b="0">
+                <a:solidFill>
+                  <a:srgbClr val="1A1A1A"/>
+                </a:solidFill>
+                <a:latin typeface="Consolas"/>
+              </a:rPr>
+              <a:t>/name</a:t>
+            </a:r>
+            <a:r>
+              <a:rPr sz="1900" b="0">
+                <a:solidFill>
+                  <a:srgbClr val="1A1A1A"/>
+                </a:solidFill>
+                <a:latin typeface="Segoe UI"/>
+              </a:rPr>
+              <a:t> on a selection</a:t>
+            </a:r>
+          </a:p>
+          <a:p>
+            <a:pPr>
+              <a:spcAft>
+                <a:spcPts val="1100"/>
+              </a:spcAft>
+            </a:pPr>
+            <a:r>
+              <a:rPr sz="1900" b="0">
+                <a:solidFill>
+                  <a:srgbClr val="1A1A1A"/>
+                </a:solidFill>
+                <a:latin typeface="Segoe UI"/>
+              </a:rPr>
+              <a:t>•  Same model. Same question. Very different answer.</a:t>
             </a:r>
           </a:p>
         </p:txBody>
@@ -7564,161 +8991,14 @@
       <p:grpSpPr/>
       <p:sp>
         <p:nvSpPr>
-          <p:cNvPr id="2" name="Title 1"/>
-          <p:cNvSpPr>
-            <a:spLocks noGrp="1"/>
-          </p:cNvSpPr>
-          <p:nvPr>
-            <p:ph type="title"/>
-          </p:nvPr>
-        </p:nvSpPr>
-        <p:spPr/>
-        <p:txBody>
-          <a:bodyPr/>
-          <a:lstStyle/>
-          <a:p>
-            <a:r>
-              <a:rPr sz="3000" b="1">
-                <a:solidFill>
-                  <a:srgbClr val="1A1A1A"/>
-                </a:solidFill>
-                <a:latin typeface="Segoe UI"/>
-              </a:rPr>
-              <a:t>Level 3 — Grounding via the ABAP MCP Server</a:t>
-            </a:r>
-          </a:p>
-        </p:txBody>
-      </p:sp>
-      <p:sp>
-        <p:nvSpPr>
-          <p:cNvPr id="3" name="Content Placeholder 2"/>
-          <p:cNvSpPr>
-            <a:spLocks noGrp="1"/>
-          </p:cNvSpPr>
-          <p:nvPr>
-            <p:ph idx="1"/>
-          </p:nvPr>
+          <p:cNvPr id="2" name="TextBox 1"/>
+          <p:cNvSpPr txBox="1"/>
+          <p:nvPr/>
         </p:nvSpPr>
         <p:spPr>
           <a:xfrm>
-            <a:ext cx="10789920" cy="0"/>
-          </a:xfrm>
-        </p:spPr>
-        <p:txBody>
-          <a:bodyPr wrap="square"/>
-          <a:lstStyle/>
-          <a:p>
-            <a:pPr>
-              <a:spcAft>
-                <a:spcPts val="800"/>
-              </a:spcAft>
-            </a:pPr>
-            <a:r>
-              <a:rPr sz="1900">
-                <a:solidFill>
-                  <a:srgbClr val="1A1A1A"/>
-                </a:solidFill>
-                <a:latin typeface="Segoe UI"/>
-              </a:rPr>
-              <a:t>MCP = an open protocol for connecting an AI agent to real tools and data</a:t>
-            </a:r>
-          </a:p>
-          <a:p>
-            <a:pPr>
-              <a:spcAft>
-                <a:spcPts val="800"/>
-              </a:spcAft>
-            </a:pPr>
-            <a:r>
-              <a:rPr sz="1900">
-                <a:solidFill>
-                  <a:srgbClr val="1A1A1A"/>
-                </a:solidFill>
-                <a:latin typeface="Segoe UI"/>
-              </a:rPr>
-              <a:t>Our ABAP MCP server exposes the system: read object source, DDIC and CDS metadata, where-used, </a:t>
-            </a:r>
-            <a:r>
-              <a:rPr b="1" sz="1900">
-                <a:solidFill>
-                  <a:srgbClr val="1A1A1A"/>
-                </a:solidFill>
-                <a:latin typeface="Segoe UI"/>
-              </a:rPr>
-              <a:t>API release state</a:t>
-            </a:r>
-            <a:r>
-              <a:rPr sz="1900">
-                <a:solidFill>
-                  <a:srgbClr val="1A1A1A"/>
-                </a:solidFill>
-                <a:latin typeface="Segoe UI"/>
-              </a:rPr>
-              <a:t>, syntax check, ATC, ABAP Unit</a:t>
-            </a:r>
-          </a:p>
-          <a:p>
-            <a:pPr>
-              <a:spcAft>
-                <a:spcPts val="800"/>
-              </a:spcAft>
-            </a:pPr>
-            <a:r>
-              <a:rPr sz="1900">
-                <a:solidFill>
-                  <a:srgbClr val="1A1A1A"/>
-                </a:solidFill>
-                <a:latin typeface="Segoe UI"/>
-              </a:rPr>
-              <a:t>The agent stops guessing about our system and starts reading it</a:t>
-            </a:r>
-          </a:p>
-          <a:p>
-            <a:pPr>
-              <a:spcAft>
-                <a:spcPts val="800"/>
-              </a:spcAft>
-            </a:pPr>
-            <a:r>
-              <a:rPr sz="1900">
-                <a:solidFill>
-                  <a:srgbClr val="1A1A1A"/>
-                </a:solidFill>
-                <a:latin typeface="Segoe UI"/>
-              </a:rPr>
-              <a:t>Our rule: </a:t>
-            </a:r>
-            <a:r>
-              <a:rPr b="1" sz="1900">
-                <a:solidFill>
-                  <a:srgbClr val="1A1A1A"/>
-                </a:solidFill>
-                <a:latin typeface="Segoe UI"/>
-              </a:rPr>
-              <a:t>reads are free, writes need explicit human confirmation</a:t>
-            </a:r>
-            <a:r>
-              <a:rPr sz="1900">
-                <a:solidFill>
-                  <a:srgbClr val="1A1A1A"/>
-                </a:solidFill>
-                <a:latin typeface="Segoe UI"/>
-              </a:rPr>
-              <a:t> — no object creation, activation or transport without a yes</a:t>
-            </a:r>
-          </a:p>
-        </p:txBody>
-      </p:sp>
-      <p:sp>
-        <p:nvSpPr>
-          <p:cNvPr id="4" name="TextBox 3"/>
-          <p:cNvSpPr txBox="1"/>
-          <p:nvPr/>
-        </p:nvSpPr>
-        <p:spPr>
-          <a:xfrm>
-            <a:off x="10332720" y="256032"/>
-            <a:ext cx="1645920" cy="365760"/>
+            <a:off x="685800" y="384048"/>
+            <a:ext cx="9326880" cy="868680"/>
           </a:xfrm>
           <a:prstGeom prst="rect">
             <a:avLst/>
@@ -7726,12 +9006,91 @@
           <a:noFill/>
         </p:spPr>
         <p:txBody>
-          <a:bodyPr wrap="none">
+          <a:bodyPr wrap="square" anchor="t">
             <a:spAutoFit/>
           </a:bodyPr>
           <a:lstStyle/>
           <a:p>
             <a:r>
+              <a:rPr sz="2900" b="1">
+                <a:solidFill>
+                  <a:srgbClr val="1A1A1A"/>
+                </a:solidFill>
+                <a:latin typeface="Segoe UI"/>
+              </a:rPr>
+              <a:t>Level 3 — Grounding via the ABAP MCP Server</a:t>
+            </a:r>
+          </a:p>
+        </p:txBody>
+      </p:sp>
+      <p:sp>
+        <p:nvSpPr>
+          <p:cNvPr id="3" name="Rectangle 2"/>
+          <p:cNvSpPr/>
+          <p:nvPr/>
+        </p:nvSpPr>
+        <p:spPr>
+          <a:xfrm>
+            <a:off x="685800" y="1316736"/>
+            <a:ext cx="1051560" cy="50292"/>
+          </a:xfrm>
+          <a:prstGeom prst="rect">
+            <a:avLst/>
+          </a:prstGeom>
+          <a:solidFill>
+            <a:srgbClr val="0A6ED1"/>
+          </a:solidFill>
+          <a:ln>
+            <a:noFill/>
+          </a:ln>
+          <a:effectLst/>
+        </p:spPr>
+        <p:style>
+          <a:lnRef idx="1">
+            <a:schemeClr val="accent1"/>
+          </a:lnRef>
+          <a:fillRef idx="3">
+            <a:schemeClr val="accent1"/>
+          </a:fillRef>
+          <a:effectRef idx="2">
+            <a:schemeClr val="accent1"/>
+          </a:effectRef>
+          <a:fontRef idx="minor">
+            <a:schemeClr val="lt1"/>
+          </a:fontRef>
+        </p:style>
+        <p:txBody>
+          <a:bodyPr rtlCol="0" anchor="ctr"/>
+          <a:lstStyle/>
+          <a:p>
+            <a:pPr algn="ctr"/>
+          </a:p>
+        </p:txBody>
+      </p:sp>
+      <p:sp>
+        <p:nvSpPr>
+          <p:cNvPr id="4" name="TextBox 3"/>
+          <p:cNvSpPr txBox="1"/>
+          <p:nvPr/>
+        </p:nvSpPr>
+        <p:spPr>
+          <a:xfrm>
+            <a:off x="10378440" y="457200"/>
+            <a:ext cx="1188720" cy="365760"/>
+          </a:xfrm>
+          <a:prstGeom prst="rect">
+            <a:avLst/>
+          </a:prstGeom>
+          <a:noFill/>
+        </p:spPr>
+        <p:txBody>
+          <a:bodyPr wrap="square">
+            <a:spAutoFit/>
+          </a:bodyPr>
+          <a:lstStyle/>
+          <a:p>
+            <a:pPr algn="r"/>
+            <a:r>
               <a:rPr sz="1200" b="1">
                 <a:solidFill>
                   <a:srgbClr val="0A6ED1"/>
@@ -7739,6 +9098,129 @@
                 <a:latin typeface="Segoe UI"/>
               </a:rPr>
               <a:t>2:00</a:t>
+            </a:r>
+          </a:p>
+        </p:txBody>
+      </p:sp>
+      <p:sp>
+        <p:nvSpPr>
+          <p:cNvPr id="5" name="TextBox 4"/>
+          <p:cNvSpPr txBox="1"/>
+          <p:nvPr/>
+        </p:nvSpPr>
+        <p:spPr>
+          <a:xfrm>
+            <a:off x="685800" y="1600200"/>
+            <a:ext cx="10817352" cy="4709160"/>
+          </a:xfrm>
+          <a:prstGeom prst="rect">
+            <a:avLst/>
+          </a:prstGeom>
+          <a:noFill/>
+        </p:spPr>
+        <p:txBody>
+          <a:bodyPr wrap="square">
+            <a:spAutoFit/>
+          </a:bodyPr>
+          <a:lstStyle/>
+          <a:p>
+            <a:pPr>
+              <a:spcAft>
+                <a:spcPts val="1100"/>
+              </a:spcAft>
+            </a:pPr>
+            <a:r>
+              <a:rPr sz="1900" b="0">
+                <a:solidFill>
+                  <a:srgbClr val="1A1A1A"/>
+                </a:solidFill>
+                <a:latin typeface="Segoe UI"/>
+              </a:rPr>
+              <a:t>•  MCP = an open protocol for connecting an AI agent to real tools and data</a:t>
+            </a:r>
+          </a:p>
+          <a:p>
+            <a:pPr>
+              <a:spcAft>
+                <a:spcPts val="1100"/>
+              </a:spcAft>
+            </a:pPr>
+            <a:r>
+              <a:rPr sz="1900" b="0">
+                <a:solidFill>
+                  <a:srgbClr val="1A1A1A"/>
+                </a:solidFill>
+                <a:latin typeface="Segoe UI"/>
+              </a:rPr>
+              <a:t>•  Our ABAP MCP server exposes the system: read object source, DDIC and CDS metadata, where-used, </a:t>
+            </a:r>
+            <a:r>
+              <a:rPr sz="1900" b="1">
+                <a:solidFill>
+                  <a:srgbClr val="1A1A1A"/>
+                </a:solidFill>
+                <a:latin typeface="Segoe UI"/>
+              </a:rPr>
+              <a:t>API release state</a:t>
+            </a:r>
+            <a:r>
+              <a:rPr sz="1900" b="0">
+                <a:solidFill>
+                  <a:srgbClr val="1A1A1A"/>
+                </a:solidFill>
+                <a:latin typeface="Segoe UI"/>
+              </a:rPr>
+              <a:t>, syntax check, ATC, ABAP Unit</a:t>
+            </a:r>
+          </a:p>
+          <a:p>
+            <a:pPr>
+              <a:spcAft>
+                <a:spcPts val="1100"/>
+              </a:spcAft>
+            </a:pPr>
+            <a:r>
+              <a:rPr sz="1900" b="0">
+                <a:solidFill>
+                  <a:srgbClr val="1A1A1A"/>
+                </a:solidFill>
+                <a:latin typeface="Segoe UI"/>
+              </a:rPr>
+              <a:t>•  The agent stops guessing about our system and starts reading it</a:t>
+            </a:r>
+          </a:p>
+          <a:p>
+            <a:pPr>
+              <a:spcAft>
+                <a:spcPts val="1100"/>
+              </a:spcAft>
+            </a:pPr>
+            <a:r>
+              <a:rPr sz="1900" b="0">
+                <a:solidFill>
+                  <a:srgbClr val="1A1A1A"/>
+                </a:solidFill>
+                <a:latin typeface="Segoe UI"/>
+              </a:rPr>
+              <a:t>•  Our rule: </a:t>
+            </a:r>
+            <a:r>
+              <a:rPr sz="1900" b="1">
+                <a:solidFill>
+                  <a:srgbClr val="1A1A1A"/>
+                </a:solidFill>
+                <a:latin typeface="Segoe UI"/>
+              </a:rPr>
+              <a:t>reads are free, writes need explicit human confirmation</a:t>
+            </a:r>
+            <a:r>
+              <a:rPr sz="1900" b="0">
+                <a:solidFill>
+                  <a:srgbClr val="1A1A1A"/>
+                </a:solidFill>
+                <a:latin typeface="Segoe UI"/>
+              </a:rPr>
+              <a:t> — no object creation, activation or transport without a yes</a:t>
             </a:r>
           </a:p>
         </p:txBody>
@@ -7763,233 +9245,14 @@
       <p:grpSpPr/>
       <p:sp>
         <p:nvSpPr>
-          <p:cNvPr id="2" name="Title 1"/>
-          <p:cNvSpPr>
-            <a:spLocks noGrp="1"/>
-          </p:cNvSpPr>
-          <p:nvPr>
-            <p:ph type="title"/>
-          </p:nvPr>
-        </p:nvSpPr>
-        <p:spPr/>
-        <p:txBody>
-          <a:bodyPr/>
-          <a:lstStyle/>
-          <a:p>
-            <a:r>
-              <a:rPr sz="3000" b="1">
-                <a:solidFill>
-                  <a:srgbClr val="1A1A1A"/>
-                </a:solidFill>
-                <a:latin typeface="Segoe UI"/>
-              </a:rPr>
-              <a:t>DEMO 1 — Same Ask, Two Results</a:t>
-            </a:r>
-          </a:p>
-        </p:txBody>
-      </p:sp>
-      <p:sp>
-        <p:nvSpPr>
-          <p:cNvPr id="3" name="Content Placeholder 2"/>
-          <p:cNvSpPr>
-            <a:spLocks noGrp="1"/>
-          </p:cNvSpPr>
-          <p:nvPr>
-            <p:ph idx="1"/>
-          </p:nvPr>
+          <p:cNvPr id="2" name="TextBox 1"/>
+          <p:cNvSpPr txBox="1"/>
+          <p:nvPr/>
         </p:nvSpPr>
         <p:spPr>
           <a:xfrm>
-            <a:ext cx="10789920" cy="0"/>
-          </a:xfrm>
-        </p:spPr>
-        <p:txBody>
-          <a:bodyPr wrap="square"/>
-          <a:lstStyle/>
-          <a:p>
-            <a:pPr>
-              <a:spcAft>
-                <a:spcPts val="800"/>
-              </a:spcAft>
-            </a:pPr>
-            <a:r>
-              <a:rPr sz="1900">
-                <a:solidFill>
-                  <a:srgbClr val="1A1A1A"/>
-                </a:solidFill>
-                <a:latin typeface="Segoe UI"/>
-              </a:rPr>
-              <a:t>Ask a bare Copilot: *"create a CDS view for sales order items with customer data"*</a:t>
-            </a:r>
-          </a:p>
-          <a:p>
-            <a:pPr>
-              <a:spcAft>
-                <a:spcPts val="800"/>
-              </a:spcAft>
-            </a:pPr>
-            <a:r>
-              <a:rPr sz="1900">
-                <a:solidFill>
-                  <a:srgbClr val="1A1A1A"/>
-                </a:solidFill>
-                <a:latin typeface="Segoe UI"/>
-              </a:rPr>
-              <a:t>Then: drop in </a:t>
-            </a:r>
-            <a:r>
-              <a:rPr sz="1900">
-                <a:solidFill>
-                  <a:srgbClr val="1A1A1A"/>
-                </a:solidFill>
-                <a:latin typeface="Consolas"/>
-              </a:rPr>
-              <a:t>copilot-instructions.md</a:t>
-            </a:r>
-            <a:r>
-              <a:rPr sz="1900">
-                <a:solidFill>
-                  <a:srgbClr val="1A1A1A"/>
-                </a:solidFill>
-                <a:latin typeface="Segoe UI"/>
-              </a:rPr>
-              <a:t>, run </a:t>
-            </a:r>
-            <a:r>
-              <a:rPr sz="1900">
-                <a:solidFill>
-                  <a:srgbClr val="1A1A1A"/>
-                </a:solidFill>
-                <a:latin typeface="Consolas"/>
-              </a:rPr>
-              <a:t>/cds-view-scaffold</a:t>
-            </a:r>
-            <a:r>
-              <a:rPr sz="1900">
-                <a:solidFill>
-                  <a:srgbClr val="1A1A1A"/>
-                </a:solidFill>
-                <a:latin typeface="Segoe UI"/>
-              </a:rPr>
-              <a:t>, same requirement</a:t>
-            </a:r>
-          </a:p>
-          <a:p>
-            <a:pPr>
-              <a:spcAft>
-                <a:spcPts val="800"/>
-              </a:spcAft>
-            </a:pPr>
-            <a:r>
-              <a:rPr sz="1900">
-                <a:solidFill>
-                  <a:srgbClr val="1A1A1A"/>
-                </a:solidFill>
-                <a:latin typeface="Segoe UI"/>
-              </a:rPr>
-              <a:t>Watch what changes: </a:t>
-            </a:r>
-            <a:r>
-              <a:rPr sz="1900">
-                <a:solidFill>
-                  <a:srgbClr val="1A1A1A"/>
-                </a:solidFill>
-                <a:latin typeface="Consolas"/>
-              </a:rPr>
-              <a:t>ZI_</a:t>
-            </a:r>
-            <a:r>
-              <a:rPr sz="1900">
-                <a:solidFill>
-                  <a:srgbClr val="1A1A1A"/>
-                </a:solidFill>
-                <a:latin typeface="Segoe UI"/>
-              </a:rPr>
-              <a:t> / </a:t>
-            </a:r>
-            <a:r>
-              <a:rPr sz="1900">
-                <a:solidFill>
-                  <a:srgbClr val="1A1A1A"/>
-                </a:solidFill>
-                <a:latin typeface="Consolas"/>
-              </a:rPr>
-              <a:t>ZC_</a:t>
-            </a:r>
-            <a:r>
-              <a:rPr sz="1900">
-                <a:solidFill>
-                  <a:srgbClr val="1A1A1A"/>
-                </a:solidFill>
-                <a:latin typeface="Segoe UI"/>
-              </a:rPr>
-              <a:t> layering · released CDS as the source · </a:t>
-            </a:r>
-            <a:r>
-              <a:rPr sz="1900">
-                <a:solidFill>
-                  <a:srgbClr val="1A1A1A"/>
-                </a:solidFill>
-                <a:latin typeface="Consolas"/>
-              </a:rPr>
-              <a:t>@UI</a:t>
-            </a:r>
-            <a:r>
-              <a:rPr sz="1900">
-                <a:solidFill>
-                  <a:srgbClr val="1A1A1A"/>
-                </a:solidFill>
-                <a:latin typeface="Segoe UI"/>
-              </a:rPr>
-              <a:t> moved to a metadata extension · </a:t>
-            </a:r>
-            <a:r>
-              <a:rPr sz="1900">
-                <a:solidFill>
-                  <a:srgbClr val="1A1A1A"/>
-                </a:solidFill>
-                <a:latin typeface="Consolas"/>
-              </a:rPr>
-              <a:t>[CONFIRM in ADT]</a:t>
-            </a:r>
-            <a:r>
-              <a:rPr sz="1900">
-                <a:solidFill>
-                  <a:srgbClr val="1A1A1A"/>
-                </a:solidFill>
-                <a:latin typeface="Segoe UI"/>
-              </a:rPr>
-              <a:t> where it doesn't know</a:t>
-            </a:r>
-          </a:p>
-          <a:p>
-            <a:pPr>
-              <a:spcAft>
-                <a:spcPts val="800"/>
-              </a:spcAft>
-            </a:pPr>
-            <a:r>
-              <a:rPr b="1" sz="1900">
-                <a:solidFill>
-                  <a:srgbClr val="1A1A1A"/>
-                </a:solidFill>
-                <a:latin typeface="Segoe UI"/>
-              </a:rPr>
-              <a:t>Same model. Same question. We gave it our standards.</a:t>
-            </a:r>
-          </a:p>
-        </p:txBody>
-      </p:sp>
-      <p:sp>
-        <p:nvSpPr>
-          <p:cNvPr id="4" name="TextBox 3"/>
-          <p:cNvSpPr txBox="1"/>
-          <p:nvPr/>
-        </p:nvSpPr>
-        <p:spPr>
-          <a:xfrm>
-            <a:off x="10332720" y="256032"/>
-            <a:ext cx="1645920" cy="365760"/>
+            <a:off x="685800" y="384048"/>
+            <a:ext cx="9326880" cy="868680"/>
           </a:xfrm>
           <a:prstGeom prst="rect">
             <a:avLst/>
@@ -7997,12 +9260,91 @@
           <a:noFill/>
         </p:spPr>
         <p:txBody>
-          <a:bodyPr wrap="none">
+          <a:bodyPr wrap="square" anchor="t">
             <a:spAutoFit/>
           </a:bodyPr>
           <a:lstStyle/>
           <a:p>
             <a:r>
+              <a:rPr sz="2900" b="1">
+                <a:solidFill>
+                  <a:srgbClr val="1A1A1A"/>
+                </a:solidFill>
+                <a:latin typeface="Segoe UI"/>
+              </a:rPr>
+              <a:t>DEMO 1 — Same Ask, Two Results</a:t>
+            </a:r>
+          </a:p>
+        </p:txBody>
+      </p:sp>
+      <p:sp>
+        <p:nvSpPr>
+          <p:cNvPr id="3" name="Rectangle 2"/>
+          <p:cNvSpPr/>
+          <p:nvPr/>
+        </p:nvSpPr>
+        <p:spPr>
+          <a:xfrm>
+            <a:off x="685800" y="1316736"/>
+            <a:ext cx="1051560" cy="50292"/>
+          </a:xfrm>
+          <a:prstGeom prst="rect">
+            <a:avLst/>
+          </a:prstGeom>
+          <a:solidFill>
+            <a:srgbClr val="0A6ED1"/>
+          </a:solidFill>
+          <a:ln>
+            <a:noFill/>
+          </a:ln>
+          <a:effectLst/>
+        </p:spPr>
+        <p:style>
+          <a:lnRef idx="1">
+            <a:schemeClr val="accent1"/>
+          </a:lnRef>
+          <a:fillRef idx="3">
+            <a:schemeClr val="accent1"/>
+          </a:fillRef>
+          <a:effectRef idx="2">
+            <a:schemeClr val="accent1"/>
+          </a:effectRef>
+          <a:fontRef idx="minor">
+            <a:schemeClr val="lt1"/>
+          </a:fontRef>
+        </p:style>
+        <p:txBody>
+          <a:bodyPr rtlCol="0" anchor="ctr"/>
+          <a:lstStyle/>
+          <a:p>
+            <a:pPr algn="ctr"/>
+          </a:p>
+        </p:txBody>
+      </p:sp>
+      <p:sp>
+        <p:nvSpPr>
+          <p:cNvPr id="4" name="TextBox 3"/>
+          <p:cNvSpPr txBox="1"/>
+          <p:nvPr/>
+        </p:nvSpPr>
+        <p:spPr>
+          <a:xfrm>
+            <a:off x="10378440" y="457200"/>
+            <a:ext cx="1188720" cy="365760"/>
+          </a:xfrm>
+          <a:prstGeom prst="rect">
+            <a:avLst/>
+          </a:prstGeom>
+          <a:noFill/>
+        </p:spPr>
+        <p:txBody>
+          <a:bodyPr wrap="square">
+            <a:spAutoFit/>
+          </a:bodyPr>
+          <a:lstStyle/>
+          <a:p>
+            <a:pPr algn="r"/>
+            <a:r>
               <a:rPr sz="1200" b="1">
                 <a:solidFill>
                   <a:srgbClr val="0A6ED1"/>
@@ -8010,6 +9352,492 @@
                 <a:latin typeface="Segoe UI"/>
               </a:rPr>
               <a:t>10:00</a:t>
+            </a:r>
+          </a:p>
+        </p:txBody>
+      </p:sp>
+      <p:sp>
+        <p:nvSpPr>
+          <p:cNvPr id="5" name="Rounded Rectangle 4"/>
+          <p:cNvSpPr/>
+          <p:nvPr/>
+        </p:nvSpPr>
+        <p:spPr>
+          <a:xfrm>
+            <a:off x="685800" y="2051364"/>
+            <a:ext cx="5181447" cy="658368"/>
+          </a:xfrm>
+          <a:prstGeom prst="roundRect">
+            <a:avLst/>
+          </a:prstGeom>
+          <a:solidFill>
+            <a:srgbClr val="868B93"/>
+          </a:solidFill>
+          <a:ln>
+            <a:noFill/>
+          </a:ln>
+          <a:effectLst/>
+        </p:spPr>
+        <p:style>
+          <a:lnRef idx="1">
+            <a:schemeClr val="accent1"/>
+          </a:lnRef>
+          <a:fillRef idx="3">
+            <a:schemeClr val="accent1"/>
+          </a:fillRef>
+          <a:effectRef idx="2">
+            <a:schemeClr val="accent1"/>
+          </a:effectRef>
+          <a:fontRef idx="minor">
+            <a:schemeClr val="lt1"/>
+          </a:fontRef>
+        </p:style>
+        <p:txBody>
+          <a:bodyPr rtlCol="0" anchor="ctr" wrap="square" lIns="146304" rIns="146304" tIns="109728" bIns="109728"/>
+          <a:lstStyle/>
+          <a:p>
+            <a:pPr algn="ctr"/>
+            <a:r>
+              <a:rPr sz="1700" b="1">
+                <a:solidFill>
+                  <a:srgbClr val="FFFFFF"/>
+                </a:solidFill>
+                <a:latin typeface="Segoe UI"/>
+              </a:rPr>
+              <a:t>Bare Copilot</a:t>
+            </a:r>
+          </a:p>
+        </p:txBody>
+      </p:sp>
+      <p:sp>
+        <p:nvSpPr>
+          <p:cNvPr id="6" name="Rounded Rectangle 5"/>
+          <p:cNvSpPr/>
+          <p:nvPr/>
+        </p:nvSpPr>
+        <p:spPr>
+          <a:xfrm>
+            <a:off x="685800" y="2782884"/>
+            <a:ext cx="5181447" cy="2508382"/>
+          </a:xfrm>
+          <a:prstGeom prst="roundRect">
+            <a:avLst/>
+          </a:prstGeom>
+          <a:solidFill>
+            <a:srgbClr val="F7F9FC"/>
+          </a:solidFill>
+          <a:ln w="15875">
+            <a:solidFill>
+              <a:srgbClr val="D5DFEA"/>
+            </a:solidFill>
+          </a:ln>
+          <a:effectLst/>
+        </p:spPr>
+        <p:style>
+          <a:lnRef idx="1">
+            <a:schemeClr val="accent1"/>
+          </a:lnRef>
+          <a:fillRef idx="3">
+            <a:schemeClr val="accent1"/>
+          </a:fillRef>
+          <a:effectRef idx="2">
+            <a:schemeClr val="accent1"/>
+          </a:effectRef>
+          <a:fontRef idx="minor">
+            <a:schemeClr val="lt1"/>
+          </a:fontRef>
+        </p:style>
+        <p:txBody>
+          <a:bodyPr rtlCol="0" anchor="t" wrap="square" lIns="146304" rIns="146304" tIns="109728" bIns="109728"/>
+          <a:lstStyle/>
+          <a:p>
+            <a:pPr algn="ctr">
+              <a:spcAft>
+                <a:spcPts val="800"/>
+              </a:spcAft>
+            </a:pPr>
+            <a:r>
+              <a:rPr sz="1600" b="0">
+                <a:solidFill>
+                  <a:srgbClr val="1A1A1A"/>
+                </a:solidFill>
+                <a:latin typeface="Segoe UI"/>
+              </a:rPr>
+              <a:t>•  Direct </a:t>
+            </a:r>
+            <a:r>
+              <a:rPr sz="1600" b="0">
+                <a:solidFill>
+                  <a:srgbClr val="1A1A1A"/>
+                </a:solidFill>
+                <a:latin typeface="Consolas"/>
+              </a:rPr>
+              <a:t>SELECT</a:t>
+            </a:r>
+            <a:r>
+              <a:rPr sz="1600" b="0">
+                <a:solidFill>
+                  <a:srgbClr val="1A1A1A"/>
+                </a:solidFill>
+                <a:latin typeface="Segoe UI"/>
+              </a:rPr>
+              <a:t> on standard tables</a:t>
+            </a:r>
+          </a:p>
+          <a:p>
+            <a:pPr>
+              <a:spcAft>
+                <a:spcPts val="800"/>
+              </a:spcAft>
+            </a:pPr>
+            <a:r>
+              <a:rPr sz="1600" b="0">
+                <a:solidFill>
+                  <a:srgbClr val="1A1A1A"/>
+                </a:solidFill>
+                <a:latin typeface="Segoe UI"/>
+              </a:rPr>
+              <a:t>•  Invented field names, stated confidently</a:t>
+            </a:r>
+          </a:p>
+          <a:p>
+            <a:pPr>
+              <a:spcAft>
+                <a:spcPts val="800"/>
+              </a:spcAft>
+            </a:pPr>
+            <a:r>
+              <a:rPr sz="1600" b="0">
+                <a:solidFill>
+                  <a:srgbClr val="1A1A1A"/>
+                </a:solidFill>
+                <a:latin typeface="Segoe UI"/>
+              </a:rPr>
+              <a:t>•  Classic, pre-7.4 ABAP style</a:t>
+            </a:r>
+          </a:p>
+          <a:p>
+            <a:pPr>
+              <a:spcAft>
+                <a:spcPts val="800"/>
+              </a:spcAft>
+            </a:pPr>
+            <a:r>
+              <a:rPr sz="1600" b="0">
+                <a:solidFill>
+                  <a:srgbClr val="1A1A1A"/>
+                </a:solidFill>
+                <a:latin typeface="Segoe UI"/>
+              </a:rPr>
+              <a:t>•  No layering, no metadata extension</a:t>
+            </a:r>
+          </a:p>
+          <a:p>
+            <a:pPr>
+              <a:spcAft>
+                <a:spcPts val="800"/>
+              </a:spcAft>
+            </a:pPr>
+            <a:r>
+              <a:rPr sz="1600" b="0">
+                <a:solidFill>
+                  <a:srgbClr val="1A1A1A"/>
+                </a:solidFill>
+                <a:latin typeface="Segoe UI"/>
+              </a:rPr>
+              <a:t>•  No idea what our release allows</a:t>
+            </a:r>
+          </a:p>
+        </p:txBody>
+      </p:sp>
+      <p:sp>
+        <p:nvSpPr>
+          <p:cNvPr id="7" name="Rounded Rectangle 6"/>
+          <p:cNvSpPr/>
+          <p:nvPr/>
+        </p:nvSpPr>
+        <p:spPr>
+          <a:xfrm>
+            <a:off x="6324447" y="2051364"/>
+            <a:ext cx="5181447" cy="658368"/>
+          </a:xfrm>
+          <a:prstGeom prst="roundRect">
+            <a:avLst/>
+          </a:prstGeom>
+          <a:solidFill>
+            <a:srgbClr val="0A6ED1"/>
+          </a:solidFill>
+          <a:ln>
+            <a:noFill/>
+          </a:ln>
+          <a:effectLst/>
+        </p:spPr>
+        <p:style>
+          <a:lnRef idx="1">
+            <a:schemeClr val="accent1"/>
+          </a:lnRef>
+          <a:fillRef idx="3">
+            <a:schemeClr val="accent1"/>
+          </a:fillRef>
+          <a:effectRef idx="2">
+            <a:schemeClr val="accent1"/>
+          </a:effectRef>
+          <a:fontRef idx="minor">
+            <a:schemeClr val="lt1"/>
+          </a:fontRef>
+        </p:style>
+        <p:txBody>
+          <a:bodyPr rtlCol="0" anchor="ctr" wrap="square" lIns="146304" rIns="146304" tIns="109728" bIns="109728"/>
+          <a:lstStyle/>
+          <a:p>
+            <a:pPr algn="ctr"/>
+            <a:r>
+              <a:rPr sz="1700" b="1">
+                <a:solidFill>
+                  <a:srgbClr val="FFFFFF"/>
+                </a:solidFill>
+                <a:latin typeface="Segoe UI"/>
+              </a:rPr>
+              <a:t>+ Instructions &amp; </a:t>
+            </a:r>
+            <a:r>
+              <a:rPr sz="1700" b="1">
+                <a:solidFill>
+                  <a:srgbClr val="FFFFFF"/>
+                </a:solidFill>
+                <a:latin typeface="Consolas"/>
+              </a:rPr>
+              <a:t>/cds-view-scaffold</a:t>
+            </a:r>
+          </a:p>
+        </p:txBody>
+      </p:sp>
+      <p:sp>
+        <p:nvSpPr>
+          <p:cNvPr id="8" name="Rounded Rectangle 7"/>
+          <p:cNvSpPr/>
+          <p:nvPr/>
+        </p:nvSpPr>
+        <p:spPr>
+          <a:xfrm>
+            <a:off x="6324447" y="2782884"/>
+            <a:ext cx="5181447" cy="2508382"/>
+          </a:xfrm>
+          <a:prstGeom prst="roundRect">
+            <a:avLst/>
+          </a:prstGeom>
+          <a:solidFill>
+            <a:srgbClr val="F7F9FC"/>
+          </a:solidFill>
+          <a:ln w="15875">
+            <a:solidFill>
+              <a:srgbClr val="D5DFEA"/>
+            </a:solidFill>
+          </a:ln>
+          <a:effectLst/>
+        </p:spPr>
+        <p:style>
+          <a:lnRef idx="1">
+            <a:schemeClr val="accent1"/>
+          </a:lnRef>
+          <a:fillRef idx="3">
+            <a:schemeClr val="accent1"/>
+          </a:fillRef>
+          <a:effectRef idx="2">
+            <a:schemeClr val="accent1"/>
+          </a:effectRef>
+          <a:fontRef idx="minor">
+            <a:schemeClr val="lt1"/>
+          </a:fontRef>
+        </p:style>
+        <p:txBody>
+          <a:bodyPr rtlCol="0" anchor="t" wrap="square" lIns="146304" rIns="146304" tIns="109728" bIns="109728"/>
+          <a:lstStyle/>
+          <a:p>
+            <a:pPr algn="ctr">
+              <a:spcAft>
+                <a:spcPts val="800"/>
+              </a:spcAft>
+            </a:pPr>
+            <a:r>
+              <a:rPr sz="1600" b="0">
+                <a:solidFill>
+                  <a:srgbClr val="1A1A1A"/>
+                </a:solidFill>
+                <a:latin typeface="Segoe UI"/>
+              </a:rPr>
+              <a:t>•  </a:t>
+            </a:r>
+            <a:r>
+              <a:rPr sz="1600" b="0">
+                <a:solidFill>
+                  <a:srgbClr val="1A1A1A"/>
+                </a:solidFill>
+                <a:latin typeface="Consolas"/>
+              </a:rPr>
+              <a:t>ZI_</a:t>
+            </a:r>
+            <a:r>
+              <a:rPr sz="1600" b="0">
+                <a:solidFill>
+                  <a:srgbClr val="1A1A1A"/>
+                </a:solidFill>
+                <a:latin typeface="Segoe UI"/>
+              </a:rPr>
+              <a:t> / </a:t>
+            </a:r>
+            <a:r>
+              <a:rPr sz="1600" b="0">
+                <a:solidFill>
+                  <a:srgbClr val="1A1A1A"/>
+                </a:solidFill>
+                <a:latin typeface="Consolas"/>
+              </a:rPr>
+              <a:t>ZC_</a:t>
+            </a:r>
+            <a:r>
+              <a:rPr sz="1600" b="0">
+                <a:solidFill>
+                  <a:srgbClr val="1A1A1A"/>
+                </a:solidFill>
+                <a:latin typeface="Segoe UI"/>
+              </a:rPr>
+              <a:t> layering</a:t>
+            </a:r>
+          </a:p>
+          <a:p>
+            <a:pPr>
+              <a:spcAft>
+                <a:spcPts val="800"/>
+              </a:spcAft>
+            </a:pPr>
+            <a:r>
+              <a:rPr sz="1600" b="0">
+                <a:solidFill>
+                  <a:srgbClr val="1A1A1A"/>
+                </a:solidFill>
+                <a:latin typeface="Segoe UI"/>
+              </a:rPr>
+              <a:t>•  Released CDS as the data source</a:t>
+            </a:r>
+          </a:p>
+          <a:p>
+            <a:pPr>
+              <a:spcAft>
+                <a:spcPts val="800"/>
+              </a:spcAft>
+            </a:pPr>
+            <a:r>
+              <a:rPr sz="1600" b="0">
+                <a:solidFill>
+                  <a:srgbClr val="1A1A1A"/>
+                </a:solidFill>
+                <a:latin typeface="Segoe UI"/>
+              </a:rPr>
+              <a:t>•  </a:t>
+            </a:r>
+            <a:r>
+              <a:rPr sz="1600" b="0">
+                <a:solidFill>
+                  <a:srgbClr val="1A1A1A"/>
+                </a:solidFill>
+                <a:latin typeface="Consolas"/>
+              </a:rPr>
+              <a:t>@UI</a:t>
+            </a:r>
+            <a:r>
+              <a:rPr sz="1600" b="0">
+                <a:solidFill>
+                  <a:srgbClr val="1A1A1A"/>
+                </a:solidFill>
+                <a:latin typeface="Segoe UI"/>
+              </a:rPr>
+              <a:t> moved to a metadata extension</a:t>
+            </a:r>
+          </a:p>
+          <a:p>
+            <a:pPr>
+              <a:spcAft>
+                <a:spcPts val="800"/>
+              </a:spcAft>
+            </a:pPr>
+            <a:r>
+              <a:rPr sz="1600" b="0">
+                <a:solidFill>
+                  <a:srgbClr val="1A1A1A"/>
+                </a:solidFill>
+                <a:latin typeface="Segoe UI"/>
+              </a:rPr>
+              <a:t>•  Our naming and package conventions</a:t>
+            </a:r>
+          </a:p>
+          <a:p>
+            <a:pPr>
+              <a:spcAft>
+                <a:spcPts val="800"/>
+              </a:spcAft>
+            </a:pPr>
+            <a:r>
+              <a:rPr sz="1600" b="0">
+                <a:solidFill>
+                  <a:srgbClr val="1A1A1A"/>
+                </a:solidFill>
+                <a:latin typeface="Segoe UI"/>
+              </a:rPr>
+              <a:t>•  </a:t>
+            </a:r>
+            <a:r>
+              <a:rPr sz="1600" b="0">
+                <a:solidFill>
+                  <a:srgbClr val="1A1A1A"/>
+                </a:solidFill>
+                <a:latin typeface="Consolas"/>
+              </a:rPr>
+              <a:t>[CONFIRM in ADT]</a:t>
+            </a:r>
+            <a:r>
+              <a:rPr sz="1600" b="0">
+                <a:solidFill>
+                  <a:srgbClr val="1A1A1A"/>
+                </a:solidFill>
+                <a:latin typeface="Segoe UI"/>
+              </a:rPr>
+              <a:t> where it doesn't know</a:t>
+            </a:r>
+          </a:p>
+        </p:txBody>
+      </p:sp>
+      <p:sp>
+        <p:nvSpPr>
+          <p:cNvPr id="9" name="TextBox 8"/>
+          <p:cNvSpPr txBox="1"/>
+          <p:nvPr/>
+        </p:nvSpPr>
+        <p:spPr>
+          <a:xfrm>
+            <a:off x="685800" y="5852160"/>
+            <a:ext cx="10817352" cy="411480"/>
+          </a:xfrm>
+          <a:prstGeom prst="rect">
+            <a:avLst/>
+          </a:prstGeom>
+          <a:noFill/>
+        </p:spPr>
+        <p:txBody>
+          <a:bodyPr wrap="square">
+            <a:spAutoFit/>
+          </a:bodyPr>
+          <a:lstStyle/>
+          <a:p>
+            <a:pPr algn="ctr"/>
+            <a:r>
+              <a:rPr sz="1600" b="1">
+                <a:solidFill>
+                  <a:srgbClr val="054A8F"/>
+                </a:solidFill>
+                <a:latin typeface="Segoe UI"/>
+              </a:rPr>
+              <a:t>Same model. Same question. We gave it our standards.</a:t>
             </a:r>
           </a:p>
         </p:txBody>
@@ -8034,161 +9862,14 @@
       <p:grpSpPr/>
       <p:sp>
         <p:nvSpPr>
-          <p:cNvPr id="2" name="Title 1"/>
-          <p:cNvSpPr>
-            <a:spLocks noGrp="1"/>
-          </p:cNvSpPr>
-          <p:nvPr>
-            <p:ph type="title"/>
-          </p:nvPr>
-        </p:nvSpPr>
-        <p:spPr/>
-        <p:txBody>
-          <a:bodyPr/>
-          <a:lstStyle/>
-          <a:p>
-            <a:r>
-              <a:rPr sz="3000" b="1">
-                <a:solidFill>
-                  <a:srgbClr val="1A1A1A"/>
-                </a:solidFill>
-                <a:latin typeface="Segoe UI"/>
-              </a:rPr>
-              <a:t>DEMO 2 — Grounding: Guessing vs Reading</a:t>
-            </a:r>
-          </a:p>
-        </p:txBody>
-      </p:sp>
-      <p:sp>
-        <p:nvSpPr>
-          <p:cNvPr id="3" name="Content Placeholder 2"/>
-          <p:cNvSpPr>
-            <a:spLocks noGrp="1"/>
-          </p:cNvSpPr>
-          <p:nvPr>
-            <p:ph idx="1"/>
-          </p:nvPr>
+          <p:cNvPr id="2" name="TextBox 1"/>
+          <p:cNvSpPr txBox="1"/>
+          <p:nvPr/>
         </p:nvSpPr>
         <p:spPr>
           <a:xfrm>
-            <a:ext cx="10789920" cy="0"/>
-          </a:xfrm>
-        </p:spPr>
-        <p:txBody>
-          <a:bodyPr wrap="square"/>
-          <a:lstStyle/>
-          <a:p>
-            <a:pPr>
-              <a:spcAft>
-                <a:spcPts val="800"/>
-              </a:spcAft>
-            </a:pPr>
-            <a:r>
-              <a:rPr sz="1900">
-                <a:solidFill>
-                  <a:srgbClr val="1A1A1A"/>
-                </a:solidFill>
-                <a:latin typeface="Segoe UI"/>
-              </a:rPr>
-              <a:t>Without MCP: *"what fields does </a:t>
-            </a:r>
-            <a:r>
-              <a:rPr sz="1900">
-                <a:solidFill>
-                  <a:srgbClr val="1A1A1A"/>
-                </a:solidFill>
-                <a:latin typeface="Consolas"/>
-              </a:rPr>
-              <a:t>&lt;our custom entity&gt;</a:t>
-            </a:r>
-            <a:r>
-              <a:rPr sz="1900">
-                <a:solidFill>
-                  <a:srgbClr val="1A1A1A"/>
-                </a:solidFill>
-                <a:latin typeface="Segoe UI"/>
-              </a:rPr>
-              <a:t> have, and is </a:t>
-            </a:r>
-            <a:r>
-              <a:rPr sz="1900">
-                <a:solidFill>
-                  <a:srgbClr val="1A1A1A"/>
-                </a:solidFill>
-                <a:latin typeface="Consolas"/>
-              </a:rPr>
-              <a:t>&lt;SAP object&gt;</a:t>
-            </a:r>
-            <a:r>
-              <a:rPr sz="1900">
-                <a:solidFill>
-                  <a:srgbClr val="1A1A1A"/>
-                </a:solidFill>
-                <a:latin typeface="Segoe UI"/>
-              </a:rPr>
-              <a:t> released?"* → a plausible, unverifiable answer</a:t>
-            </a:r>
-          </a:p>
-          <a:p>
-            <a:pPr>
-              <a:spcAft>
-                <a:spcPts val="800"/>
-              </a:spcAft>
-            </a:pPr>
-            <a:r>
-              <a:rPr sz="1900">
-                <a:solidFill>
-                  <a:srgbClr val="1A1A1A"/>
-                </a:solidFill>
-                <a:latin typeface="Segoe UI"/>
-              </a:rPr>
-              <a:t>With MCP connected: the real field list, read from the system. The real API state.</a:t>
-            </a:r>
-          </a:p>
-          <a:p>
-            <a:pPr>
-              <a:spcAft>
-                <a:spcPts val="800"/>
-              </a:spcAft>
-            </a:pPr>
-            <a:r>
-              <a:rPr sz="1900">
-                <a:solidFill>
-                  <a:srgbClr val="1A1A1A"/>
-                </a:solidFill>
-                <a:latin typeface="Segoe UI"/>
-              </a:rPr>
-              <a:t>Then a multi-step task: read the object → syntax check → report back</a:t>
-            </a:r>
-          </a:p>
-          <a:p>
-            <a:pPr>
-              <a:spcAft>
-                <a:spcPts val="800"/>
-              </a:spcAft>
-            </a:pPr>
-            <a:r>
-              <a:rPr b="1" sz="1900">
-                <a:solidFill>
-                  <a:srgbClr val="1A1A1A"/>
-                </a:solidFill>
-                <a:latin typeface="Segoe UI"/>
-              </a:rPr>
-              <a:t>Level 2 stops it inventing our standards. Level 3 stops it inventing our system.</a:t>
-            </a:r>
-          </a:p>
-        </p:txBody>
-      </p:sp>
-      <p:sp>
-        <p:nvSpPr>
-          <p:cNvPr id="4" name="TextBox 3"/>
-          <p:cNvSpPr txBox="1"/>
-          <p:nvPr/>
-        </p:nvSpPr>
-        <p:spPr>
-          <a:xfrm>
-            <a:off x="10332720" y="256032"/>
-            <a:ext cx="1645920" cy="365760"/>
+            <a:off x="685800" y="384048"/>
+            <a:ext cx="9326880" cy="868680"/>
           </a:xfrm>
           <a:prstGeom prst="rect">
             <a:avLst/>
@@ -8196,12 +9877,91 @@
           <a:noFill/>
         </p:spPr>
         <p:txBody>
-          <a:bodyPr wrap="none">
+          <a:bodyPr wrap="square" anchor="t">
             <a:spAutoFit/>
           </a:bodyPr>
           <a:lstStyle/>
           <a:p>
             <a:r>
+              <a:rPr sz="2900" b="1">
+                <a:solidFill>
+                  <a:srgbClr val="1A1A1A"/>
+                </a:solidFill>
+                <a:latin typeface="Segoe UI"/>
+              </a:rPr>
+              <a:t>DEMO 2 — Grounding: Guessing vs Reading</a:t>
+            </a:r>
+          </a:p>
+        </p:txBody>
+      </p:sp>
+      <p:sp>
+        <p:nvSpPr>
+          <p:cNvPr id="3" name="Rectangle 2"/>
+          <p:cNvSpPr/>
+          <p:nvPr/>
+        </p:nvSpPr>
+        <p:spPr>
+          <a:xfrm>
+            <a:off x="685800" y="1316736"/>
+            <a:ext cx="1051560" cy="50292"/>
+          </a:xfrm>
+          <a:prstGeom prst="rect">
+            <a:avLst/>
+          </a:prstGeom>
+          <a:solidFill>
+            <a:srgbClr val="0A6ED1"/>
+          </a:solidFill>
+          <a:ln>
+            <a:noFill/>
+          </a:ln>
+          <a:effectLst/>
+        </p:spPr>
+        <p:style>
+          <a:lnRef idx="1">
+            <a:schemeClr val="accent1"/>
+          </a:lnRef>
+          <a:fillRef idx="3">
+            <a:schemeClr val="accent1"/>
+          </a:fillRef>
+          <a:effectRef idx="2">
+            <a:schemeClr val="accent1"/>
+          </a:effectRef>
+          <a:fontRef idx="minor">
+            <a:schemeClr val="lt1"/>
+          </a:fontRef>
+        </p:style>
+        <p:txBody>
+          <a:bodyPr rtlCol="0" anchor="ctr"/>
+          <a:lstStyle/>
+          <a:p>
+            <a:pPr algn="ctr"/>
+          </a:p>
+        </p:txBody>
+      </p:sp>
+      <p:sp>
+        <p:nvSpPr>
+          <p:cNvPr id="4" name="TextBox 3"/>
+          <p:cNvSpPr txBox="1"/>
+          <p:nvPr/>
+        </p:nvSpPr>
+        <p:spPr>
+          <a:xfrm>
+            <a:off x="10378440" y="457200"/>
+            <a:ext cx="1188720" cy="365760"/>
+          </a:xfrm>
+          <a:prstGeom prst="rect">
+            <a:avLst/>
+          </a:prstGeom>
+          <a:noFill/>
+        </p:spPr>
+        <p:txBody>
+          <a:bodyPr wrap="square">
+            <a:spAutoFit/>
+          </a:bodyPr>
+          <a:lstStyle/>
+          <a:p>
+            <a:pPr algn="r"/>
+            <a:r>
               <a:rPr sz="1200" b="1">
                 <a:solidFill>
                   <a:srgbClr val="0A6ED1"/>
@@ -8209,6 +9969,361 @@
                 <a:latin typeface="Segoe UI"/>
               </a:rPr>
               <a:t>10:00</a:t>
+            </a:r>
+          </a:p>
+        </p:txBody>
+      </p:sp>
+      <p:sp>
+        <p:nvSpPr>
+          <p:cNvPr id="5" name="Rounded Rectangle 4"/>
+          <p:cNvSpPr/>
+          <p:nvPr/>
+        </p:nvSpPr>
+        <p:spPr>
+          <a:xfrm>
+            <a:off x="685800" y="2051364"/>
+            <a:ext cx="5181447" cy="658368"/>
+          </a:xfrm>
+          <a:prstGeom prst="roundRect">
+            <a:avLst/>
+          </a:prstGeom>
+          <a:solidFill>
+            <a:srgbClr val="868B93"/>
+          </a:solidFill>
+          <a:ln>
+            <a:noFill/>
+          </a:ln>
+          <a:effectLst/>
+        </p:spPr>
+        <p:style>
+          <a:lnRef idx="1">
+            <a:schemeClr val="accent1"/>
+          </a:lnRef>
+          <a:fillRef idx="3">
+            <a:schemeClr val="accent1"/>
+          </a:fillRef>
+          <a:effectRef idx="2">
+            <a:schemeClr val="accent1"/>
+          </a:effectRef>
+          <a:fontRef idx="minor">
+            <a:schemeClr val="lt1"/>
+          </a:fontRef>
+        </p:style>
+        <p:txBody>
+          <a:bodyPr rtlCol="0" anchor="ctr" wrap="square" lIns="146304" rIns="146304" tIns="109728" bIns="109728"/>
+          <a:lstStyle/>
+          <a:p>
+            <a:pPr algn="ctr"/>
+            <a:r>
+              <a:rPr sz="1700" b="1">
+                <a:solidFill>
+                  <a:srgbClr val="FFFFFF"/>
+                </a:solidFill>
+                <a:latin typeface="Segoe UI"/>
+              </a:rPr>
+              <a:t>Without MCP</a:t>
+            </a:r>
+          </a:p>
+        </p:txBody>
+      </p:sp>
+      <p:sp>
+        <p:nvSpPr>
+          <p:cNvPr id="6" name="Rounded Rectangle 5"/>
+          <p:cNvSpPr/>
+          <p:nvPr/>
+        </p:nvSpPr>
+        <p:spPr>
+          <a:xfrm>
+            <a:off x="685800" y="2782884"/>
+            <a:ext cx="5181447" cy="2508382"/>
+          </a:xfrm>
+          <a:prstGeom prst="roundRect">
+            <a:avLst/>
+          </a:prstGeom>
+          <a:solidFill>
+            <a:srgbClr val="F7F9FC"/>
+          </a:solidFill>
+          <a:ln w="15875">
+            <a:solidFill>
+              <a:srgbClr val="D5DFEA"/>
+            </a:solidFill>
+          </a:ln>
+          <a:effectLst/>
+        </p:spPr>
+        <p:style>
+          <a:lnRef idx="1">
+            <a:schemeClr val="accent1"/>
+          </a:lnRef>
+          <a:fillRef idx="3">
+            <a:schemeClr val="accent1"/>
+          </a:fillRef>
+          <a:effectRef idx="2">
+            <a:schemeClr val="accent1"/>
+          </a:effectRef>
+          <a:fontRef idx="minor">
+            <a:schemeClr val="lt1"/>
+          </a:fontRef>
+        </p:style>
+        <p:txBody>
+          <a:bodyPr rtlCol="0" anchor="t" wrap="square" lIns="146304" rIns="146304" tIns="109728" bIns="109728"/>
+          <a:lstStyle/>
+          <a:p>
+            <a:pPr algn="ctr">
+              <a:spcAft>
+                <a:spcPts val="800"/>
+              </a:spcAft>
+            </a:pPr>
+            <a:r>
+              <a:rPr sz="1600" b="0">
+                <a:solidFill>
+                  <a:srgbClr val="1A1A1A"/>
+                </a:solidFill>
+                <a:latin typeface="Segoe UI"/>
+              </a:rPr>
+              <a:t>•  A plausible field list — that nobody can verify</a:t>
+            </a:r>
+          </a:p>
+          <a:p>
+            <a:pPr>
+              <a:spcAft>
+                <a:spcPts val="800"/>
+              </a:spcAft>
+            </a:pPr>
+            <a:r>
+              <a:rPr sz="1600" b="0">
+                <a:solidFill>
+                  <a:srgbClr val="1A1A1A"/>
+                </a:solidFill>
+                <a:latin typeface="Segoe UI"/>
+              </a:rPr>
+              <a:t>•  "Yes, that's released" — on what basis?</a:t>
+            </a:r>
+          </a:p>
+          <a:p>
+            <a:pPr>
+              <a:spcAft>
+                <a:spcPts val="800"/>
+              </a:spcAft>
+            </a:pPr>
+            <a:r>
+              <a:rPr sz="1600" b="0">
+                <a:solidFill>
+                  <a:srgbClr val="1A1A1A"/>
+                </a:solidFill>
+                <a:latin typeface="Segoe UI"/>
+              </a:rPr>
+              <a:t>•  Confident tone, no source</a:t>
+            </a:r>
+          </a:p>
+          <a:p>
+            <a:pPr>
+              <a:spcAft>
+                <a:spcPts val="800"/>
+              </a:spcAft>
+            </a:pPr>
+            <a:r>
+              <a:rPr sz="1600" b="0">
+                <a:solidFill>
+                  <a:srgbClr val="1A1A1A"/>
+                </a:solidFill>
+                <a:latin typeface="Segoe UI"/>
+              </a:rPr>
+              <a:t>•  You cannot tell right from wrong by reading it</a:t>
+            </a:r>
+          </a:p>
+        </p:txBody>
+      </p:sp>
+      <p:sp>
+        <p:nvSpPr>
+          <p:cNvPr id="7" name="Rounded Rectangle 6"/>
+          <p:cNvSpPr/>
+          <p:nvPr/>
+        </p:nvSpPr>
+        <p:spPr>
+          <a:xfrm>
+            <a:off x="6324447" y="2051364"/>
+            <a:ext cx="5181447" cy="658368"/>
+          </a:xfrm>
+          <a:prstGeom prst="roundRect">
+            <a:avLst/>
+          </a:prstGeom>
+          <a:solidFill>
+            <a:srgbClr val="0A6ED1"/>
+          </a:solidFill>
+          <a:ln>
+            <a:noFill/>
+          </a:ln>
+          <a:effectLst/>
+        </p:spPr>
+        <p:style>
+          <a:lnRef idx="1">
+            <a:schemeClr val="accent1"/>
+          </a:lnRef>
+          <a:fillRef idx="3">
+            <a:schemeClr val="accent1"/>
+          </a:fillRef>
+          <a:effectRef idx="2">
+            <a:schemeClr val="accent1"/>
+          </a:effectRef>
+          <a:fontRef idx="minor">
+            <a:schemeClr val="lt1"/>
+          </a:fontRef>
+        </p:style>
+        <p:txBody>
+          <a:bodyPr rtlCol="0" anchor="ctr" wrap="square" lIns="146304" rIns="146304" tIns="109728" bIns="109728"/>
+          <a:lstStyle/>
+          <a:p>
+            <a:pPr algn="ctr"/>
+            <a:r>
+              <a:rPr sz="1700" b="1">
+                <a:solidFill>
+                  <a:srgbClr val="FFFFFF"/>
+                </a:solidFill>
+                <a:latin typeface="Segoe UI"/>
+              </a:rPr>
+              <a:t>With MCP connected</a:t>
+            </a:r>
+          </a:p>
+        </p:txBody>
+      </p:sp>
+      <p:sp>
+        <p:nvSpPr>
+          <p:cNvPr id="8" name="Rounded Rectangle 7"/>
+          <p:cNvSpPr/>
+          <p:nvPr/>
+        </p:nvSpPr>
+        <p:spPr>
+          <a:xfrm>
+            <a:off x="6324447" y="2782884"/>
+            <a:ext cx="5181447" cy="2508382"/>
+          </a:xfrm>
+          <a:prstGeom prst="roundRect">
+            <a:avLst/>
+          </a:prstGeom>
+          <a:solidFill>
+            <a:srgbClr val="F7F9FC"/>
+          </a:solidFill>
+          <a:ln w="15875">
+            <a:solidFill>
+              <a:srgbClr val="D5DFEA"/>
+            </a:solidFill>
+          </a:ln>
+          <a:effectLst/>
+        </p:spPr>
+        <p:style>
+          <a:lnRef idx="1">
+            <a:schemeClr val="accent1"/>
+          </a:lnRef>
+          <a:fillRef idx="3">
+            <a:schemeClr val="accent1"/>
+          </a:fillRef>
+          <a:effectRef idx="2">
+            <a:schemeClr val="accent1"/>
+          </a:effectRef>
+          <a:fontRef idx="minor">
+            <a:schemeClr val="lt1"/>
+          </a:fontRef>
+        </p:style>
+        <p:txBody>
+          <a:bodyPr rtlCol="0" anchor="t" wrap="square" lIns="146304" rIns="146304" tIns="109728" bIns="109728"/>
+          <a:lstStyle/>
+          <a:p>
+            <a:pPr algn="ctr">
+              <a:spcAft>
+                <a:spcPts val="800"/>
+              </a:spcAft>
+            </a:pPr>
+            <a:r>
+              <a:rPr sz="1600" b="0">
+                <a:solidFill>
+                  <a:srgbClr val="1A1A1A"/>
+                </a:solidFill>
+                <a:latin typeface="Segoe UI"/>
+              </a:rPr>
+              <a:t>•  The real field list, read from the system</a:t>
+            </a:r>
+          </a:p>
+          <a:p>
+            <a:pPr>
+              <a:spcAft>
+                <a:spcPts val="800"/>
+              </a:spcAft>
+            </a:pPr>
+            <a:r>
+              <a:rPr sz="1600" b="0">
+                <a:solidFill>
+                  <a:srgbClr val="1A1A1A"/>
+                </a:solidFill>
+                <a:latin typeface="Segoe UI"/>
+              </a:rPr>
+              <a:t>•  The actual API release state</a:t>
+            </a:r>
+          </a:p>
+          <a:p>
+            <a:pPr>
+              <a:spcAft>
+                <a:spcPts val="800"/>
+              </a:spcAft>
+            </a:pPr>
+            <a:r>
+              <a:rPr sz="1600" b="0">
+                <a:solidFill>
+                  <a:srgbClr val="1A1A1A"/>
+                </a:solidFill>
+                <a:latin typeface="Segoe UI"/>
+              </a:rPr>
+              <a:t>•  Visible tool calls — you see it reach in</a:t>
+            </a:r>
+          </a:p>
+          <a:p>
+            <a:pPr>
+              <a:spcAft>
+                <a:spcPts val="800"/>
+              </a:spcAft>
+            </a:pPr>
+            <a:r>
+              <a:rPr sz="1600" b="0">
+                <a:solidFill>
+                  <a:srgbClr val="1A1A1A"/>
+                </a:solidFill>
+                <a:latin typeface="Segoe UI"/>
+              </a:rPr>
+              <a:t>•  Multi-step: read object → syntax check → report</a:t>
+            </a:r>
+          </a:p>
+        </p:txBody>
+      </p:sp>
+      <p:sp>
+        <p:nvSpPr>
+          <p:cNvPr id="9" name="TextBox 8"/>
+          <p:cNvSpPr txBox="1"/>
+          <p:nvPr/>
+        </p:nvSpPr>
+        <p:spPr>
+          <a:xfrm>
+            <a:off x="685800" y="5852160"/>
+            <a:ext cx="10817352" cy="411480"/>
+          </a:xfrm>
+          <a:prstGeom prst="rect">
+            <a:avLst/>
+          </a:prstGeom>
+          <a:noFill/>
+        </p:spPr>
+        <p:txBody>
+          <a:bodyPr wrap="square">
+            <a:spAutoFit/>
+          </a:bodyPr>
+          <a:lstStyle/>
+          <a:p>
+            <a:pPr algn="ctr"/>
+            <a:r>
+              <a:rPr sz="1600" b="1">
+                <a:solidFill>
+                  <a:srgbClr val="054A8F"/>
+                </a:solidFill>
+                <a:latin typeface="Segoe UI"/>
+              </a:rPr>
+              <a:t>Level 2 stops it inventing our standards. Level 3 stops it inventing our system.</a:t>
             </a:r>
           </a:p>
         </p:txBody>
